--- a/modules/03-advanced-power-query/assets/advanced-power-query.pptx
+++ b/modules/03-advanced-power-query/assets/advanced-power-query.pptx
@@ -119,6 +119,1841 @@
     </a:lvl9pPr>
   </p:defaultTextStyle>
 </p:presentation>
+</file>
+
+<file path=ppt/notesMasters/notesMaster1.xml><?xml version="1.0" encoding="utf-8"?>
+<p:notesMaster xmlns:a="http://schemas.openxmlformats.org/drawingml/2006/main" xmlns:p="http://schemas.openxmlformats.org/presentationml/2006/main" xmlns:r="http://schemas.openxmlformats.org/officeDocument/2006/relationships">
+  <p:cSld>
+    <p:bg>
+      <p:bgRef idx="1001">
+        <a:schemeClr val="bg1"/>
+      </p:bgRef>
+    </p:bg>
+    <p:spTree>
+      <p:nvGrpSpPr>
+        <p:cNvPr id="1" name=""/>
+        <p:cNvGrpSpPr/>
+        <p:nvPr/>
+      </p:nvGrpSpPr>
+      <p:grpSpPr>
+        <a:xfrm>
+          <a:off x="0" y="0"/>
+          <a:ext cx="0" cy="0"/>
+          <a:chOff x="0" y="0"/>
+          <a:chExt cx="0" cy="0"/>
+        </a:xfrm>
+      </p:grpSpPr>
+      <p:sp>
+        <p:nvSpPr>
+          <p:cNvPr id="2" name="Header Placeholder 1"/>
+          <p:cNvSpPr>
+            <a:spLocks noGrp="1"/>
+          </p:cNvSpPr>
+          <p:nvPr>
+            <p:ph type="hdr" sz="quarter"/>
+          </p:nvPr>
+        </p:nvSpPr>
+        <p:spPr>
+          <a:xfrm>
+            <a:off x="0" y="0"/>
+            <a:ext cx="2971800" cy="457200"/>
+          </a:xfrm>
+          <a:prstGeom prst="rect">
+            <a:avLst/>
+          </a:prstGeom>
+        </p:spPr>
+        <p:txBody>
+          <a:bodyPr vert="horz" lIns="91440" tIns="45720" rIns="91440" bIns="45720" rtlCol="0"/>
+          <a:lstStyle>
+            <a:lvl1pPr algn="l">
+              <a:defRPr sz="1200"/>
+            </a:lvl1pPr>
+          </a:lstStyle>
+          <a:p>
+            <a:endParaRPr lang="en-US"/>
+          </a:p>
+        </p:txBody>
+      </p:sp>
+      <p:sp>
+        <p:nvSpPr>
+          <p:cNvPr id="3" name="Date Placeholder 2"/>
+          <p:cNvSpPr>
+            <a:spLocks noGrp="1"/>
+          </p:cNvSpPr>
+          <p:nvPr>
+            <p:ph type="dt" idx="1"/>
+          </p:nvPr>
+        </p:nvSpPr>
+        <p:spPr>
+          <a:xfrm>
+            <a:off x="3884613" y="0"/>
+            <a:ext cx="2971800" cy="457200"/>
+          </a:xfrm>
+          <a:prstGeom prst="rect">
+            <a:avLst/>
+          </a:prstGeom>
+        </p:spPr>
+        <p:txBody>
+          <a:bodyPr vert="horz" lIns="91440" tIns="45720" rIns="91440" bIns="45720" rtlCol="0"/>
+          <a:lstStyle>
+            <a:lvl1pPr algn="r">
+              <a:defRPr sz="1200"/>
+            </a:lvl1pPr>
+          </a:lstStyle>
+          <a:p>
+            <a:fld id="{0F89C1C7-3DCD-1040-A9CF-14679D8B5DDD}" type="datetimeFigureOut">
+              <a:rPr lang="en-US" smtClean="0"/>
+              <a:t>10/17/16</a:t>
+            </a:fld>
+            <a:endParaRPr lang="en-US"/>
+          </a:p>
+        </p:txBody>
+      </p:sp>
+      <p:sp>
+        <p:nvSpPr>
+          <p:cNvPr id="4" name="Slide Image Placeholder 3"/>
+          <p:cNvSpPr>
+            <a:spLocks noGrp="1" noRot="1" noChangeAspect="1"/>
+          </p:cNvSpPr>
+          <p:nvPr>
+            <p:ph type="sldImg" idx="2"/>
+          </p:nvPr>
+        </p:nvSpPr>
+        <p:spPr>
+          <a:xfrm>
+            <a:off x="1143000" y="685800"/>
+            <a:ext cx="4572000" cy="3429000"/>
+          </a:xfrm>
+          <a:prstGeom prst="rect">
+            <a:avLst/>
+          </a:prstGeom>
+          <a:noFill/>
+          <a:ln w="12700">
+            <a:solidFill>
+              <a:prstClr val="black"/>
+            </a:solidFill>
+          </a:ln>
+        </p:spPr>
+        <p:txBody>
+          <a:bodyPr vert="horz" lIns="91440" tIns="45720" rIns="91440" bIns="45720" rtlCol="0" anchor="ctr"/>
+          <a:lstStyle/>
+          <a:p>
+            <a:endParaRPr lang="en-US"/>
+          </a:p>
+        </p:txBody>
+      </p:sp>
+      <p:sp>
+        <p:nvSpPr>
+          <p:cNvPr id="5" name="Notes Placeholder 4"/>
+          <p:cNvSpPr>
+            <a:spLocks noGrp="1"/>
+          </p:cNvSpPr>
+          <p:nvPr>
+            <p:ph type="body" sz="quarter" idx="3"/>
+          </p:nvPr>
+        </p:nvSpPr>
+        <p:spPr>
+          <a:xfrm>
+            <a:off x="685800" y="4343400"/>
+            <a:ext cx="5486400" cy="4114800"/>
+          </a:xfrm>
+          <a:prstGeom prst="rect">
+            <a:avLst/>
+          </a:prstGeom>
+        </p:spPr>
+        <p:txBody>
+          <a:bodyPr vert="horz" lIns="91440" tIns="45720" rIns="91440" bIns="45720" rtlCol="0"/>
+          <a:lstStyle/>
+          <a:p>
+            <a:pPr lvl="0"/>
+            <a:r>
+              <a:rPr lang="en-US" smtClean="0"/>
+              <a:t>Click to edit Master text styles</a:t>
+            </a:r>
+          </a:p>
+          <a:p>
+            <a:pPr lvl="1"/>
+            <a:r>
+              <a:rPr lang="en-US" smtClean="0"/>
+              <a:t>Second level</a:t>
+            </a:r>
+          </a:p>
+          <a:p>
+            <a:pPr lvl="2"/>
+            <a:r>
+              <a:rPr lang="en-US" smtClean="0"/>
+              <a:t>Third level</a:t>
+            </a:r>
+          </a:p>
+          <a:p>
+            <a:pPr lvl="3"/>
+            <a:r>
+              <a:rPr lang="en-US" smtClean="0"/>
+              <a:t>Fourth level</a:t>
+            </a:r>
+          </a:p>
+          <a:p>
+            <a:pPr lvl="4"/>
+            <a:r>
+              <a:rPr lang="en-US" smtClean="0"/>
+              <a:t>Fifth level</a:t>
+            </a:r>
+            <a:endParaRPr lang="en-US"/>
+          </a:p>
+        </p:txBody>
+      </p:sp>
+      <p:sp>
+        <p:nvSpPr>
+          <p:cNvPr id="6" name="Footer Placeholder 5"/>
+          <p:cNvSpPr>
+            <a:spLocks noGrp="1"/>
+          </p:cNvSpPr>
+          <p:nvPr>
+            <p:ph type="ftr" sz="quarter" idx="4"/>
+          </p:nvPr>
+        </p:nvSpPr>
+        <p:spPr>
+          <a:xfrm>
+            <a:off x="0" y="8685213"/>
+            <a:ext cx="2971800" cy="457200"/>
+          </a:xfrm>
+          <a:prstGeom prst="rect">
+            <a:avLst/>
+          </a:prstGeom>
+        </p:spPr>
+        <p:txBody>
+          <a:bodyPr vert="horz" lIns="91440" tIns="45720" rIns="91440" bIns="45720" rtlCol="0" anchor="b"/>
+          <a:lstStyle>
+            <a:lvl1pPr algn="l">
+              <a:defRPr sz="1200"/>
+            </a:lvl1pPr>
+          </a:lstStyle>
+          <a:p>
+            <a:endParaRPr lang="en-US"/>
+          </a:p>
+        </p:txBody>
+      </p:sp>
+      <p:sp>
+        <p:nvSpPr>
+          <p:cNvPr id="7" name="Slide Number Placeholder 6"/>
+          <p:cNvSpPr>
+            <a:spLocks noGrp="1"/>
+          </p:cNvSpPr>
+          <p:nvPr>
+            <p:ph type="sldNum" sz="quarter" idx="5"/>
+          </p:nvPr>
+        </p:nvSpPr>
+        <p:spPr>
+          <a:xfrm>
+            <a:off x="3884613" y="8685213"/>
+            <a:ext cx="2971800" cy="457200"/>
+          </a:xfrm>
+          <a:prstGeom prst="rect">
+            <a:avLst/>
+          </a:prstGeom>
+        </p:spPr>
+        <p:txBody>
+          <a:bodyPr vert="horz" lIns="91440" tIns="45720" rIns="91440" bIns="45720" rtlCol="0" anchor="b"/>
+          <a:lstStyle>
+            <a:lvl1pPr algn="r">
+              <a:defRPr sz="1200"/>
+            </a:lvl1pPr>
+          </a:lstStyle>
+          <a:p>
+            <a:fld id="{BB5E49A5-4136-284D-997B-48E1D791AD67}" type="slidenum">
+              <a:rPr lang="en-US" smtClean="0"/>
+              <a:t>‹#›</a:t>
+            </a:fld>
+            <a:endParaRPr lang="en-US"/>
+          </a:p>
+        </p:txBody>
+      </p:sp>
+    </p:spTree>
+    <p:extLst>
+      <p:ext uri="{BB962C8B-B14F-4D97-AF65-F5344CB8AC3E}">
+        <p14:creationId xmlns:p14="http://schemas.microsoft.com/office/powerpoint/2010/main" val="2623252185"/>
+      </p:ext>
+    </p:extLst>
+  </p:cSld>
+  <p:clrMap bg1="lt1" tx1="dk1" bg2="lt2" tx2="dk2" accent1="accent1" accent2="accent2" accent3="accent3" accent4="accent4" accent5="accent5" accent6="accent6" hlink="hlink" folHlink="folHlink"/>
+  <p:notesStyle>
+    <a:lvl1pPr marL="0" algn="l" defTabSz="457200" rtl="0" eaLnBrk="1" latinLnBrk="0" hangingPunct="1">
+      <a:defRPr sz="1200" kern="1200">
+        <a:solidFill>
+          <a:schemeClr val="tx1"/>
+        </a:solidFill>
+        <a:latin typeface="+mn-lt"/>
+        <a:ea typeface="+mn-ea"/>
+        <a:cs typeface="+mn-cs"/>
+      </a:defRPr>
+    </a:lvl1pPr>
+    <a:lvl2pPr marL="457200" algn="l" defTabSz="457200" rtl="0" eaLnBrk="1" latinLnBrk="0" hangingPunct="1">
+      <a:defRPr sz="1200" kern="1200">
+        <a:solidFill>
+          <a:schemeClr val="tx1"/>
+        </a:solidFill>
+        <a:latin typeface="+mn-lt"/>
+        <a:ea typeface="+mn-ea"/>
+        <a:cs typeface="+mn-cs"/>
+      </a:defRPr>
+    </a:lvl2pPr>
+    <a:lvl3pPr marL="914400" algn="l" defTabSz="457200" rtl="0" eaLnBrk="1" latinLnBrk="0" hangingPunct="1">
+      <a:defRPr sz="1200" kern="1200">
+        <a:solidFill>
+          <a:schemeClr val="tx1"/>
+        </a:solidFill>
+        <a:latin typeface="+mn-lt"/>
+        <a:ea typeface="+mn-ea"/>
+        <a:cs typeface="+mn-cs"/>
+      </a:defRPr>
+    </a:lvl3pPr>
+    <a:lvl4pPr marL="1371600" algn="l" defTabSz="457200" rtl="0" eaLnBrk="1" latinLnBrk="0" hangingPunct="1">
+      <a:defRPr sz="1200" kern="1200">
+        <a:solidFill>
+          <a:schemeClr val="tx1"/>
+        </a:solidFill>
+        <a:latin typeface="+mn-lt"/>
+        <a:ea typeface="+mn-ea"/>
+        <a:cs typeface="+mn-cs"/>
+      </a:defRPr>
+    </a:lvl4pPr>
+    <a:lvl5pPr marL="1828800" algn="l" defTabSz="457200" rtl="0" eaLnBrk="1" latinLnBrk="0" hangingPunct="1">
+      <a:defRPr sz="1200" kern="1200">
+        <a:solidFill>
+          <a:schemeClr val="tx1"/>
+        </a:solidFill>
+        <a:latin typeface="+mn-lt"/>
+        <a:ea typeface="+mn-ea"/>
+        <a:cs typeface="+mn-cs"/>
+      </a:defRPr>
+    </a:lvl5pPr>
+    <a:lvl6pPr marL="2286000" algn="l" defTabSz="457200" rtl="0" eaLnBrk="1" latinLnBrk="0" hangingPunct="1">
+      <a:defRPr sz="1200" kern="1200">
+        <a:solidFill>
+          <a:schemeClr val="tx1"/>
+        </a:solidFill>
+        <a:latin typeface="+mn-lt"/>
+        <a:ea typeface="+mn-ea"/>
+        <a:cs typeface="+mn-cs"/>
+      </a:defRPr>
+    </a:lvl6pPr>
+    <a:lvl7pPr marL="2743200" algn="l" defTabSz="457200" rtl="0" eaLnBrk="1" latinLnBrk="0" hangingPunct="1">
+      <a:defRPr sz="1200" kern="1200">
+        <a:solidFill>
+          <a:schemeClr val="tx1"/>
+        </a:solidFill>
+        <a:latin typeface="+mn-lt"/>
+        <a:ea typeface="+mn-ea"/>
+        <a:cs typeface="+mn-cs"/>
+      </a:defRPr>
+    </a:lvl7pPr>
+    <a:lvl8pPr marL="3200400" algn="l" defTabSz="457200" rtl="0" eaLnBrk="1" latinLnBrk="0" hangingPunct="1">
+      <a:defRPr sz="1200" kern="1200">
+        <a:solidFill>
+          <a:schemeClr val="tx1"/>
+        </a:solidFill>
+        <a:latin typeface="+mn-lt"/>
+        <a:ea typeface="+mn-ea"/>
+        <a:cs typeface="+mn-cs"/>
+      </a:defRPr>
+    </a:lvl8pPr>
+    <a:lvl9pPr marL="3657600" algn="l" defTabSz="457200" rtl="0" eaLnBrk="1" latinLnBrk="0" hangingPunct="1">
+      <a:defRPr sz="1200" kern="1200">
+        <a:solidFill>
+          <a:schemeClr val="tx1"/>
+        </a:solidFill>
+        <a:latin typeface="+mn-lt"/>
+        <a:ea typeface="+mn-ea"/>
+        <a:cs typeface="+mn-cs"/>
+      </a:defRPr>
+    </a:lvl9pPr>
+  </p:notesStyle>
+</p:notesMaster>
+</file>
+
+<file path=ppt/notesSlides/notesSlide1.xml><?xml version="1.0" encoding="utf-8"?>
+<p:notes xmlns:a="http://schemas.openxmlformats.org/drawingml/2006/main" xmlns:p="http://schemas.openxmlformats.org/presentationml/2006/main" xmlns:r="http://schemas.openxmlformats.org/officeDocument/2006/relationships">
+  <p:cSld>
+    <p:spTree>
+      <p:nvGrpSpPr>
+        <p:cNvPr id="1" name=""/>
+        <p:cNvGrpSpPr/>
+        <p:nvPr/>
+      </p:nvGrpSpPr>
+      <p:grpSpPr>
+        <a:xfrm>
+          <a:off x="0" y="0"/>
+          <a:ext cx="0" cy="0"/>
+          <a:chOff x="0" y="0"/>
+          <a:chExt cx="0" cy="0"/>
+        </a:xfrm>
+      </p:grpSpPr>
+      <p:sp>
+        <p:nvSpPr>
+          <p:cNvPr id="2" name="Slide Image Placeholder 1"/>
+          <p:cNvSpPr>
+            <a:spLocks noGrp="1"/>
+          </p:cNvSpPr>
+          <p:nvPr>
+            <p:ph type="sldImg" idx="2"/>
+          </p:nvPr>
+        </p:nvSpPr>
+        <p:spPr/>
+      </p:sp>
+      <p:sp>
+        <p:nvSpPr>
+          <p:cNvPr id="3" name="Notes Placeholder 2"/>
+          <p:cNvSpPr>
+            <a:spLocks noGrp="1"/>
+          </p:cNvSpPr>
+          <p:nvPr>
+            <p:ph type="body" idx="3" sz="quarter"/>
+          </p:nvPr>
+        </p:nvSpPr>
+        <p:spPr/>
+        <p:txBody>
+          <a:bodyPr/>
+          <a:lstStyle/>
+          <a:p>
+            <a:r>
+              <a:t>Opening talk track: Welcome students to this module and explain that the goal is not to memorize features. The goal is to understand when a pattern helps authors build more trustworthy, maintainable, user-friendly Power BI solutions.</a:t>
+            </a:r>
+          </a:p>
+          <a:p>
+            <a:r>
+              <a:t>Module framing: Frame this module as repeatable data preparation. Emphasize staging, parameters, source lineage, reusable functions, and visible error review.</a:t>
+            </a:r>
+          </a:p>
+          <a:p>
+            <a:r>
+              <a:t>Set expectations: presentation will introduce the theme, then the lab will let learners build or evaluate the pattern hands-on. Encourage questions about tradeoffs, not just button clicks.</a:t>
+            </a:r>
+          </a:p>
+          <a:p>
+            <a:r>
+              <a:t>Further learning: Power Query M language: https://learn.microsoft.com/powerquery-m/ | Query parameters: https://learn.microsoft.com/power-query/power-query-query-parameters | Error handling: https://learn.microsoft.com/power-query/dealing-with-errors</a:t>
+            </a:r>
+          </a:p>
+        </p:txBody>
+      </p:sp>
+      <p:sp>
+        <p:nvSpPr>
+          <p:cNvPr id="4" name="Slide Number Placeholder 3"/>
+          <p:cNvSpPr>
+            <a:spLocks noGrp="1"/>
+          </p:cNvSpPr>
+          <p:nvPr>
+            <p:ph type="sldNum" idx="5" sz="quarter"/>
+          </p:nvPr>
+        </p:nvSpPr>
+        <p:spPr/>
+      </p:sp>
+    </p:spTree>
+  </p:cSld>
+  <p:clrMapOvr>
+    <a:masterClrMapping/>
+  </p:clrMapOvr>
+</p:notes>
+</file>
+
+<file path=ppt/notesSlides/notesSlide10.xml><?xml version="1.0" encoding="utf-8"?>
+<p:notes xmlns:a="http://schemas.openxmlformats.org/drawingml/2006/main" xmlns:p="http://schemas.openxmlformats.org/presentationml/2006/main" xmlns:r="http://schemas.openxmlformats.org/officeDocument/2006/relationships">
+  <p:cSld>
+    <p:spTree>
+      <p:nvGrpSpPr>
+        <p:cNvPr id="1" name=""/>
+        <p:cNvGrpSpPr/>
+        <p:nvPr/>
+      </p:nvGrpSpPr>
+      <p:grpSpPr>
+        <a:xfrm>
+          <a:off x="0" y="0"/>
+          <a:ext cx="0" cy="0"/>
+          <a:chOff x="0" y="0"/>
+          <a:chExt cx="0" cy="0"/>
+        </a:xfrm>
+      </p:grpSpPr>
+      <p:sp>
+        <p:nvSpPr>
+          <p:cNvPr id="2" name="Slide Image Placeholder 1"/>
+          <p:cNvSpPr>
+            <a:spLocks noGrp="1"/>
+          </p:cNvSpPr>
+          <p:nvPr>
+            <p:ph type="sldImg" idx="2"/>
+          </p:nvPr>
+        </p:nvSpPr>
+        <p:spPr/>
+      </p:sp>
+      <p:sp>
+        <p:nvSpPr>
+          <p:cNvPr id="3" name="Notes Placeholder 2"/>
+          <p:cNvSpPr>
+            <a:spLocks noGrp="1"/>
+          </p:cNvSpPr>
+          <p:nvPr>
+            <p:ph type="body" idx="3" sz="quarter"/>
+          </p:nvPr>
+        </p:nvSpPr>
+        <p:spPr/>
+        <p:txBody>
+          <a:bodyPr/>
+          <a:lstStyle/>
+          <a:p>
+            <a:r>
+              <a:t>Core message: 8. Native queries and source systems.</a:t>
+            </a:r>
+          </a:p>
+          <a:p>
+            <a:r>
+              <a:t>Talking points to expand: Talking points, learner value, and lab connection Talking points • When native queries help • When native queries hurt maintainability Why it helps • Security and gateway considerations Lab connection Coverage: Partial. Use the lab README to demonstrate or discuss this topic. Review terms: considerations, maintainability, security, systems. 10</a:t>
+            </a:r>
+          </a:p>
+          <a:p>
+            <a:r>
+              <a:t>Why it matters: Frame this module as repeatable data preparation. Emphasize staging, parameters, source lineage, reusable functions, and visible error review.</a:t>
+            </a:r>
+          </a:p>
+          <a:p>
+            <a:r>
+              <a:t>How it helps users: connect the technical pattern to clearer decisions, fewer confusing report interactions, better trust in results, or easier support.</a:t>
+            </a:r>
+          </a:p>
+          <a:p>
+            <a:r>
+              <a:t>How it builds on prior lessons: reference the previous layer in the workshop, such as prepared data, a clean model, tested measures, or report UX conventions.</a:t>
+            </a:r>
+          </a:p>
+          <a:p>
+            <a:r>
+              <a:t>Lab connection: Show where this concept appears in the module lab. If the lab path is conceptual or Verify for Gov, explain what learners should document instead of building hands-on.</a:t>
+            </a:r>
+          </a:p>
+          <a:p>
+            <a:r>
+              <a:t>Instructor prompt: Ask one learner to describe the risk of skipping this pattern or using it without validation.</a:t>
+            </a:r>
+          </a:p>
+          <a:p>
+            <a:r>
+              <a:t>Further learning: Power Query M language: https://learn.microsoft.com/powerquery-m/ | Query parameters: https://learn.microsoft.com/power-query/power-query-query-parameters | Error handling: https://learn.microsoft.com/power-query/dealing-with-errors</a:t>
+            </a:r>
+          </a:p>
+        </p:txBody>
+      </p:sp>
+      <p:sp>
+        <p:nvSpPr>
+          <p:cNvPr id="4" name="Slide Number Placeholder 3"/>
+          <p:cNvSpPr>
+            <a:spLocks noGrp="1"/>
+          </p:cNvSpPr>
+          <p:nvPr>
+            <p:ph type="sldNum" idx="5" sz="quarter"/>
+          </p:nvPr>
+        </p:nvSpPr>
+        <p:spPr/>
+      </p:sp>
+    </p:spTree>
+  </p:cSld>
+  <p:clrMapOvr>
+    <a:masterClrMapping/>
+  </p:clrMapOvr>
+</p:notes>
+</file>
+
+<file path=ppt/notesSlides/notesSlide11.xml><?xml version="1.0" encoding="utf-8"?>
+<p:notes xmlns:a="http://schemas.openxmlformats.org/drawingml/2006/main" xmlns:p="http://schemas.openxmlformats.org/presentationml/2006/main" xmlns:r="http://schemas.openxmlformats.org/officeDocument/2006/relationships">
+  <p:cSld>
+    <p:spTree>
+      <p:nvGrpSpPr>
+        <p:cNvPr id="1" name=""/>
+        <p:cNvGrpSpPr/>
+        <p:nvPr/>
+      </p:nvGrpSpPr>
+      <p:grpSpPr>
+        <a:xfrm>
+          <a:off x="0" y="0"/>
+          <a:ext cx="0" cy="0"/>
+          <a:chOff x="0" y="0"/>
+          <a:chExt cx="0" cy="0"/>
+        </a:xfrm>
+      </p:grpSpPr>
+      <p:sp>
+        <p:nvSpPr>
+          <p:cNvPr id="2" name="Slide Image Placeholder 1"/>
+          <p:cNvSpPr>
+            <a:spLocks noGrp="1"/>
+          </p:cNvSpPr>
+          <p:nvPr>
+            <p:ph type="sldImg" idx="2"/>
+          </p:nvPr>
+        </p:nvSpPr>
+        <p:spPr/>
+      </p:sp>
+      <p:sp>
+        <p:nvSpPr>
+          <p:cNvPr id="3" name="Notes Placeholder 2"/>
+          <p:cNvSpPr>
+            <a:spLocks noGrp="1"/>
+          </p:cNvSpPr>
+          <p:nvPr>
+            <p:ph type="body" idx="3" sz="quarter"/>
+          </p:nvPr>
+        </p:nvSpPr>
+        <p:spPr/>
+        <p:txBody>
+          <a:bodyPr/>
+          <a:lstStyle/>
+          <a:p>
+            <a:r>
+              <a:t>Core message: 9. Data quality and errors.</a:t>
+            </a:r>
+          </a:p>
+          <a:p>
+            <a:r>
+              <a:t>Talking points to expand: Talking points, learner value, and lab connection Talking points • Explicit types • Replacing errors Why it helps • Keeping error rows for review • Business-rule checks Lab connection Coverage: Partial. Use the lab README to demonstrate or discuss this topic. Review terms: business, checks, errors, keeping, replacing. 11</a:t>
+            </a:r>
+          </a:p>
+          <a:p>
+            <a:r>
+              <a:t>Why it matters: Frame this module as repeatable data preparation. Emphasize staging, parameters, source lineage, reusable functions, and visible error review.</a:t>
+            </a:r>
+          </a:p>
+          <a:p>
+            <a:r>
+              <a:t>How it helps users: connect the technical pattern to clearer decisions, fewer confusing report interactions, better trust in results, or easier support.</a:t>
+            </a:r>
+          </a:p>
+          <a:p>
+            <a:r>
+              <a:t>How it builds on prior lessons: reference the previous layer in the workshop, such as prepared data, a clean model, tested measures, or report UX conventions.</a:t>
+            </a:r>
+          </a:p>
+          <a:p>
+            <a:r>
+              <a:t>Lab connection: Show where this concept appears in the module lab. If the lab path is conceptual or Verify for Gov, explain what learners should document instead of building hands-on.</a:t>
+            </a:r>
+          </a:p>
+          <a:p>
+            <a:r>
+              <a:t>Instructor prompt: Ask one learner to describe the risk of skipping this pattern or using it without validation.</a:t>
+            </a:r>
+          </a:p>
+          <a:p>
+            <a:r>
+              <a:t>Further learning: Power Query M language: https://learn.microsoft.com/powerquery-m/ | Query parameters: https://learn.microsoft.com/power-query/power-query-query-parameters | Error handling: https://learn.microsoft.com/power-query/dealing-with-errors</a:t>
+            </a:r>
+          </a:p>
+        </p:txBody>
+      </p:sp>
+      <p:sp>
+        <p:nvSpPr>
+          <p:cNvPr id="4" name="Slide Number Placeholder 3"/>
+          <p:cNvSpPr>
+            <a:spLocks noGrp="1"/>
+          </p:cNvSpPr>
+          <p:nvPr>
+            <p:ph type="sldNum" idx="5" sz="quarter"/>
+          </p:nvPr>
+        </p:nvSpPr>
+        <p:spPr/>
+      </p:sp>
+    </p:spTree>
+  </p:cSld>
+  <p:clrMapOvr>
+    <a:masterClrMapping/>
+  </p:clrMapOvr>
+</p:notes>
+</file>
+
+<file path=ppt/notesSlides/notesSlide12.xml><?xml version="1.0" encoding="utf-8"?>
+<p:notes xmlns:a="http://schemas.openxmlformats.org/drawingml/2006/main" xmlns:p="http://schemas.openxmlformats.org/presentationml/2006/main" xmlns:r="http://schemas.openxmlformats.org/officeDocument/2006/relationships">
+  <p:cSld>
+    <p:spTree>
+      <p:nvGrpSpPr>
+        <p:cNvPr id="1" name=""/>
+        <p:cNvGrpSpPr/>
+        <p:nvPr/>
+      </p:nvGrpSpPr>
+      <p:grpSpPr>
+        <a:xfrm>
+          <a:off x="0" y="0"/>
+          <a:ext cx="0" cy="0"/>
+          <a:chOff x="0" y="0"/>
+          <a:chExt cx="0" cy="0"/>
+        </a:xfrm>
+      </p:grpSpPr>
+      <p:sp>
+        <p:nvSpPr>
+          <p:cNvPr id="2" name="Slide Image Placeholder 1"/>
+          <p:cNvSpPr>
+            <a:spLocks noGrp="1"/>
+          </p:cNvSpPr>
+          <p:nvPr>
+            <p:ph type="sldImg" idx="2"/>
+          </p:nvPr>
+        </p:nvSpPr>
+        <p:spPr/>
+      </p:sp>
+      <p:sp>
+        <p:nvSpPr>
+          <p:cNvPr id="3" name="Notes Placeholder 2"/>
+          <p:cNvSpPr>
+            <a:spLocks noGrp="1"/>
+          </p:cNvSpPr>
+          <p:nvPr>
+            <p:ph type="body" idx="3" sz="quarter"/>
+          </p:nvPr>
+        </p:nvSpPr>
+        <p:spPr/>
+        <p:txBody>
+          <a:bodyPr/>
+          <a:lstStyle/>
+          <a:p>
+            <a:r>
+              <a:t>Core message: 10. Incremental refresh preparation.</a:t>
+            </a:r>
+          </a:p>
+          <a:p>
+            <a:r>
+              <a:t>Talking points to expand: Talking points, learner value, and lab connection Talking points • DateTime requirements • RangeStart and RangeEnd Why it helps • Filtering fact data • Service policy validation Lab connection Coverage: Covered. Use the lab README to demonstrate or discuss this topic. Review terms: none. 12</a:t>
+            </a:r>
+          </a:p>
+          <a:p>
+            <a:r>
+              <a:t>Why it matters: Frame this module as repeatable data preparation. Emphasize staging, parameters, source lineage, reusable functions, and visible error review.</a:t>
+            </a:r>
+          </a:p>
+          <a:p>
+            <a:r>
+              <a:t>How it helps users: connect the technical pattern to clearer decisions, fewer confusing report interactions, better trust in results, or easier support.</a:t>
+            </a:r>
+          </a:p>
+          <a:p>
+            <a:r>
+              <a:t>How it builds on prior lessons: reference the previous layer in the workshop, such as prepared data, a clean model, tested measures, or report UX conventions.</a:t>
+            </a:r>
+          </a:p>
+          <a:p>
+            <a:r>
+              <a:t>Lab connection: Show where this concept appears in the module lab. If the lab path is conceptual or Verify for Gov, explain what learners should document instead of building hands-on.</a:t>
+            </a:r>
+          </a:p>
+          <a:p>
+            <a:r>
+              <a:t>Instructor prompt: Ask one learner to describe the risk of skipping this pattern or using it without validation.</a:t>
+            </a:r>
+          </a:p>
+          <a:p>
+            <a:r>
+              <a:t>Further learning: Power Query M language: https://learn.microsoft.com/powerquery-m/ | Query parameters: https://learn.microsoft.com/power-query/power-query-query-parameters | Error handling: https://learn.microsoft.com/power-query/dealing-with-errors</a:t>
+            </a:r>
+          </a:p>
+        </p:txBody>
+      </p:sp>
+      <p:sp>
+        <p:nvSpPr>
+          <p:cNvPr id="4" name="Slide Number Placeholder 3"/>
+          <p:cNvSpPr>
+            <a:spLocks noGrp="1"/>
+          </p:cNvSpPr>
+          <p:nvPr>
+            <p:ph type="sldNum" idx="5" sz="quarter"/>
+          </p:nvPr>
+        </p:nvSpPr>
+        <p:spPr/>
+      </p:sp>
+    </p:spTree>
+  </p:cSld>
+  <p:clrMapOvr>
+    <a:masterClrMapping/>
+  </p:clrMapOvr>
+</p:notes>
+</file>
+
+<file path=ppt/notesSlides/notesSlide13.xml><?xml version="1.0" encoding="utf-8"?>
+<p:notes xmlns:a="http://schemas.openxmlformats.org/drawingml/2006/main" xmlns:p="http://schemas.openxmlformats.org/presentationml/2006/main" xmlns:r="http://schemas.openxmlformats.org/officeDocument/2006/relationships">
+  <p:cSld>
+    <p:spTree>
+      <p:nvGrpSpPr>
+        <p:cNvPr id="1" name=""/>
+        <p:cNvGrpSpPr/>
+        <p:nvPr/>
+      </p:nvGrpSpPr>
+      <p:grpSpPr>
+        <a:xfrm>
+          <a:off x="0" y="0"/>
+          <a:ext cx="0" cy="0"/>
+          <a:chOff x="0" y="0"/>
+          <a:chExt cx="0" cy="0"/>
+        </a:xfrm>
+      </p:grpSpPr>
+      <p:sp>
+        <p:nvSpPr>
+          <p:cNvPr id="2" name="Slide Image Placeholder 1"/>
+          <p:cNvSpPr>
+            <a:spLocks noGrp="1"/>
+          </p:cNvSpPr>
+          <p:nvPr>
+            <p:ph type="sldImg" idx="2"/>
+          </p:nvPr>
+        </p:nvSpPr>
+        <p:spPr/>
+      </p:sp>
+      <p:sp>
+        <p:nvSpPr>
+          <p:cNvPr id="3" name="Notes Placeholder 2"/>
+          <p:cNvSpPr>
+            <a:spLocks noGrp="1"/>
+          </p:cNvSpPr>
+          <p:nvPr>
+            <p:ph type="body" idx="3" sz="quarter"/>
+          </p:nvPr>
+        </p:nvSpPr>
+        <p:spPr/>
+        <p:txBody>
+          <a:bodyPr/>
+          <a:lstStyle/>
+          <a:p>
+            <a:r>
+              <a:t>Core message: 11. Azure Government considerations.</a:t>
+            </a:r>
+          </a:p>
+          <a:p>
+            <a:r>
+              <a:t>Talking points to expand: Talking points, learner value, and lab connection Talking points • Core Desktop transformations are Gov-ready. • Connectors and dataflows require validation. Why it helps • Dataflows Gen2 is commercial-focused unless confirmed. Lab connection Coverage: Covered. Use the lab README to demonstrate or discuss this topic. Review terms: confirmed, considerations. 13</a:t>
+            </a:r>
+          </a:p>
+          <a:p>
+            <a:r>
+              <a:t>Why it matters: Frame this module as repeatable data preparation. Emphasize staging, parameters, source lineage, reusable functions, and visible error review.</a:t>
+            </a:r>
+          </a:p>
+          <a:p>
+            <a:r>
+              <a:t>How it helps users: connect the technical pattern to clearer decisions, fewer confusing report interactions, better trust in results, or easier support.</a:t>
+            </a:r>
+          </a:p>
+          <a:p>
+            <a:r>
+              <a:t>How it builds on prior lessons: reference the previous layer in the workshop, such as prepared data, a clean model, tested measures, or report UX conventions.</a:t>
+            </a:r>
+          </a:p>
+          <a:p>
+            <a:r>
+              <a:t>Lab connection: Show where this concept appears in the module lab. If the lab path is conceptual or Verify for Gov, explain what learners should document instead of building hands-on.</a:t>
+            </a:r>
+          </a:p>
+          <a:p>
+            <a:r>
+              <a:t>Instructor prompt: Ask one learner to describe the risk of skipping this pattern or using it without validation.</a:t>
+            </a:r>
+          </a:p>
+          <a:p>
+            <a:r>
+              <a:t>Further learning: Power Query M language: https://learn.microsoft.com/powerquery-m/ | Query parameters: https://learn.microsoft.com/power-query/power-query-query-parameters | Error handling: https://learn.microsoft.com/power-query/dealing-with-errors</a:t>
+            </a:r>
+          </a:p>
+        </p:txBody>
+      </p:sp>
+      <p:sp>
+        <p:nvSpPr>
+          <p:cNvPr id="4" name="Slide Number Placeholder 3"/>
+          <p:cNvSpPr>
+            <a:spLocks noGrp="1"/>
+          </p:cNvSpPr>
+          <p:nvPr>
+            <p:ph type="sldNum" idx="5" sz="quarter"/>
+          </p:nvPr>
+        </p:nvSpPr>
+        <p:spPr/>
+      </p:sp>
+    </p:spTree>
+  </p:cSld>
+  <p:clrMapOvr>
+    <a:masterClrMapping/>
+  </p:clrMapOvr>
+</p:notes>
+</file>
+
+<file path=ppt/notesSlides/notesSlide14.xml><?xml version="1.0" encoding="utf-8"?>
+<p:notes xmlns:a="http://schemas.openxmlformats.org/drawingml/2006/main" xmlns:p="http://schemas.openxmlformats.org/presentationml/2006/main" xmlns:r="http://schemas.openxmlformats.org/officeDocument/2006/relationships">
+  <p:cSld>
+    <p:spTree>
+      <p:nvGrpSpPr>
+        <p:cNvPr id="1" name=""/>
+        <p:cNvGrpSpPr/>
+        <p:nvPr/>
+      </p:nvGrpSpPr>
+      <p:grpSpPr>
+        <a:xfrm>
+          <a:off x="0" y="0"/>
+          <a:ext cx="0" cy="0"/>
+          <a:chOff x="0" y="0"/>
+          <a:chExt cx="0" cy="0"/>
+        </a:xfrm>
+      </p:grpSpPr>
+      <p:sp>
+        <p:nvSpPr>
+          <p:cNvPr id="2" name="Slide Image Placeholder 1"/>
+          <p:cNvSpPr>
+            <a:spLocks noGrp="1"/>
+          </p:cNvSpPr>
+          <p:nvPr>
+            <p:ph type="sldImg" idx="2"/>
+          </p:nvPr>
+        </p:nvSpPr>
+        <p:spPr/>
+      </p:sp>
+      <p:sp>
+        <p:nvSpPr>
+          <p:cNvPr id="3" name="Notes Placeholder 2"/>
+          <p:cNvSpPr>
+            <a:spLocks noGrp="1"/>
+          </p:cNvSpPr>
+          <p:nvPr>
+            <p:ph type="body" idx="3" sz="quarter"/>
+          </p:nvPr>
+        </p:nvSpPr>
+        <p:spPr/>
+        <p:txBody>
+          <a:bodyPr/>
+          <a:lstStyle/>
+          <a:p>
+            <a:r>
+              <a:t>Speaker guidance: Treat this as a checkpoint. Ask learners to explain the pattern in their own words and identify where they would use it in a real report.</a:t>
+            </a:r>
+          </a:p>
+          <a:p>
+            <a:r>
+              <a:t>Validation prompt: What would prove this worked? Look for a simple visual, expected filter behavior, or a documented before/after result.</a:t>
+            </a:r>
+          </a:p>
+          <a:p>
+            <a:r>
+              <a:t>Further learning: Power Query M language: https://learn.microsoft.com/powerquery-m/ | Query parameters: https://learn.microsoft.com/power-query/power-query-query-parameters | Error handling: https://learn.microsoft.com/power-query/dealing-with-errors</a:t>
+            </a:r>
+          </a:p>
+        </p:txBody>
+      </p:sp>
+      <p:sp>
+        <p:nvSpPr>
+          <p:cNvPr id="4" name="Slide Number Placeholder 3"/>
+          <p:cNvSpPr>
+            <a:spLocks noGrp="1"/>
+          </p:cNvSpPr>
+          <p:nvPr>
+            <p:ph type="sldNum" idx="5" sz="quarter"/>
+          </p:nvPr>
+        </p:nvSpPr>
+        <p:spPr/>
+      </p:sp>
+    </p:spTree>
+  </p:cSld>
+  <p:clrMapOvr>
+    <a:masterClrMapping/>
+  </p:clrMapOvr>
+</p:notes>
+</file>
+
+<file path=ppt/notesSlides/notesSlide15.xml><?xml version="1.0" encoding="utf-8"?>
+<p:notes xmlns:a="http://schemas.openxmlformats.org/drawingml/2006/main" xmlns:p="http://schemas.openxmlformats.org/presentationml/2006/main" xmlns:r="http://schemas.openxmlformats.org/officeDocument/2006/relationships">
+  <p:cSld>
+    <p:spTree>
+      <p:nvGrpSpPr>
+        <p:cNvPr id="1" name=""/>
+        <p:cNvGrpSpPr/>
+        <p:nvPr/>
+      </p:nvGrpSpPr>
+      <p:grpSpPr>
+        <a:xfrm>
+          <a:off x="0" y="0"/>
+          <a:ext cx="0" cy="0"/>
+          <a:chOff x="0" y="0"/>
+          <a:chExt cx="0" cy="0"/>
+        </a:xfrm>
+      </p:grpSpPr>
+      <p:sp>
+        <p:nvSpPr>
+          <p:cNvPr id="2" name="Slide Image Placeholder 1"/>
+          <p:cNvSpPr>
+            <a:spLocks noGrp="1"/>
+          </p:cNvSpPr>
+          <p:nvPr>
+            <p:ph type="sldImg" idx="2"/>
+          </p:nvPr>
+        </p:nvSpPr>
+        <p:spPr/>
+      </p:sp>
+      <p:sp>
+        <p:nvSpPr>
+          <p:cNvPr id="3" name="Notes Placeholder 2"/>
+          <p:cNvSpPr>
+            <a:spLocks noGrp="1"/>
+          </p:cNvSpPr>
+          <p:nvPr>
+            <p:ph type="body" idx="3" sz="quarter"/>
+          </p:nvPr>
+        </p:nvSpPr>
+        <p:spPr/>
+        <p:txBody>
+          <a:bodyPr/>
+          <a:lstStyle/>
+          <a:p>
+            <a:r>
+              <a:t>Speaker guidance: Use this slide as the handoff for self-study. Do not read every link aloud. Point out which source is most relevant to the lab just completed and which source helps learners go deeper after class.</a:t>
+            </a:r>
+          </a:p>
+          <a:p>
+            <a:r>
+              <a:t>Suggested prompt: Ask learners to bookmark the source that best matches the skill they want to improve next.</a:t>
+            </a:r>
+          </a:p>
+          <a:p>
+            <a:r>
+              <a:t>Further learning: Power Query M language: https://learn.microsoft.com/powerquery-m/ | Query parameters: https://learn.microsoft.com/power-query/power-query-query-parameters | Error handling: https://learn.microsoft.com/power-query/dealing-with-errors</a:t>
+            </a:r>
+          </a:p>
+        </p:txBody>
+      </p:sp>
+      <p:sp>
+        <p:nvSpPr>
+          <p:cNvPr id="4" name="Slide Number Placeholder 3"/>
+          <p:cNvSpPr>
+            <a:spLocks noGrp="1"/>
+          </p:cNvSpPr>
+          <p:nvPr>
+            <p:ph type="sldNum" idx="5" sz="quarter"/>
+          </p:nvPr>
+        </p:nvSpPr>
+        <p:spPr/>
+      </p:sp>
+    </p:spTree>
+  </p:cSld>
+  <p:clrMapOvr>
+    <a:masterClrMapping/>
+  </p:clrMapOvr>
+</p:notes>
+</file>
+
+<file path=ppt/notesSlides/notesSlide2.xml><?xml version="1.0" encoding="utf-8"?>
+<p:notes xmlns:a="http://schemas.openxmlformats.org/drawingml/2006/main" xmlns:p="http://schemas.openxmlformats.org/presentationml/2006/main" xmlns:r="http://schemas.openxmlformats.org/officeDocument/2006/relationships">
+  <p:cSld>
+    <p:spTree>
+      <p:nvGrpSpPr>
+        <p:cNvPr id="1" name=""/>
+        <p:cNvGrpSpPr/>
+        <p:nvPr/>
+      </p:nvGrpSpPr>
+      <p:grpSpPr>
+        <a:xfrm>
+          <a:off x="0" y="0"/>
+          <a:ext cx="0" cy="0"/>
+          <a:chOff x="0" y="0"/>
+          <a:chExt cx="0" cy="0"/>
+        </a:xfrm>
+      </p:grpSpPr>
+      <p:sp>
+        <p:nvSpPr>
+          <p:cNvPr id="2" name="Slide Image Placeholder 1"/>
+          <p:cNvSpPr>
+            <a:spLocks noGrp="1"/>
+          </p:cNvSpPr>
+          <p:nvPr>
+            <p:ph type="sldImg" idx="2"/>
+          </p:nvPr>
+        </p:nvSpPr>
+        <p:spPr/>
+      </p:sp>
+      <p:sp>
+        <p:nvSpPr>
+          <p:cNvPr id="3" name="Notes Placeholder 2"/>
+          <p:cNvSpPr>
+            <a:spLocks noGrp="1"/>
+          </p:cNvSpPr>
+          <p:nvPr>
+            <p:ph type="body" idx="3" sz="quarter"/>
+          </p:nvPr>
+        </p:nvSpPr>
+        <p:spPr/>
+        <p:txBody>
+          <a:bodyPr/>
+          <a:lstStyle/>
+          <a:p>
+            <a:r>
+              <a:t>Speaker guidance: Emphasize sequence and dependency. Explain what students should already know from prior modules and what this module adds on top.</a:t>
+            </a:r>
+          </a:p>
+          <a:p>
+            <a:r>
+              <a:t>Module framing: Frame this module as repeatable data preparation. Emphasize staging, parameters, source lineage, reusable functions, and visible error review.</a:t>
+            </a:r>
+          </a:p>
+          <a:p>
+            <a:r>
+              <a:t>Transition: After this slide, move from the concept map into the specific pattern or lab activity.</a:t>
+            </a:r>
+          </a:p>
+          <a:p>
+            <a:r>
+              <a:t>Further learning: Power Query M language: https://learn.microsoft.com/powerquery-m/ | Query parameters: https://learn.microsoft.com/power-query/power-query-query-parameters | Error handling: https://learn.microsoft.com/power-query/dealing-with-errors</a:t>
+            </a:r>
+          </a:p>
+        </p:txBody>
+      </p:sp>
+      <p:sp>
+        <p:nvSpPr>
+          <p:cNvPr id="4" name="Slide Number Placeholder 3"/>
+          <p:cNvSpPr>
+            <a:spLocks noGrp="1"/>
+          </p:cNvSpPr>
+          <p:nvPr>
+            <p:ph type="sldNum" idx="5" sz="quarter"/>
+          </p:nvPr>
+        </p:nvSpPr>
+        <p:spPr/>
+      </p:sp>
+    </p:spTree>
+  </p:cSld>
+  <p:clrMapOvr>
+    <a:masterClrMapping/>
+  </p:clrMapOvr>
+</p:notes>
+</file>
+
+<file path=ppt/notesSlides/notesSlide3.xml><?xml version="1.0" encoding="utf-8"?>
+<p:notes xmlns:a="http://schemas.openxmlformats.org/drawingml/2006/main" xmlns:p="http://schemas.openxmlformats.org/presentationml/2006/main" xmlns:r="http://schemas.openxmlformats.org/officeDocument/2006/relationships">
+  <p:cSld>
+    <p:spTree>
+      <p:nvGrpSpPr>
+        <p:cNvPr id="1" name=""/>
+        <p:cNvGrpSpPr/>
+        <p:nvPr/>
+      </p:nvGrpSpPr>
+      <p:grpSpPr>
+        <a:xfrm>
+          <a:off x="0" y="0"/>
+          <a:ext cx="0" cy="0"/>
+          <a:chOff x="0" y="0"/>
+          <a:chExt cx="0" cy="0"/>
+        </a:xfrm>
+      </p:grpSpPr>
+      <p:sp>
+        <p:nvSpPr>
+          <p:cNvPr id="2" name="Slide Image Placeholder 1"/>
+          <p:cNvSpPr>
+            <a:spLocks noGrp="1"/>
+          </p:cNvSpPr>
+          <p:nvPr>
+            <p:ph type="sldImg" idx="2"/>
+          </p:nvPr>
+        </p:nvSpPr>
+        <p:spPr/>
+      </p:sp>
+      <p:sp>
+        <p:nvSpPr>
+          <p:cNvPr id="3" name="Notes Placeholder 2"/>
+          <p:cNvSpPr>
+            <a:spLocks noGrp="1"/>
+          </p:cNvSpPr>
+          <p:nvPr>
+            <p:ph type="body" idx="3" sz="quarter"/>
+          </p:nvPr>
+        </p:nvSpPr>
+        <p:spPr/>
+        <p:txBody>
+          <a:bodyPr/>
+          <a:lstStyle/>
+          <a:p>
+            <a:r>
+              <a:t>Core message: 1. Why Power Query architecture matters.</a:t>
+            </a:r>
+          </a:p>
+          <a:p>
+            <a:r>
+              <a:t>Talking points to expand: Talking points, learner value, and lab connection Talking points • Transformation logic is part of the solution. • One long query is hard to test and maintain. Why it helps • Staging makes intent visible. Lab connection Coverage: Covered. Use the lab README to demonstrate or discuss this topic. Review terms: intent, makes, matters, solution, visible. 03</a:t>
+            </a:r>
+          </a:p>
+          <a:p>
+            <a:r>
+              <a:t>Why it matters: Frame this module as repeatable data preparation. Emphasize staging, parameters, source lineage, reusable functions, and visible error review.</a:t>
+            </a:r>
+          </a:p>
+          <a:p>
+            <a:r>
+              <a:t>How it helps users: connect the technical pattern to clearer decisions, fewer confusing report interactions, better trust in results, or easier support.</a:t>
+            </a:r>
+          </a:p>
+          <a:p>
+            <a:r>
+              <a:t>How it builds on prior lessons: reference the previous layer in the workshop, such as prepared data, a clean model, tested measures, or report UX conventions.</a:t>
+            </a:r>
+          </a:p>
+          <a:p>
+            <a:r>
+              <a:t>Lab connection: Show where this concept appears in the module lab. If the lab path is conceptual or Verify for Gov, explain what learners should document instead of building hands-on.</a:t>
+            </a:r>
+          </a:p>
+          <a:p>
+            <a:r>
+              <a:t>Instructor prompt: Ask one learner to describe the risk of skipping this pattern or using it without validation.</a:t>
+            </a:r>
+          </a:p>
+          <a:p>
+            <a:r>
+              <a:t>Further learning: Power Query M language: https://learn.microsoft.com/powerquery-m/ | Query parameters: https://learn.microsoft.com/power-query/power-query-query-parameters | Error handling: https://learn.microsoft.com/power-query/dealing-with-errors</a:t>
+            </a:r>
+          </a:p>
+        </p:txBody>
+      </p:sp>
+      <p:sp>
+        <p:nvSpPr>
+          <p:cNvPr id="4" name="Slide Number Placeholder 3"/>
+          <p:cNvSpPr>
+            <a:spLocks noGrp="1"/>
+          </p:cNvSpPr>
+          <p:nvPr>
+            <p:ph type="sldNum" idx="5" sz="quarter"/>
+          </p:nvPr>
+        </p:nvSpPr>
+        <p:spPr/>
+      </p:sp>
+    </p:spTree>
+  </p:cSld>
+  <p:clrMapOvr>
+    <a:masterClrMapping/>
+  </p:clrMapOvr>
+</p:notes>
+</file>
+
+<file path=ppt/notesSlides/notesSlide4.xml><?xml version="1.0" encoding="utf-8"?>
+<p:notes xmlns:a="http://schemas.openxmlformats.org/drawingml/2006/main" xmlns:p="http://schemas.openxmlformats.org/presentationml/2006/main" xmlns:r="http://schemas.openxmlformats.org/officeDocument/2006/relationships">
+  <p:cSld>
+    <p:spTree>
+      <p:nvGrpSpPr>
+        <p:cNvPr id="1" name=""/>
+        <p:cNvGrpSpPr/>
+        <p:nvPr/>
+      </p:nvGrpSpPr>
+      <p:grpSpPr>
+        <a:xfrm>
+          <a:off x="0" y="0"/>
+          <a:ext cx="0" cy="0"/>
+          <a:chOff x="0" y="0"/>
+          <a:chExt cx="0" cy="0"/>
+        </a:xfrm>
+      </p:grpSpPr>
+      <p:sp>
+        <p:nvSpPr>
+          <p:cNvPr id="2" name="Slide Image Placeholder 1"/>
+          <p:cNvSpPr>
+            <a:spLocks noGrp="1"/>
+          </p:cNvSpPr>
+          <p:nvPr>
+            <p:ph type="sldImg" idx="2"/>
+          </p:nvPr>
+        </p:nvSpPr>
+        <p:spPr/>
+      </p:sp>
+      <p:sp>
+        <p:nvSpPr>
+          <p:cNvPr id="3" name="Notes Placeholder 2"/>
+          <p:cNvSpPr>
+            <a:spLocks noGrp="1"/>
+          </p:cNvSpPr>
+          <p:nvPr>
+            <p:ph type="body" idx="3" sz="quarter"/>
+          </p:nvPr>
+        </p:nvSpPr>
+        <p:spPr/>
+        <p:txBody>
+          <a:bodyPr/>
+          <a:lstStyle/>
+          <a:p>
+            <a:r>
+              <a:t>Core message: 2. Staging query pattern.</a:t>
+            </a:r>
+          </a:p>
+          <a:p>
+            <a:r>
+              <a:t>Talking points to expand: Talking points, learner value, and lab connection Talking points • Raw source queries • Staging queries Why it helps • Final model queries • Load-enabled vs. load-disabled queries Lab connection Coverage: Covered. Use the lab README to demonstrate or discuss this topic. Review terms: none. 04</a:t>
+            </a:r>
+          </a:p>
+          <a:p>
+            <a:r>
+              <a:t>Why it matters: Frame this module as repeatable data preparation. Emphasize staging, parameters, source lineage, reusable functions, and visible error review.</a:t>
+            </a:r>
+          </a:p>
+          <a:p>
+            <a:r>
+              <a:t>How it helps users: connect the technical pattern to clearer decisions, fewer confusing report interactions, better trust in results, or easier support.</a:t>
+            </a:r>
+          </a:p>
+          <a:p>
+            <a:r>
+              <a:t>How it builds on prior lessons: reference the previous layer in the workshop, such as prepared data, a clean model, tested measures, or report UX conventions.</a:t>
+            </a:r>
+          </a:p>
+          <a:p>
+            <a:r>
+              <a:t>Lab connection: Show where this concept appears in the module lab. If the lab path is conceptual or Verify for Gov, explain what learners should document instead of building hands-on.</a:t>
+            </a:r>
+          </a:p>
+          <a:p>
+            <a:r>
+              <a:t>Instructor prompt: Ask one learner to describe the risk of skipping this pattern or using it without validation.</a:t>
+            </a:r>
+          </a:p>
+          <a:p>
+            <a:r>
+              <a:t>Further learning: Power Query M language: https://learn.microsoft.com/powerquery-m/ | Query parameters: https://learn.microsoft.com/power-query/power-query-query-parameters | Error handling: https://learn.microsoft.com/power-query/dealing-with-errors</a:t>
+            </a:r>
+          </a:p>
+        </p:txBody>
+      </p:sp>
+      <p:sp>
+        <p:nvSpPr>
+          <p:cNvPr id="4" name="Slide Number Placeholder 3"/>
+          <p:cNvSpPr>
+            <a:spLocks noGrp="1"/>
+          </p:cNvSpPr>
+          <p:nvPr>
+            <p:ph type="sldNum" idx="5" sz="quarter"/>
+          </p:nvPr>
+        </p:nvSpPr>
+        <p:spPr/>
+      </p:sp>
+    </p:spTree>
+  </p:cSld>
+  <p:clrMapOvr>
+    <a:masterClrMapping/>
+  </p:clrMapOvr>
+</p:notes>
+</file>
+
+<file path=ppt/notesSlides/notesSlide5.xml><?xml version="1.0" encoding="utf-8"?>
+<p:notes xmlns:a="http://schemas.openxmlformats.org/drawingml/2006/main" xmlns:p="http://schemas.openxmlformats.org/presentationml/2006/main" xmlns:r="http://schemas.openxmlformats.org/officeDocument/2006/relationships">
+  <p:cSld>
+    <p:spTree>
+      <p:nvGrpSpPr>
+        <p:cNvPr id="1" name=""/>
+        <p:cNvGrpSpPr/>
+        <p:nvPr/>
+      </p:nvGrpSpPr>
+      <p:grpSpPr>
+        <a:xfrm>
+          <a:off x="0" y="0"/>
+          <a:ext cx="0" cy="0"/>
+          <a:chOff x="0" y="0"/>
+          <a:chExt cx="0" cy="0"/>
+        </a:xfrm>
+      </p:grpSpPr>
+      <p:sp>
+        <p:nvSpPr>
+          <p:cNvPr id="2" name="Slide Image Placeholder 1"/>
+          <p:cNvSpPr>
+            <a:spLocks noGrp="1"/>
+          </p:cNvSpPr>
+          <p:nvPr>
+            <p:ph type="sldImg" idx="2"/>
+          </p:nvPr>
+        </p:nvSpPr>
+        <p:spPr/>
+      </p:sp>
+      <p:sp>
+        <p:nvSpPr>
+          <p:cNvPr id="3" name="Notes Placeholder 2"/>
+          <p:cNvSpPr>
+            <a:spLocks noGrp="1"/>
+          </p:cNvSpPr>
+          <p:nvPr>
+            <p:ph type="body" idx="3" sz="quarter"/>
+          </p:nvPr>
+        </p:nvSpPr>
+        <p:spPr/>
+        <p:txBody>
+          <a:bodyPr/>
+          <a:lstStyle/>
+          <a:p>
+            <a:r>
+              <a:t>Core message: 3. Folder-combine pattern.</a:t>
+            </a:r>
+          </a:p>
+          <a:p>
+            <a:r>
+              <a:t>Talking points to expand: Talking points, learner value, and lab connection Talking points • File filters • Sample file transformation • Schema consistency Why it helps • Hidden/temp file handling • Future monthly files Lab connection Coverage: Covered. Use the lab README to demonstrate or discuss this topic. Review terms: consistency, future, hidden. 05</a:t>
+            </a:r>
+          </a:p>
+          <a:p>
+            <a:r>
+              <a:t>Why it matters: Frame this module as repeatable data preparation. Emphasize staging, parameters, source lineage, reusable functions, and visible error review.</a:t>
+            </a:r>
+          </a:p>
+          <a:p>
+            <a:r>
+              <a:t>How it helps users: connect the technical pattern to clearer decisions, fewer confusing report interactions, better trust in results, or easier support.</a:t>
+            </a:r>
+          </a:p>
+          <a:p>
+            <a:r>
+              <a:t>How it builds on prior lessons: reference the previous layer in the workshop, such as prepared data, a clean model, tested measures, or report UX conventions.</a:t>
+            </a:r>
+          </a:p>
+          <a:p>
+            <a:r>
+              <a:t>Lab connection: Show where this concept appears in the module lab. If the lab path is conceptual or Verify for Gov, explain what learners should document instead of building hands-on.</a:t>
+            </a:r>
+          </a:p>
+          <a:p>
+            <a:r>
+              <a:t>Instructor prompt: Ask one learner to describe the risk of skipping this pattern or using it without validation.</a:t>
+            </a:r>
+          </a:p>
+          <a:p>
+            <a:r>
+              <a:t>Further learning: Power Query M language: https://learn.microsoft.com/powerquery-m/ | Query parameters: https://learn.microsoft.com/power-query/power-query-query-parameters | Error handling: https://learn.microsoft.com/power-query/dealing-with-errors</a:t>
+            </a:r>
+          </a:p>
+        </p:txBody>
+      </p:sp>
+      <p:sp>
+        <p:nvSpPr>
+          <p:cNvPr id="4" name="Slide Number Placeholder 3"/>
+          <p:cNvSpPr>
+            <a:spLocks noGrp="1"/>
+          </p:cNvSpPr>
+          <p:nvPr>
+            <p:ph type="sldNum" idx="5" sz="quarter"/>
+          </p:nvPr>
+        </p:nvSpPr>
+        <p:spPr/>
+      </p:sp>
+    </p:spTree>
+  </p:cSld>
+  <p:clrMapOvr>
+    <a:masterClrMapping/>
+  </p:clrMapOvr>
+</p:notes>
+</file>
+
+<file path=ppt/notesSlides/notesSlide6.xml><?xml version="1.0" encoding="utf-8"?>
+<p:notes xmlns:a="http://schemas.openxmlformats.org/drawingml/2006/main" xmlns:p="http://schemas.openxmlformats.org/presentationml/2006/main" xmlns:r="http://schemas.openxmlformats.org/officeDocument/2006/relationships">
+  <p:cSld>
+    <p:spTree>
+      <p:nvGrpSpPr>
+        <p:cNvPr id="1" name=""/>
+        <p:cNvGrpSpPr/>
+        <p:nvPr/>
+      </p:nvGrpSpPr>
+      <p:grpSpPr>
+        <a:xfrm>
+          <a:off x="0" y="0"/>
+          <a:ext cx="0" cy="0"/>
+          <a:chOff x="0" y="0"/>
+          <a:chExt cx="0" cy="0"/>
+        </a:xfrm>
+      </p:grpSpPr>
+      <p:sp>
+        <p:nvSpPr>
+          <p:cNvPr id="2" name="Slide Image Placeholder 1"/>
+          <p:cNvSpPr>
+            <a:spLocks noGrp="1"/>
+          </p:cNvSpPr>
+          <p:nvPr>
+            <p:ph type="sldImg" idx="2"/>
+          </p:nvPr>
+        </p:nvSpPr>
+        <p:spPr/>
+      </p:sp>
+      <p:sp>
+        <p:nvSpPr>
+          <p:cNvPr id="3" name="Notes Placeholder 2"/>
+          <p:cNvSpPr>
+            <a:spLocks noGrp="1"/>
+          </p:cNvSpPr>
+          <p:nvPr>
+            <p:ph type="body" idx="3" sz="quarter"/>
+          </p:nvPr>
+        </p:nvSpPr>
+        <p:spPr/>
+        <p:txBody>
+          <a:bodyPr/>
+          <a:lstStyle/>
+          <a:p>
+            <a:r>
+              <a:t>Core message: 4. M language fundamentals.</a:t>
+            </a:r>
+          </a:p>
+          <a:p>
+            <a:r>
+              <a:t>Talking points to expand: Talking points, learner value, and lab connection Talking points • Applied steps • Step references Why it helps • Lists, records, and tables • Generated M vs. handwritten M Lab connection Coverage: Partial. Use the lab README to demonstrate or discuss this topic. Review terms: fundamentals, handwritten, language, lists, records. 06</a:t>
+            </a:r>
+          </a:p>
+          <a:p>
+            <a:r>
+              <a:t>Why it matters: Frame this module as repeatable data preparation. Emphasize staging, parameters, source lineage, reusable functions, and visible error review.</a:t>
+            </a:r>
+          </a:p>
+          <a:p>
+            <a:r>
+              <a:t>How it helps users: connect the technical pattern to clearer decisions, fewer confusing report interactions, better trust in results, or easier support.</a:t>
+            </a:r>
+          </a:p>
+          <a:p>
+            <a:r>
+              <a:t>How it builds on prior lessons: reference the previous layer in the workshop, such as prepared data, a clean model, tested measures, or report UX conventions.</a:t>
+            </a:r>
+          </a:p>
+          <a:p>
+            <a:r>
+              <a:t>Lab connection: Show where this concept appears in the module lab. If the lab path is conceptual or Verify for Gov, explain what learners should document instead of building hands-on.</a:t>
+            </a:r>
+          </a:p>
+          <a:p>
+            <a:r>
+              <a:t>Instructor prompt: Ask one learner to describe the risk of skipping this pattern or using it without validation.</a:t>
+            </a:r>
+          </a:p>
+          <a:p>
+            <a:r>
+              <a:t>Further learning: Power Query M language: https://learn.microsoft.com/powerquery-m/ | Query parameters: https://learn.microsoft.com/power-query/power-query-query-parameters | Error handling: https://learn.microsoft.com/power-query/dealing-with-errors</a:t>
+            </a:r>
+          </a:p>
+        </p:txBody>
+      </p:sp>
+      <p:sp>
+        <p:nvSpPr>
+          <p:cNvPr id="4" name="Slide Number Placeholder 3"/>
+          <p:cNvSpPr>
+            <a:spLocks noGrp="1"/>
+          </p:cNvSpPr>
+          <p:nvPr>
+            <p:ph type="sldNum" idx="5" sz="quarter"/>
+          </p:nvPr>
+        </p:nvSpPr>
+        <p:spPr/>
+      </p:sp>
+    </p:spTree>
+  </p:cSld>
+  <p:clrMapOvr>
+    <a:masterClrMapping/>
+  </p:clrMapOvr>
+</p:notes>
+</file>
+
+<file path=ppt/notesSlides/notesSlide7.xml><?xml version="1.0" encoding="utf-8"?>
+<p:notes xmlns:a="http://schemas.openxmlformats.org/drawingml/2006/main" xmlns:p="http://schemas.openxmlformats.org/presentationml/2006/main" xmlns:r="http://schemas.openxmlformats.org/officeDocument/2006/relationships">
+  <p:cSld>
+    <p:spTree>
+      <p:nvGrpSpPr>
+        <p:cNvPr id="1" name=""/>
+        <p:cNvGrpSpPr/>
+        <p:nvPr/>
+      </p:nvGrpSpPr>
+      <p:grpSpPr>
+        <a:xfrm>
+          <a:off x="0" y="0"/>
+          <a:ext cx="0" cy="0"/>
+          <a:chOff x="0" y="0"/>
+          <a:chExt cx="0" cy="0"/>
+        </a:xfrm>
+      </p:grpSpPr>
+      <p:sp>
+        <p:nvSpPr>
+          <p:cNvPr id="2" name="Slide Image Placeholder 1"/>
+          <p:cNvSpPr>
+            <a:spLocks noGrp="1"/>
+          </p:cNvSpPr>
+          <p:nvPr>
+            <p:ph type="sldImg" idx="2"/>
+          </p:nvPr>
+        </p:nvSpPr>
+        <p:spPr/>
+      </p:sp>
+      <p:sp>
+        <p:nvSpPr>
+          <p:cNvPr id="3" name="Notes Placeholder 2"/>
+          <p:cNvSpPr>
+            <a:spLocks noGrp="1"/>
+          </p:cNvSpPr>
+          <p:nvPr>
+            <p:ph type="body" idx="3" sz="quarter"/>
+          </p:nvPr>
+        </p:nvSpPr>
+        <p:spPr/>
+        <p:txBody>
+          <a:bodyPr/>
+          <a:lstStyle/>
+          <a:p>
+            <a:r>
+              <a:t>Core message: 5. Parameters.</a:t>
+            </a:r>
+          </a:p>
+          <a:p>
+            <a:r>
+              <a:t>Talking points to expand: Talking points, learner value, and lab connection Talking points • Source path parameters • Environment switching Why it helps • RangeStart and RangeEnd • Parameter governance Lab connection Coverage: Covered. Use the lab README to demonstrate or discuss this topic. Review terms: governance. 07</a:t>
+            </a:r>
+          </a:p>
+          <a:p>
+            <a:r>
+              <a:t>Why it matters: Frame this module as repeatable data preparation. Emphasize staging, parameters, source lineage, reusable functions, and visible error review.</a:t>
+            </a:r>
+          </a:p>
+          <a:p>
+            <a:r>
+              <a:t>How it helps users: connect the technical pattern to clearer decisions, fewer confusing report interactions, better trust in results, or easier support.</a:t>
+            </a:r>
+          </a:p>
+          <a:p>
+            <a:r>
+              <a:t>How it builds on prior lessons: reference the previous layer in the workshop, such as prepared data, a clean model, tested measures, or report UX conventions.</a:t>
+            </a:r>
+          </a:p>
+          <a:p>
+            <a:r>
+              <a:t>Lab connection: Show where this concept appears in the module lab. If the lab path is conceptual or Verify for Gov, explain what learners should document instead of building hands-on.</a:t>
+            </a:r>
+          </a:p>
+          <a:p>
+            <a:r>
+              <a:t>Instructor prompt: Ask one learner to describe the risk of skipping this pattern or using it without validation.</a:t>
+            </a:r>
+          </a:p>
+          <a:p>
+            <a:r>
+              <a:t>Further learning: Power Query M language: https://learn.microsoft.com/powerquery-m/ | Query parameters: https://learn.microsoft.com/power-query/power-query-query-parameters | Error handling: https://learn.microsoft.com/power-query/dealing-with-errors</a:t>
+            </a:r>
+          </a:p>
+        </p:txBody>
+      </p:sp>
+      <p:sp>
+        <p:nvSpPr>
+          <p:cNvPr id="4" name="Slide Number Placeholder 3"/>
+          <p:cNvSpPr>
+            <a:spLocks noGrp="1"/>
+          </p:cNvSpPr>
+          <p:nvPr>
+            <p:ph type="sldNum" idx="5" sz="quarter"/>
+          </p:nvPr>
+        </p:nvSpPr>
+        <p:spPr/>
+      </p:sp>
+    </p:spTree>
+  </p:cSld>
+  <p:clrMapOvr>
+    <a:masterClrMapping/>
+  </p:clrMapOvr>
+</p:notes>
+</file>
+
+<file path=ppt/notesSlides/notesSlide8.xml><?xml version="1.0" encoding="utf-8"?>
+<p:notes xmlns:a="http://schemas.openxmlformats.org/drawingml/2006/main" xmlns:p="http://schemas.openxmlformats.org/presentationml/2006/main" xmlns:r="http://schemas.openxmlformats.org/officeDocument/2006/relationships">
+  <p:cSld>
+    <p:spTree>
+      <p:nvGrpSpPr>
+        <p:cNvPr id="1" name=""/>
+        <p:cNvGrpSpPr/>
+        <p:nvPr/>
+      </p:nvGrpSpPr>
+      <p:grpSpPr>
+        <a:xfrm>
+          <a:off x="0" y="0"/>
+          <a:ext cx="0" cy="0"/>
+          <a:chOff x="0" y="0"/>
+          <a:chExt cx="0" cy="0"/>
+        </a:xfrm>
+      </p:grpSpPr>
+      <p:sp>
+        <p:nvSpPr>
+          <p:cNvPr id="2" name="Slide Image Placeholder 1"/>
+          <p:cNvSpPr>
+            <a:spLocks noGrp="1"/>
+          </p:cNvSpPr>
+          <p:nvPr>
+            <p:ph type="sldImg" idx="2"/>
+          </p:nvPr>
+        </p:nvSpPr>
+        <p:spPr/>
+      </p:sp>
+      <p:sp>
+        <p:nvSpPr>
+          <p:cNvPr id="3" name="Notes Placeholder 2"/>
+          <p:cNvSpPr>
+            <a:spLocks noGrp="1"/>
+          </p:cNvSpPr>
+          <p:nvPr>
+            <p:ph type="body" idx="3" sz="quarter"/>
+          </p:nvPr>
+        </p:nvSpPr>
+        <p:spPr/>
+        <p:txBody>
+          <a:bodyPr/>
+          <a:lstStyle/>
+          <a:p>
+            <a:r>
+              <a:t>Core message: 6. Custom functions.</a:t>
+            </a:r>
+          </a:p>
+          <a:p>
+            <a:r>
+              <a:t>Talking points to expand: Talking points, learner value, and lab connection Talking points • Function inputs • Reusable cleanup logic Why it helps • Invoking functions • Testing functions Lab connection Coverage: Covered. Use the lab README to demonstrate or discuss this topic. Review terms: inputs, invoking, testing. 08</a:t>
+            </a:r>
+          </a:p>
+          <a:p>
+            <a:r>
+              <a:t>Why it matters: Frame this module as repeatable data preparation. Emphasize staging, parameters, source lineage, reusable functions, and visible error review.</a:t>
+            </a:r>
+          </a:p>
+          <a:p>
+            <a:r>
+              <a:t>How it helps users: connect the technical pattern to clearer decisions, fewer confusing report interactions, better trust in results, or easier support.</a:t>
+            </a:r>
+          </a:p>
+          <a:p>
+            <a:r>
+              <a:t>How it builds on prior lessons: reference the previous layer in the workshop, such as prepared data, a clean model, tested measures, or report UX conventions.</a:t>
+            </a:r>
+          </a:p>
+          <a:p>
+            <a:r>
+              <a:t>Lab connection: Show where this concept appears in the module lab. If the lab path is conceptual or Verify for Gov, explain what learners should document instead of building hands-on.</a:t>
+            </a:r>
+          </a:p>
+          <a:p>
+            <a:r>
+              <a:t>Instructor prompt: Ask one learner to describe the risk of skipping this pattern or using it without validation.</a:t>
+            </a:r>
+          </a:p>
+          <a:p>
+            <a:r>
+              <a:t>Further learning: Power Query M language: https://learn.microsoft.com/powerquery-m/ | Query parameters: https://learn.microsoft.com/power-query/power-query-query-parameters | Error handling: https://learn.microsoft.com/power-query/dealing-with-errors</a:t>
+            </a:r>
+          </a:p>
+        </p:txBody>
+      </p:sp>
+      <p:sp>
+        <p:nvSpPr>
+          <p:cNvPr id="4" name="Slide Number Placeholder 3"/>
+          <p:cNvSpPr>
+            <a:spLocks noGrp="1"/>
+          </p:cNvSpPr>
+          <p:nvPr>
+            <p:ph type="sldNum" idx="5" sz="quarter"/>
+          </p:nvPr>
+        </p:nvSpPr>
+        <p:spPr/>
+      </p:sp>
+    </p:spTree>
+  </p:cSld>
+  <p:clrMapOvr>
+    <a:masterClrMapping/>
+  </p:clrMapOvr>
+</p:notes>
+</file>
+
+<file path=ppt/notesSlides/notesSlide9.xml><?xml version="1.0" encoding="utf-8"?>
+<p:notes xmlns:a="http://schemas.openxmlformats.org/drawingml/2006/main" xmlns:p="http://schemas.openxmlformats.org/presentationml/2006/main" xmlns:r="http://schemas.openxmlformats.org/officeDocument/2006/relationships">
+  <p:cSld>
+    <p:spTree>
+      <p:nvGrpSpPr>
+        <p:cNvPr id="1" name=""/>
+        <p:cNvGrpSpPr/>
+        <p:nvPr/>
+      </p:nvGrpSpPr>
+      <p:grpSpPr>
+        <a:xfrm>
+          <a:off x="0" y="0"/>
+          <a:ext cx="0" cy="0"/>
+          <a:chOff x="0" y="0"/>
+          <a:chExt cx="0" cy="0"/>
+        </a:xfrm>
+      </p:grpSpPr>
+      <p:sp>
+        <p:nvSpPr>
+          <p:cNvPr id="2" name="Slide Image Placeholder 1"/>
+          <p:cNvSpPr>
+            <a:spLocks noGrp="1"/>
+          </p:cNvSpPr>
+          <p:nvPr>
+            <p:ph type="sldImg" idx="2"/>
+          </p:nvPr>
+        </p:nvSpPr>
+        <p:spPr/>
+      </p:sp>
+      <p:sp>
+        <p:nvSpPr>
+          <p:cNvPr id="3" name="Notes Placeholder 2"/>
+          <p:cNvSpPr>
+            <a:spLocks noGrp="1"/>
+          </p:cNvSpPr>
+          <p:nvPr>
+            <p:ph type="body" idx="3" sz="quarter"/>
+          </p:nvPr>
+        </p:nvSpPr>
+        <p:spPr/>
+        <p:txBody>
+          <a:bodyPr/>
+          <a:lstStyle/>
+          <a:p>
+            <a:r>
+              <a:t>Core message: 7. Query folding.</a:t>
+            </a:r>
+          </a:p>
+          <a:p>
+            <a:r>
+              <a:t>Talking points to expand: Talking points, learner value, and lab connection Talking points • What folds • Why folding matters • View Native Query Why it helps • Folding blockers • Connector dependency Lab connection Coverage: Partial. Use the lab README to demonstrate or discuss this topic. Review terms: blockers, dependency, folds, matters. 09</a:t>
+            </a:r>
+          </a:p>
+          <a:p>
+            <a:r>
+              <a:t>Why it matters: Frame this module as repeatable data preparation. Emphasize staging, parameters, source lineage, reusable functions, and visible error review.</a:t>
+            </a:r>
+          </a:p>
+          <a:p>
+            <a:r>
+              <a:t>How it helps users: connect the technical pattern to clearer decisions, fewer confusing report interactions, better trust in results, or easier support.</a:t>
+            </a:r>
+          </a:p>
+          <a:p>
+            <a:r>
+              <a:t>How it builds on prior lessons: reference the previous layer in the workshop, such as prepared data, a clean model, tested measures, or report UX conventions.</a:t>
+            </a:r>
+          </a:p>
+          <a:p>
+            <a:r>
+              <a:t>Lab connection: Show where this concept appears in the module lab. If the lab path is conceptual or Verify for Gov, explain what learners should document instead of building hands-on.</a:t>
+            </a:r>
+          </a:p>
+          <a:p>
+            <a:r>
+              <a:t>Instructor prompt: Ask one learner to describe the risk of skipping this pattern or using it without validation.</a:t>
+            </a:r>
+          </a:p>
+          <a:p>
+            <a:r>
+              <a:t>Further learning: Power Query M language: https://learn.microsoft.com/powerquery-m/ | Query parameters: https://learn.microsoft.com/power-query/power-query-query-parameters | Error handling: https://learn.microsoft.com/power-query/dealing-with-errors</a:t>
+            </a:r>
+          </a:p>
+        </p:txBody>
+      </p:sp>
+      <p:sp>
+        <p:nvSpPr>
+          <p:cNvPr id="4" name="Slide Number Placeholder 3"/>
+          <p:cNvSpPr>
+            <a:spLocks noGrp="1"/>
+          </p:cNvSpPr>
+          <p:nvPr>
+            <p:ph type="sldNum" idx="5" sz="quarter"/>
+          </p:nvPr>
+        </p:nvSpPr>
+        <p:spPr/>
+      </p:sp>
+    </p:spTree>
+  </p:cSld>
+  <p:clrMapOvr>
+    <a:masterClrMapping/>
+  </p:clrMapOvr>
+</p:notes>
 </file>
 
 <file path=ppt/slideLayouts/slideLayout1.xml><?xml version="1.0" encoding="utf-8"?>
@@ -13267,4 +15102,324 @@
   </a:objectDefaults>
   <a:extraClrSchemeLst/>
 </a:theme>
+</file>
+
+<file path=ppt/theme/theme2.xml><?xml version="1.0" encoding="utf-8"?>
+<a:theme xmlns:a="http://schemas.openxmlformats.org/drawingml/2006/main" name="Office Theme">
+  <a:themeElements>
+    <a:clrScheme name="Office">
+      <a:dk1>
+        <a:sysClr val="windowText" lastClr="000000"/>
+      </a:dk1>
+      <a:lt1>
+        <a:sysClr val="window" lastClr="FFFFFF"/>
+      </a:lt1>
+      <a:dk2>
+        <a:srgbClr val="1F497D"/>
+      </a:dk2>
+      <a:lt2>
+        <a:srgbClr val="EEECE1"/>
+      </a:lt2>
+      <a:accent1>
+        <a:srgbClr val="4F81BD"/>
+      </a:accent1>
+      <a:accent2>
+        <a:srgbClr val="C0504D"/>
+      </a:accent2>
+      <a:accent3>
+        <a:srgbClr val="9BBB59"/>
+      </a:accent3>
+      <a:accent4>
+        <a:srgbClr val="8064A2"/>
+      </a:accent4>
+      <a:accent5>
+        <a:srgbClr val="4BACC6"/>
+      </a:accent5>
+      <a:accent6>
+        <a:srgbClr val="F79646"/>
+      </a:accent6>
+      <a:hlink>
+        <a:srgbClr val="0000FF"/>
+      </a:hlink>
+      <a:folHlink>
+        <a:srgbClr val="800080"/>
+      </a:folHlink>
+    </a:clrScheme>
+    <a:fontScheme name="Office">
+      <a:majorFont>
+        <a:latin typeface="Calibri"/>
+        <a:ea typeface=""/>
+        <a:cs typeface=""/>
+        <a:font script="Jpan" typeface="ＭＳ Ｐゴシック"/>
+        <a:font script="Hang" typeface="맑은 고딕"/>
+        <a:font script="Hans" typeface="宋体"/>
+        <a:font script="Hant" typeface="新細明體"/>
+        <a:font script="Arab" typeface="Times New Roman"/>
+        <a:font script="Hebr" typeface="Times New Roman"/>
+        <a:font script="Thai" typeface="Angsana New"/>
+        <a:font script="Ethi" typeface="Nyala"/>
+        <a:font script="Beng" typeface="Vrinda"/>
+        <a:font script="Gujr" typeface="Shruti"/>
+        <a:font script="Khmr" typeface="MoolBoran"/>
+        <a:font script="Knda" typeface="Tunga"/>
+        <a:font script="Guru" typeface="Raavi"/>
+        <a:font script="Cans" typeface="Euphemia"/>
+        <a:font script="Cher" typeface="Plantagenet Cherokee"/>
+        <a:font script="Yiii" typeface="Microsoft Yi Baiti"/>
+        <a:font script="Tibt" typeface="Microsoft Himalaya"/>
+        <a:font script="Thaa" typeface="MV Boli"/>
+        <a:font script="Deva" typeface="Mangal"/>
+        <a:font script="Telu" typeface="Gautami"/>
+        <a:font script="Taml" typeface="Latha"/>
+        <a:font script="Syrc" typeface="Estrangelo Edessa"/>
+        <a:font script="Orya" typeface="Kalinga"/>
+        <a:font script="Mlym" typeface="Kartika"/>
+        <a:font script="Laoo" typeface="DokChampa"/>
+        <a:font script="Sinh" typeface="Iskoola Pota"/>
+        <a:font script="Mong" typeface="Mongolian Baiti"/>
+        <a:font script="Viet" typeface="Times New Roman"/>
+        <a:font script="Uigh" typeface="Microsoft Uighur"/>
+        <a:font script="Geor" typeface="Sylfaen"/>
+      </a:majorFont>
+      <a:minorFont>
+        <a:latin typeface="Calibri"/>
+        <a:ea typeface=""/>
+        <a:cs typeface=""/>
+        <a:font script="Jpan" typeface="ＭＳ Ｐゴシック"/>
+        <a:font script="Hang" typeface="맑은 고딕"/>
+        <a:font script="Hans" typeface="宋体"/>
+        <a:font script="Hant" typeface="新細明體"/>
+        <a:font script="Arab" typeface="Arial"/>
+        <a:font script="Hebr" typeface="Arial"/>
+        <a:font script="Thai" typeface="Cordia New"/>
+        <a:font script="Ethi" typeface="Nyala"/>
+        <a:font script="Beng" typeface="Vrinda"/>
+        <a:font script="Gujr" typeface="Shruti"/>
+        <a:font script="Khmr" typeface="DaunPenh"/>
+        <a:font script="Knda" typeface="Tunga"/>
+        <a:font script="Guru" typeface="Raavi"/>
+        <a:font script="Cans" typeface="Euphemia"/>
+        <a:font script="Cher" typeface="Plantagenet Cherokee"/>
+        <a:font script="Yiii" typeface="Microsoft Yi Baiti"/>
+        <a:font script="Tibt" typeface="Microsoft Himalaya"/>
+        <a:font script="Thaa" typeface="MV Boli"/>
+        <a:font script="Deva" typeface="Mangal"/>
+        <a:font script="Telu" typeface="Gautami"/>
+        <a:font script="Taml" typeface="Latha"/>
+        <a:font script="Syrc" typeface="Estrangelo Edessa"/>
+        <a:font script="Orya" typeface="Kalinga"/>
+        <a:font script="Mlym" typeface="Kartika"/>
+        <a:font script="Laoo" typeface="DokChampa"/>
+        <a:font script="Sinh" typeface="Iskoola Pota"/>
+        <a:font script="Mong" typeface="Mongolian Baiti"/>
+        <a:font script="Viet" typeface="Arial"/>
+        <a:font script="Uigh" typeface="Microsoft Uighur"/>
+        <a:font script="Geor" typeface="Sylfaen"/>
+      </a:minorFont>
+    </a:fontScheme>
+    <a:fmtScheme name="Office">
+      <a:fillStyleLst>
+        <a:solidFill>
+          <a:schemeClr val="phClr"/>
+        </a:solidFill>
+        <a:gradFill rotWithShape="1">
+          <a:gsLst>
+            <a:gs pos="0">
+              <a:schemeClr val="phClr">
+                <a:tint val="50000"/>
+                <a:satMod val="300000"/>
+              </a:schemeClr>
+            </a:gs>
+            <a:gs pos="35000">
+              <a:schemeClr val="phClr">
+                <a:tint val="37000"/>
+                <a:satMod val="300000"/>
+              </a:schemeClr>
+            </a:gs>
+            <a:gs pos="100000">
+              <a:schemeClr val="phClr">
+                <a:tint val="15000"/>
+                <a:satMod val="350000"/>
+              </a:schemeClr>
+            </a:gs>
+          </a:gsLst>
+          <a:lin ang="16200000" scaled="1"/>
+        </a:gradFill>
+        <a:gradFill rotWithShape="1">
+          <a:gsLst>
+            <a:gs pos="0">
+              <a:schemeClr val="phClr">
+                <a:tint val="100000"/>
+                <a:shade val="100000"/>
+                <a:satMod val="130000"/>
+              </a:schemeClr>
+            </a:gs>
+            <a:gs pos="100000">
+              <a:schemeClr val="phClr">
+                <a:tint val="50000"/>
+                <a:shade val="100000"/>
+                <a:satMod val="350000"/>
+              </a:schemeClr>
+            </a:gs>
+          </a:gsLst>
+          <a:lin ang="16200000" scaled="0"/>
+        </a:gradFill>
+      </a:fillStyleLst>
+      <a:lnStyleLst>
+        <a:ln w="9525" cap="flat" cmpd="sng" algn="ctr">
+          <a:solidFill>
+            <a:schemeClr val="phClr">
+              <a:shade val="95000"/>
+              <a:satMod val="105000"/>
+            </a:schemeClr>
+          </a:solidFill>
+          <a:prstDash val="solid"/>
+        </a:ln>
+        <a:ln w="25400" cap="flat" cmpd="sng" algn="ctr">
+          <a:solidFill>
+            <a:schemeClr val="phClr"/>
+          </a:solidFill>
+          <a:prstDash val="solid"/>
+        </a:ln>
+        <a:ln w="38100" cap="flat" cmpd="sng" algn="ctr">
+          <a:solidFill>
+            <a:schemeClr val="phClr"/>
+          </a:solidFill>
+          <a:prstDash val="solid"/>
+        </a:ln>
+      </a:lnStyleLst>
+      <a:effectStyleLst>
+        <a:effectStyle>
+          <a:effectLst>
+            <a:outerShdw blurRad="40000" dist="20000" dir="5400000" rotWithShape="0">
+              <a:srgbClr val="000000">
+                <a:alpha val="38000"/>
+              </a:srgbClr>
+            </a:outerShdw>
+          </a:effectLst>
+        </a:effectStyle>
+        <a:effectStyle>
+          <a:effectLst>
+            <a:outerShdw blurRad="40000" dist="23000" dir="5400000" rotWithShape="0">
+              <a:srgbClr val="000000">
+                <a:alpha val="35000"/>
+              </a:srgbClr>
+            </a:outerShdw>
+          </a:effectLst>
+        </a:effectStyle>
+        <a:effectStyle>
+          <a:effectLst>
+            <a:outerShdw blurRad="40000" dist="23000" dir="5400000" rotWithShape="0">
+              <a:srgbClr val="000000">
+                <a:alpha val="35000"/>
+              </a:srgbClr>
+            </a:outerShdw>
+          </a:effectLst>
+          <a:scene3d>
+            <a:camera prst="orthographicFront">
+              <a:rot lat="0" lon="0" rev="0"/>
+            </a:camera>
+            <a:lightRig rig="threePt" dir="t">
+              <a:rot lat="0" lon="0" rev="1200000"/>
+            </a:lightRig>
+          </a:scene3d>
+          <a:sp3d>
+            <a:bevelT w="63500" h="25400"/>
+          </a:sp3d>
+        </a:effectStyle>
+      </a:effectStyleLst>
+      <a:bgFillStyleLst>
+        <a:solidFill>
+          <a:schemeClr val="phClr"/>
+        </a:solidFill>
+        <a:gradFill rotWithShape="1">
+          <a:gsLst>
+            <a:gs pos="0">
+              <a:schemeClr val="phClr">
+                <a:tint val="40000"/>
+                <a:satMod val="350000"/>
+              </a:schemeClr>
+            </a:gs>
+            <a:gs pos="40000">
+              <a:schemeClr val="phClr">
+                <a:tint val="45000"/>
+                <a:shade val="99000"/>
+                <a:satMod val="350000"/>
+              </a:schemeClr>
+            </a:gs>
+            <a:gs pos="100000">
+              <a:schemeClr val="phClr">
+                <a:shade val="20000"/>
+                <a:satMod val="255000"/>
+              </a:schemeClr>
+            </a:gs>
+          </a:gsLst>
+          <a:path path="circle">
+            <a:fillToRect l="50000" t="-80000" r="50000" b="180000"/>
+          </a:path>
+        </a:gradFill>
+        <a:gradFill rotWithShape="1">
+          <a:gsLst>
+            <a:gs pos="0">
+              <a:schemeClr val="phClr">
+                <a:tint val="80000"/>
+                <a:satMod val="300000"/>
+              </a:schemeClr>
+            </a:gs>
+            <a:gs pos="100000">
+              <a:schemeClr val="phClr">
+                <a:shade val="30000"/>
+                <a:satMod val="200000"/>
+              </a:schemeClr>
+            </a:gs>
+          </a:gsLst>
+          <a:path path="circle">
+            <a:fillToRect l="50000" t="50000" r="50000" b="50000"/>
+          </a:path>
+        </a:gradFill>
+      </a:bgFillStyleLst>
+    </a:fmtScheme>
+  </a:themeElements>
+  <a:objectDefaults>
+    <a:spDef>
+      <a:spPr/>
+      <a:bodyPr/>
+      <a:lstStyle/>
+      <a:style>
+        <a:lnRef idx="1">
+          <a:schemeClr val="accent1"/>
+        </a:lnRef>
+        <a:fillRef idx="3">
+          <a:schemeClr val="accent1"/>
+        </a:fillRef>
+        <a:effectRef idx="2">
+          <a:schemeClr val="accent1"/>
+        </a:effectRef>
+        <a:fontRef idx="minor">
+          <a:schemeClr val="lt1"/>
+        </a:fontRef>
+      </a:style>
+    </a:spDef>
+    <a:lnDef>
+      <a:spPr/>
+      <a:bodyPr/>
+      <a:lstStyle/>
+      <a:style>
+        <a:lnRef idx="2">
+          <a:schemeClr val="accent1"/>
+        </a:lnRef>
+        <a:fillRef idx="0">
+          <a:schemeClr val="accent1"/>
+        </a:fillRef>
+        <a:effectRef idx="1">
+          <a:schemeClr val="accent1"/>
+        </a:effectRef>
+        <a:fontRef idx="minor">
+          <a:schemeClr val="tx1"/>
+        </a:fontRef>
+      </a:style>
+    </a:lnDef>
+  </a:objectDefaults>
+  <a:extraClrSchemeLst/>
+</a:theme>
 </file>
--- a/modules/03-advanced-power-query/assets/advanced-power-query.pptx
+++ b/modules/03-advanced-power-query/assets/advanced-power-query.pptx
@@ -5047,7 +5047,7 @@
               </a:defRPr>
             </a:pPr>
             <a:r>
-              <a:t>Power BI Advanced Factory teaching deck</a:t>
+              <a:t>Student module overview</a:t>
             </a:r>
           </a:p>
         </p:txBody>
@@ -5571,42 +5571,6 @@
       </p:sp>
       <p:sp>
         <p:nvSpPr>
-          <p:cNvPr id="4" name="TextBox 3"/>
-          <p:cNvSpPr txBox="1"/>
-          <p:nvPr/>
-        </p:nvSpPr>
-        <p:spPr>
-          <a:xfrm>
-            <a:off x="530352" y="914400"/>
-            <a:ext cx="10515600" cy="320040"/>
-          </a:xfrm>
-          <a:prstGeom prst="rect">
-            <a:avLst/>
-          </a:prstGeom>
-          <a:noFill/>
-        </p:spPr>
-        <p:txBody>
-          <a:bodyPr wrap="none">
-            <a:spAutoFit/>
-          </a:bodyPr>
-          <a:lstStyle/>
-          <a:p>
-            <a:pPr>
-              <a:defRPr sz="1200">
-                <a:solidFill>
-                  <a:srgbClr val="5C5C5C"/>
-                </a:solidFill>
-                <a:latin typeface="Aptos"/>
-              </a:defRPr>
-            </a:pPr>
-            <a:r>
-              <a:t>Talking points, learner value, and lab connection</a:t>
-            </a:r>
-          </a:p>
-        </p:txBody>
-      </p:sp>
-      <p:sp>
-        <p:nvSpPr>
           <p:cNvPr id="5" name="Rounded Rectangle 4"/>
           <p:cNvSpPr/>
           <p:nvPr/>
@@ -5724,7 +5688,139 @@
               </a:defRPr>
             </a:pPr>
             <a:r>
-              <a:t>Talking points</a:t>
+              <a:t>Key ideas</a:t>
+            </a:r>
+            <a:br/>
+            <a:r>
+              <a:t>• When native queries help</a:t>
+            </a:r>
+            <a:br/>
+            <a:r>
+              <a:t>• When native queries hurt maintainability</a:t>
+            </a:r>
+          </a:p>
+        </p:txBody>
+      </p:sp>
+      <p:sp>
+        <p:nvSpPr>
+          <p:cNvPr id="8" name="Rounded Rectangle 7"/>
+          <p:cNvSpPr/>
+          <p:nvPr/>
+        </p:nvSpPr>
+        <p:spPr>
+          <a:xfrm>
+            <a:off x="6263640" y="1234440"/>
+            <a:ext cx="5303520" cy="1828800"/>
+          </a:xfrm>
+          <a:prstGeom prst="roundRect">
+            <a:avLst/>
+          </a:prstGeom>
+          <a:solidFill>
+            <a:srgbClr val="FFFFFF"/>
+          </a:solidFill>
+          <a:ln>
+            <a:solidFill>
+              <a:srgbClr val="DCDCDC"/>
+            </a:solidFill>
+          </a:ln>
+        </p:spPr>
+        <p:style>
+          <a:lnRef idx="1">
+            <a:schemeClr val="accent1"/>
+          </a:lnRef>
+          <a:fillRef idx="3">
+            <a:schemeClr val="accent1"/>
+          </a:fillRef>
+          <a:effectRef idx="2">
+            <a:schemeClr val="accent1"/>
+          </a:effectRef>
+          <a:fontRef idx="minor">
+            <a:schemeClr val="lt1"/>
+          </a:fontRef>
+        </p:style>
+        <p:txBody>
+          <a:bodyPr rtlCol="0" anchor="ctr"/>
+          <a:lstStyle/>
+          <a:p>
+            <a:pPr algn="ctr"/>
+          </a:p>
+        </p:txBody>
+      </p:sp>
+      <p:sp>
+        <p:nvSpPr>
+          <p:cNvPr id="9" name="Rectangle 8"/>
+          <p:cNvSpPr/>
+          <p:nvPr/>
+        </p:nvSpPr>
+        <p:spPr>
+          <a:xfrm>
+            <a:off x="6263640" y="1234440"/>
+            <a:ext cx="91440" cy="1828800"/>
+          </a:xfrm>
+          <a:prstGeom prst="rect">
+            <a:avLst/>
+          </a:prstGeom>
+          <a:solidFill>
+            <a:srgbClr val="02C39A"/>
+          </a:solidFill>
+          <a:ln>
+            <a:noFill/>
+          </a:ln>
+        </p:spPr>
+        <p:style>
+          <a:lnRef idx="1">
+            <a:schemeClr val="accent1"/>
+          </a:lnRef>
+          <a:fillRef idx="3">
+            <a:schemeClr val="accent1"/>
+          </a:fillRef>
+          <a:effectRef idx="2">
+            <a:schemeClr val="accent1"/>
+          </a:effectRef>
+          <a:fontRef idx="minor">
+            <a:schemeClr val="lt1"/>
+          </a:fontRef>
+        </p:style>
+        <p:txBody>
+          <a:bodyPr rtlCol="0" anchor="ctr"/>
+          <a:lstStyle/>
+          <a:p>
+            <a:pPr algn="ctr"/>
+          </a:p>
+        </p:txBody>
+      </p:sp>
+      <p:sp>
+        <p:nvSpPr>
+          <p:cNvPr id="10" name="TextBox 9"/>
+          <p:cNvSpPr txBox="1"/>
+          <p:nvPr/>
+        </p:nvSpPr>
+        <p:spPr>
+          <a:xfrm>
+            <a:off x="6446520" y="1344168"/>
+            <a:ext cx="4983480" cy="1664208"/>
+          </a:xfrm>
+          <a:prstGeom prst="rect">
+            <a:avLst/>
+          </a:prstGeom>
+          <a:noFill/>
+        </p:spPr>
+        <p:txBody>
+          <a:bodyPr wrap="square" lIns="0" rIns="0">
+            <a:spAutoFit/>
+          </a:bodyPr>
+          <a:lstStyle/>
+          <a:p>
+            <a:pPr>
+              <a:defRPr b="1" sz="1500">
+                <a:solidFill>
+                  <a:srgbClr val="1E2761"/>
+                </a:solidFill>
+                <a:latin typeface="Aptos Display"/>
+              </a:defRPr>
+            </a:pPr>
+            <a:r>
+              <a:t>Why it helps</a:t>
             </a:r>
           </a:p>
           <a:p>
@@ -5740,25 +5836,21 @@
               </a:defRPr>
             </a:pPr>
             <a:r>
-              <a:t>• When native queries help</a:t>
-            </a:r>
-            <a:br/>
-            <a:r>
-              <a:t>• When native queries hurt maintainability</a:t>
-            </a:r>
-          </a:p>
-        </p:txBody>
-      </p:sp>
-      <p:sp>
-        <p:nvSpPr>
-          <p:cNvPr id="8" name="Rounded Rectangle 7"/>
+              <a:t>• Security and gateway considerations</a:t>
+            </a:r>
+          </a:p>
+        </p:txBody>
+      </p:sp>
+      <p:sp>
+        <p:nvSpPr>
+          <p:cNvPr id="11" name="Rounded Rectangle 10"/>
           <p:cNvSpPr/>
           <p:nvPr/>
         </p:nvSpPr>
         <p:spPr>
           <a:xfrm>
-            <a:off x="6263640" y="1234440"/>
-            <a:ext cx="5303520" cy="1828800"/>
+            <a:off x="822960" y="4160520"/>
+            <a:ext cx="10424160" cy="868680"/>
           </a:xfrm>
           <a:prstGeom prst="roundRect">
             <a:avLst/>
@@ -5796,20 +5888,20 @@
       </p:sp>
       <p:sp>
         <p:nvSpPr>
-          <p:cNvPr id="9" name="Rectangle 8"/>
+          <p:cNvPr id="12" name="Rectangle 11"/>
           <p:cNvSpPr/>
           <p:nvPr/>
         </p:nvSpPr>
         <p:spPr>
           <a:xfrm>
-            <a:off x="6263640" y="1234440"/>
-            <a:ext cx="91440" cy="1828800"/>
+            <a:off x="822960" y="4160520"/>
+            <a:ext cx="91440" cy="868680"/>
           </a:xfrm>
           <a:prstGeom prst="rect">
             <a:avLst/>
           </a:prstGeom>
           <a:solidFill>
-            <a:srgbClr val="02C39A"/>
+            <a:srgbClr val="F9B700"/>
           </a:solidFill>
           <a:ln>
             <a:noFill/>
@@ -5839,14 +5931,14 @@
       </p:sp>
       <p:sp>
         <p:nvSpPr>
-          <p:cNvPr id="10" name="TextBox 9"/>
+          <p:cNvPr id="13" name="TextBox 12"/>
           <p:cNvSpPr txBox="1"/>
           <p:nvPr/>
         </p:nvSpPr>
         <p:spPr>
           <a:xfrm>
-            <a:off x="6446520" y="1344168"/>
-            <a:ext cx="4983480" cy="1664208"/>
+            <a:off x="1005840" y="4270248"/>
+            <a:ext cx="10104120" cy="704088"/>
           </a:xfrm>
           <a:prstGeom prst="rect">
             <a:avLst/>
@@ -5868,163 +5960,7 @@
               </a:defRPr>
             </a:pPr>
             <a:r>
-              <a:t>Why it helps</a:t>
-            </a:r>
-          </a:p>
-          <a:p>
-            <a:pPr>
-              <a:spcBef>
-                <a:spcPts val="400"/>
-              </a:spcBef>
-              <a:defRPr sz="1050">
-                <a:solidFill>
-                  <a:srgbClr val="242424"/>
-                </a:solidFill>
-                <a:latin typeface="Aptos"/>
-              </a:defRPr>
-            </a:pPr>
-            <a:r>
-              <a:t>• Security and gateway considerations</a:t>
-            </a:r>
-          </a:p>
-        </p:txBody>
-      </p:sp>
-      <p:sp>
-        <p:nvSpPr>
-          <p:cNvPr id="11" name="Rounded Rectangle 10"/>
-          <p:cNvSpPr/>
-          <p:nvPr/>
-        </p:nvSpPr>
-        <p:spPr>
-          <a:xfrm>
-            <a:off x="822960" y="4160520"/>
-            <a:ext cx="10424160" cy="868680"/>
-          </a:xfrm>
-          <a:prstGeom prst="roundRect">
-            <a:avLst/>
-          </a:prstGeom>
-          <a:solidFill>
-            <a:srgbClr val="FFFFFF"/>
-          </a:solidFill>
-          <a:ln>
-            <a:solidFill>
-              <a:srgbClr val="DCDCDC"/>
-            </a:solidFill>
-          </a:ln>
-        </p:spPr>
-        <p:style>
-          <a:lnRef idx="1">
-            <a:schemeClr val="accent1"/>
-          </a:lnRef>
-          <a:fillRef idx="3">
-            <a:schemeClr val="accent1"/>
-          </a:fillRef>
-          <a:effectRef idx="2">
-            <a:schemeClr val="accent1"/>
-          </a:effectRef>
-          <a:fontRef idx="minor">
-            <a:schemeClr val="lt1"/>
-          </a:fontRef>
-        </p:style>
-        <p:txBody>
-          <a:bodyPr rtlCol="0" anchor="ctr"/>
-          <a:lstStyle/>
-          <a:p>
-            <a:pPr algn="ctr"/>
-          </a:p>
-        </p:txBody>
-      </p:sp>
-      <p:sp>
-        <p:nvSpPr>
-          <p:cNvPr id="12" name="Rectangle 11"/>
-          <p:cNvSpPr/>
-          <p:nvPr/>
-        </p:nvSpPr>
-        <p:spPr>
-          <a:xfrm>
-            <a:off x="822960" y="4160520"/>
-            <a:ext cx="91440" cy="868680"/>
-          </a:xfrm>
-          <a:prstGeom prst="rect">
-            <a:avLst/>
-          </a:prstGeom>
-          <a:solidFill>
-            <a:srgbClr val="F9B700"/>
-          </a:solidFill>
-          <a:ln>
-            <a:noFill/>
-          </a:ln>
-        </p:spPr>
-        <p:style>
-          <a:lnRef idx="1">
-            <a:schemeClr val="accent1"/>
-          </a:lnRef>
-          <a:fillRef idx="3">
-            <a:schemeClr val="accent1"/>
-          </a:fillRef>
-          <a:effectRef idx="2">
-            <a:schemeClr val="accent1"/>
-          </a:effectRef>
-          <a:fontRef idx="minor">
-            <a:schemeClr val="lt1"/>
-          </a:fontRef>
-        </p:style>
-        <p:txBody>
-          <a:bodyPr rtlCol="0" anchor="ctr"/>
-          <a:lstStyle/>
-          <a:p>
-            <a:pPr algn="ctr"/>
-          </a:p>
-        </p:txBody>
-      </p:sp>
-      <p:sp>
-        <p:nvSpPr>
-          <p:cNvPr id="13" name="TextBox 12"/>
-          <p:cNvSpPr txBox="1"/>
-          <p:nvPr/>
-        </p:nvSpPr>
-        <p:spPr>
-          <a:xfrm>
-            <a:off x="1005840" y="4270248"/>
-            <a:ext cx="10104120" cy="704088"/>
-          </a:xfrm>
-          <a:prstGeom prst="rect">
-            <a:avLst/>
-          </a:prstGeom>
-          <a:noFill/>
-        </p:spPr>
-        <p:txBody>
-          <a:bodyPr wrap="square" lIns="0" rIns="0">
-            <a:spAutoFit/>
-          </a:bodyPr>
-          <a:lstStyle/>
-          <a:p>
-            <a:pPr>
-              <a:defRPr b="1" sz="1500">
-                <a:solidFill>
-                  <a:srgbClr val="1E2761"/>
-                </a:solidFill>
-                <a:latin typeface="Aptos Display"/>
-              </a:defRPr>
-            </a:pPr>
-            <a:r>
-              <a:t>Lab connection</a:t>
-            </a:r>
-          </a:p>
-          <a:p>
-            <a:pPr>
-              <a:spcBef>
-                <a:spcPts val="400"/>
-              </a:spcBef>
-              <a:defRPr sz="1050">
-                <a:solidFill>
-                  <a:srgbClr val="242424"/>
-                </a:solidFill>
-                <a:latin typeface="Aptos"/>
-              </a:defRPr>
-            </a:pPr>
-            <a:r>
-              <a:t>Coverage: Partial. Use the lab README to demonstrate or discuss this topic. Review terms: considerations, maintainability, security, systems.</a:t>
+              <a:t>In the lab, you will apply this pattern, validate the expected behavior, and discuss where it fits in a real Power BI solution.</a:t>
             </a:r>
           </a:p>
         </p:txBody>
@@ -6163,42 +6099,6 @@
       </p:sp>
       <p:sp>
         <p:nvSpPr>
-          <p:cNvPr id="4" name="TextBox 3"/>
-          <p:cNvSpPr txBox="1"/>
-          <p:nvPr/>
-        </p:nvSpPr>
-        <p:spPr>
-          <a:xfrm>
-            <a:off x="530352" y="914400"/>
-            <a:ext cx="10515600" cy="320040"/>
-          </a:xfrm>
-          <a:prstGeom prst="rect">
-            <a:avLst/>
-          </a:prstGeom>
-          <a:noFill/>
-        </p:spPr>
-        <p:txBody>
-          <a:bodyPr wrap="none">
-            <a:spAutoFit/>
-          </a:bodyPr>
-          <a:lstStyle/>
-          <a:p>
-            <a:pPr>
-              <a:defRPr sz="1200">
-                <a:solidFill>
-                  <a:srgbClr val="5C5C5C"/>
-                </a:solidFill>
-                <a:latin typeface="Aptos"/>
-              </a:defRPr>
-            </a:pPr>
-            <a:r>
-              <a:t>Talking points, learner value, and lab connection</a:t>
-            </a:r>
-          </a:p>
-        </p:txBody>
-      </p:sp>
-      <p:sp>
-        <p:nvSpPr>
           <p:cNvPr id="5" name="Rounded Rectangle 4"/>
           <p:cNvSpPr/>
           <p:nvPr/>
@@ -6316,7 +6216,139 @@
               </a:defRPr>
             </a:pPr>
             <a:r>
-              <a:t>Talking points</a:t>
+              <a:t>Key ideas</a:t>
+            </a:r>
+            <a:br/>
+            <a:r>
+              <a:t>• Explicit types</a:t>
+            </a:r>
+            <a:br/>
+            <a:r>
+              <a:t>• Replacing errors</a:t>
+            </a:r>
+          </a:p>
+        </p:txBody>
+      </p:sp>
+      <p:sp>
+        <p:nvSpPr>
+          <p:cNvPr id="8" name="Rounded Rectangle 7"/>
+          <p:cNvSpPr/>
+          <p:nvPr/>
+        </p:nvSpPr>
+        <p:spPr>
+          <a:xfrm>
+            <a:off x="6263640" y="1234440"/>
+            <a:ext cx="5303520" cy="1828800"/>
+          </a:xfrm>
+          <a:prstGeom prst="roundRect">
+            <a:avLst/>
+          </a:prstGeom>
+          <a:solidFill>
+            <a:srgbClr val="FFFFFF"/>
+          </a:solidFill>
+          <a:ln>
+            <a:solidFill>
+              <a:srgbClr val="DCDCDC"/>
+            </a:solidFill>
+          </a:ln>
+        </p:spPr>
+        <p:style>
+          <a:lnRef idx="1">
+            <a:schemeClr val="accent1"/>
+          </a:lnRef>
+          <a:fillRef idx="3">
+            <a:schemeClr val="accent1"/>
+          </a:fillRef>
+          <a:effectRef idx="2">
+            <a:schemeClr val="accent1"/>
+          </a:effectRef>
+          <a:fontRef idx="minor">
+            <a:schemeClr val="lt1"/>
+          </a:fontRef>
+        </p:style>
+        <p:txBody>
+          <a:bodyPr rtlCol="0" anchor="ctr"/>
+          <a:lstStyle/>
+          <a:p>
+            <a:pPr algn="ctr"/>
+          </a:p>
+        </p:txBody>
+      </p:sp>
+      <p:sp>
+        <p:nvSpPr>
+          <p:cNvPr id="9" name="Rectangle 8"/>
+          <p:cNvSpPr/>
+          <p:nvPr/>
+        </p:nvSpPr>
+        <p:spPr>
+          <a:xfrm>
+            <a:off x="6263640" y="1234440"/>
+            <a:ext cx="91440" cy="1828800"/>
+          </a:xfrm>
+          <a:prstGeom prst="rect">
+            <a:avLst/>
+          </a:prstGeom>
+          <a:solidFill>
+            <a:srgbClr val="02C39A"/>
+          </a:solidFill>
+          <a:ln>
+            <a:noFill/>
+          </a:ln>
+        </p:spPr>
+        <p:style>
+          <a:lnRef idx="1">
+            <a:schemeClr val="accent1"/>
+          </a:lnRef>
+          <a:fillRef idx="3">
+            <a:schemeClr val="accent1"/>
+          </a:fillRef>
+          <a:effectRef idx="2">
+            <a:schemeClr val="accent1"/>
+          </a:effectRef>
+          <a:fontRef idx="minor">
+            <a:schemeClr val="lt1"/>
+          </a:fontRef>
+        </p:style>
+        <p:txBody>
+          <a:bodyPr rtlCol="0" anchor="ctr"/>
+          <a:lstStyle/>
+          <a:p>
+            <a:pPr algn="ctr"/>
+          </a:p>
+        </p:txBody>
+      </p:sp>
+      <p:sp>
+        <p:nvSpPr>
+          <p:cNvPr id="10" name="TextBox 9"/>
+          <p:cNvSpPr txBox="1"/>
+          <p:nvPr/>
+        </p:nvSpPr>
+        <p:spPr>
+          <a:xfrm>
+            <a:off x="6446520" y="1344168"/>
+            <a:ext cx="4983480" cy="1664208"/>
+          </a:xfrm>
+          <a:prstGeom prst="rect">
+            <a:avLst/>
+          </a:prstGeom>
+          <a:noFill/>
+        </p:spPr>
+        <p:txBody>
+          <a:bodyPr wrap="square" lIns="0" rIns="0">
+            <a:spAutoFit/>
+          </a:bodyPr>
+          <a:lstStyle/>
+          <a:p>
+            <a:pPr>
+              <a:defRPr b="1" sz="1500">
+                <a:solidFill>
+                  <a:srgbClr val="1E2761"/>
+                </a:solidFill>
+                <a:latin typeface="Aptos Display"/>
+              </a:defRPr>
+            </a:pPr>
+            <a:r>
+              <a:t>Why it helps</a:t>
             </a:r>
           </a:p>
           <a:p>
@@ -6332,25 +6364,25 @@
               </a:defRPr>
             </a:pPr>
             <a:r>
-              <a:t>• Explicit types</a:t>
+              <a:t>• Keeping error rows for review</a:t>
             </a:r>
             <a:br/>
             <a:r>
-              <a:t>• Replacing errors</a:t>
-            </a:r>
-          </a:p>
-        </p:txBody>
-      </p:sp>
-      <p:sp>
-        <p:nvSpPr>
-          <p:cNvPr id="8" name="Rounded Rectangle 7"/>
+              <a:t>• Business-rule checks</a:t>
+            </a:r>
+          </a:p>
+        </p:txBody>
+      </p:sp>
+      <p:sp>
+        <p:nvSpPr>
+          <p:cNvPr id="11" name="Rounded Rectangle 10"/>
           <p:cNvSpPr/>
           <p:nvPr/>
         </p:nvSpPr>
         <p:spPr>
           <a:xfrm>
-            <a:off x="6263640" y="1234440"/>
-            <a:ext cx="5303520" cy="1828800"/>
+            <a:off x="822960" y="4160520"/>
+            <a:ext cx="10424160" cy="868680"/>
           </a:xfrm>
           <a:prstGeom prst="roundRect">
             <a:avLst/>
@@ -6388,20 +6420,20 @@
       </p:sp>
       <p:sp>
         <p:nvSpPr>
-          <p:cNvPr id="9" name="Rectangle 8"/>
+          <p:cNvPr id="12" name="Rectangle 11"/>
           <p:cNvSpPr/>
           <p:nvPr/>
         </p:nvSpPr>
         <p:spPr>
           <a:xfrm>
-            <a:off x="6263640" y="1234440"/>
-            <a:ext cx="91440" cy="1828800"/>
+            <a:off x="822960" y="4160520"/>
+            <a:ext cx="91440" cy="868680"/>
           </a:xfrm>
           <a:prstGeom prst="rect">
             <a:avLst/>
           </a:prstGeom>
           <a:solidFill>
-            <a:srgbClr val="02C39A"/>
+            <a:srgbClr val="F9B700"/>
           </a:solidFill>
           <a:ln>
             <a:noFill/>
@@ -6431,14 +6463,14 @@
       </p:sp>
       <p:sp>
         <p:nvSpPr>
-          <p:cNvPr id="10" name="TextBox 9"/>
+          <p:cNvPr id="13" name="TextBox 12"/>
           <p:cNvSpPr txBox="1"/>
           <p:nvPr/>
         </p:nvSpPr>
         <p:spPr>
           <a:xfrm>
-            <a:off x="6446520" y="1344168"/>
-            <a:ext cx="4983480" cy="1664208"/>
+            <a:off x="1005840" y="4270248"/>
+            <a:ext cx="10104120" cy="704088"/>
           </a:xfrm>
           <a:prstGeom prst="rect">
             <a:avLst/>
@@ -6460,167 +6492,7 @@
               </a:defRPr>
             </a:pPr>
             <a:r>
-              <a:t>Why it helps</a:t>
-            </a:r>
-          </a:p>
-          <a:p>
-            <a:pPr>
-              <a:spcBef>
-                <a:spcPts val="400"/>
-              </a:spcBef>
-              <a:defRPr sz="1050">
-                <a:solidFill>
-                  <a:srgbClr val="242424"/>
-                </a:solidFill>
-                <a:latin typeface="Aptos"/>
-              </a:defRPr>
-            </a:pPr>
-            <a:r>
-              <a:t>• Keeping error rows for review</a:t>
-            </a:r>
-            <a:br/>
-            <a:r>
-              <a:t>• Business-rule checks</a:t>
-            </a:r>
-          </a:p>
-        </p:txBody>
-      </p:sp>
-      <p:sp>
-        <p:nvSpPr>
-          <p:cNvPr id="11" name="Rounded Rectangle 10"/>
-          <p:cNvSpPr/>
-          <p:nvPr/>
-        </p:nvSpPr>
-        <p:spPr>
-          <a:xfrm>
-            <a:off x="822960" y="4160520"/>
-            <a:ext cx="10424160" cy="868680"/>
-          </a:xfrm>
-          <a:prstGeom prst="roundRect">
-            <a:avLst/>
-          </a:prstGeom>
-          <a:solidFill>
-            <a:srgbClr val="FFFFFF"/>
-          </a:solidFill>
-          <a:ln>
-            <a:solidFill>
-              <a:srgbClr val="DCDCDC"/>
-            </a:solidFill>
-          </a:ln>
-        </p:spPr>
-        <p:style>
-          <a:lnRef idx="1">
-            <a:schemeClr val="accent1"/>
-          </a:lnRef>
-          <a:fillRef idx="3">
-            <a:schemeClr val="accent1"/>
-          </a:fillRef>
-          <a:effectRef idx="2">
-            <a:schemeClr val="accent1"/>
-          </a:effectRef>
-          <a:fontRef idx="minor">
-            <a:schemeClr val="lt1"/>
-          </a:fontRef>
-        </p:style>
-        <p:txBody>
-          <a:bodyPr rtlCol="0" anchor="ctr"/>
-          <a:lstStyle/>
-          <a:p>
-            <a:pPr algn="ctr"/>
-          </a:p>
-        </p:txBody>
-      </p:sp>
-      <p:sp>
-        <p:nvSpPr>
-          <p:cNvPr id="12" name="Rectangle 11"/>
-          <p:cNvSpPr/>
-          <p:nvPr/>
-        </p:nvSpPr>
-        <p:spPr>
-          <a:xfrm>
-            <a:off x="822960" y="4160520"/>
-            <a:ext cx="91440" cy="868680"/>
-          </a:xfrm>
-          <a:prstGeom prst="rect">
-            <a:avLst/>
-          </a:prstGeom>
-          <a:solidFill>
-            <a:srgbClr val="F9B700"/>
-          </a:solidFill>
-          <a:ln>
-            <a:noFill/>
-          </a:ln>
-        </p:spPr>
-        <p:style>
-          <a:lnRef idx="1">
-            <a:schemeClr val="accent1"/>
-          </a:lnRef>
-          <a:fillRef idx="3">
-            <a:schemeClr val="accent1"/>
-          </a:fillRef>
-          <a:effectRef idx="2">
-            <a:schemeClr val="accent1"/>
-          </a:effectRef>
-          <a:fontRef idx="minor">
-            <a:schemeClr val="lt1"/>
-          </a:fontRef>
-        </p:style>
-        <p:txBody>
-          <a:bodyPr rtlCol="0" anchor="ctr"/>
-          <a:lstStyle/>
-          <a:p>
-            <a:pPr algn="ctr"/>
-          </a:p>
-        </p:txBody>
-      </p:sp>
-      <p:sp>
-        <p:nvSpPr>
-          <p:cNvPr id="13" name="TextBox 12"/>
-          <p:cNvSpPr txBox="1"/>
-          <p:nvPr/>
-        </p:nvSpPr>
-        <p:spPr>
-          <a:xfrm>
-            <a:off x="1005840" y="4270248"/>
-            <a:ext cx="10104120" cy="704088"/>
-          </a:xfrm>
-          <a:prstGeom prst="rect">
-            <a:avLst/>
-          </a:prstGeom>
-          <a:noFill/>
-        </p:spPr>
-        <p:txBody>
-          <a:bodyPr wrap="square" lIns="0" rIns="0">
-            <a:spAutoFit/>
-          </a:bodyPr>
-          <a:lstStyle/>
-          <a:p>
-            <a:pPr>
-              <a:defRPr b="1" sz="1500">
-                <a:solidFill>
-                  <a:srgbClr val="1E2761"/>
-                </a:solidFill>
-                <a:latin typeface="Aptos Display"/>
-              </a:defRPr>
-            </a:pPr>
-            <a:r>
-              <a:t>Lab connection</a:t>
-            </a:r>
-          </a:p>
-          <a:p>
-            <a:pPr>
-              <a:spcBef>
-                <a:spcPts val="400"/>
-              </a:spcBef>
-              <a:defRPr sz="1050">
-                <a:solidFill>
-                  <a:srgbClr val="242424"/>
-                </a:solidFill>
-                <a:latin typeface="Aptos"/>
-              </a:defRPr>
-            </a:pPr>
-            <a:r>
-              <a:t>Coverage: Partial. Use the lab README to demonstrate or discuss this topic. Review terms: business, checks, errors, keeping, replacing.</a:t>
+              <a:t>In the lab, you will apply this pattern, validate the expected behavior, and discuss where it fits in a real Power BI solution.</a:t>
             </a:r>
           </a:p>
         </p:txBody>
@@ -6759,42 +6631,6 @@
       </p:sp>
       <p:sp>
         <p:nvSpPr>
-          <p:cNvPr id="4" name="TextBox 3"/>
-          <p:cNvSpPr txBox="1"/>
-          <p:nvPr/>
-        </p:nvSpPr>
-        <p:spPr>
-          <a:xfrm>
-            <a:off x="530352" y="914400"/>
-            <a:ext cx="10515600" cy="320040"/>
-          </a:xfrm>
-          <a:prstGeom prst="rect">
-            <a:avLst/>
-          </a:prstGeom>
-          <a:noFill/>
-        </p:spPr>
-        <p:txBody>
-          <a:bodyPr wrap="none">
-            <a:spAutoFit/>
-          </a:bodyPr>
-          <a:lstStyle/>
-          <a:p>
-            <a:pPr>
-              <a:defRPr sz="1200">
-                <a:solidFill>
-                  <a:srgbClr val="5C5C5C"/>
-                </a:solidFill>
-                <a:latin typeface="Aptos"/>
-              </a:defRPr>
-            </a:pPr>
-            <a:r>
-              <a:t>Talking points, learner value, and lab connection</a:t>
-            </a:r>
-          </a:p>
-        </p:txBody>
-      </p:sp>
-      <p:sp>
-        <p:nvSpPr>
           <p:cNvPr id="5" name="Rounded Rectangle 4"/>
           <p:cNvSpPr/>
           <p:nvPr/>
@@ -6912,7 +6748,139 @@
               </a:defRPr>
             </a:pPr>
             <a:r>
-              <a:t>Talking points</a:t>
+              <a:t>Key ideas</a:t>
+            </a:r>
+            <a:br/>
+            <a:r>
+              <a:t>• DateTime requirements</a:t>
+            </a:r>
+            <a:br/>
+            <a:r>
+              <a:t>• RangeStart and RangeEnd</a:t>
+            </a:r>
+          </a:p>
+        </p:txBody>
+      </p:sp>
+      <p:sp>
+        <p:nvSpPr>
+          <p:cNvPr id="8" name="Rounded Rectangle 7"/>
+          <p:cNvSpPr/>
+          <p:nvPr/>
+        </p:nvSpPr>
+        <p:spPr>
+          <a:xfrm>
+            <a:off x="6263640" y="1234440"/>
+            <a:ext cx="5303520" cy="1828800"/>
+          </a:xfrm>
+          <a:prstGeom prst="roundRect">
+            <a:avLst/>
+          </a:prstGeom>
+          <a:solidFill>
+            <a:srgbClr val="FFFFFF"/>
+          </a:solidFill>
+          <a:ln>
+            <a:solidFill>
+              <a:srgbClr val="DCDCDC"/>
+            </a:solidFill>
+          </a:ln>
+        </p:spPr>
+        <p:style>
+          <a:lnRef idx="1">
+            <a:schemeClr val="accent1"/>
+          </a:lnRef>
+          <a:fillRef idx="3">
+            <a:schemeClr val="accent1"/>
+          </a:fillRef>
+          <a:effectRef idx="2">
+            <a:schemeClr val="accent1"/>
+          </a:effectRef>
+          <a:fontRef idx="minor">
+            <a:schemeClr val="lt1"/>
+          </a:fontRef>
+        </p:style>
+        <p:txBody>
+          <a:bodyPr rtlCol="0" anchor="ctr"/>
+          <a:lstStyle/>
+          <a:p>
+            <a:pPr algn="ctr"/>
+          </a:p>
+        </p:txBody>
+      </p:sp>
+      <p:sp>
+        <p:nvSpPr>
+          <p:cNvPr id="9" name="Rectangle 8"/>
+          <p:cNvSpPr/>
+          <p:nvPr/>
+        </p:nvSpPr>
+        <p:spPr>
+          <a:xfrm>
+            <a:off x="6263640" y="1234440"/>
+            <a:ext cx="91440" cy="1828800"/>
+          </a:xfrm>
+          <a:prstGeom prst="rect">
+            <a:avLst/>
+          </a:prstGeom>
+          <a:solidFill>
+            <a:srgbClr val="02C39A"/>
+          </a:solidFill>
+          <a:ln>
+            <a:noFill/>
+          </a:ln>
+        </p:spPr>
+        <p:style>
+          <a:lnRef idx="1">
+            <a:schemeClr val="accent1"/>
+          </a:lnRef>
+          <a:fillRef idx="3">
+            <a:schemeClr val="accent1"/>
+          </a:fillRef>
+          <a:effectRef idx="2">
+            <a:schemeClr val="accent1"/>
+          </a:effectRef>
+          <a:fontRef idx="minor">
+            <a:schemeClr val="lt1"/>
+          </a:fontRef>
+        </p:style>
+        <p:txBody>
+          <a:bodyPr rtlCol="0" anchor="ctr"/>
+          <a:lstStyle/>
+          <a:p>
+            <a:pPr algn="ctr"/>
+          </a:p>
+        </p:txBody>
+      </p:sp>
+      <p:sp>
+        <p:nvSpPr>
+          <p:cNvPr id="10" name="TextBox 9"/>
+          <p:cNvSpPr txBox="1"/>
+          <p:nvPr/>
+        </p:nvSpPr>
+        <p:spPr>
+          <a:xfrm>
+            <a:off x="6446520" y="1344168"/>
+            <a:ext cx="4983480" cy="1664208"/>
+          </a:xfrm>
+          <a:prstGeom prst="rect">
+            <a:avLst/>
+          </a:prstGeom>
+          <a:noFill/>
+        </p:spPr>
+        <p:txBody>
+          <a:bodyPr wrap="square" lIns="0" rIns="0">
+            <a:spAutoFit/>
+          </a:bodyPr>
+          <a:lstStyle/>
+          <a:p>
+            <a:pPr>
+              <a:defRPr b="1" sz="1500">
+                <a:solidFill>
+                  <a:srgbClr val="1E2761"/>
+                </a:solidFill>
+                <a:latin typeface="Aptos Display"/>
+              </a:defRPr>
+            </a:pPr>
+            <a:r>
+              <a:t>Why it helps</a:t>
             </a:r>
           </a:p>
           <a:p>
@@ -6928,25 +6896,25 @@
               </a:defRPr>
             </a:pPr>
             <a:r>
-              <a:t>• DateTime requirements</a:t>
+              <a:t>• Filtering fact data</a:t>
             </a:r>
             <a:br/>
             <a:r>
-              <a:t>• RangeStart and RangeEnd</a:t>
-            </a:r>
-          </a:p>
-        </p:txBody>
-      </p:sp>
-      <p:sp>
-        <p:nvSpPr>
-          <p:cNvPr id="8" name="Rounded Rectangle 7"/>
+              <a:t>• Service policy validation</a:t>
+            </a:r>
+          </a:p>
+        </p:txBody>
+      </p:sp>
+      <p:sp>
+        <p:nvSpPr>
+          <p:cNvPr id="11" name="Rounded Rectangle 10"/>
           <p:cNvSpPr/>
           <p:nvPr/>
         </p:nvSpPr>
         <p:spPr>
           <a:xfrm>
-            <a:off x="6263640" y="1234440"/>
-            <a:ext cx="5303520" cy="1828800"/>
+            <a:off x="822960" y="4160520"/>
+            <a:ext cx="10424160" cy="868680"/>
           </a:xfrm>
           <a:prstGeom prst="roundRect">
             <a:avLst/>
@@ -6984,20 +6952,20 @@
       </p:sp>
       <p:sp>
         <p:nvSpPr>
-          <p:cNvPr id="9" name="Rectangle 8"/>
+          <p:cNvPr id="12" name="Rectangle 11"/>
           <p:cNvSpPr/>
           <p:nvPr/>
         </p:nvSpPr>
         <p:spPr>
           <a:xfrm>
-            <a:off x="6263640" y="1234440"/>
-            <a:ext cx="91440" cy="1828800"/>
+            <a:off x="822960" y="4160520"/>
+            <a:ext cx="91440" cy="868680"/>
           </a:xfrm>
           <a:prstGeom prst="rect">
             <a:avLst/>
           </a:prstGeom>
           <a:solidFill>
-            <a:srgbClr val="02C39A"/>
+            <a:srgbClr val="F9B700"/>
           </a:solidFill>
           <a:ln>
             <a:noFill/>
@@ -7027,14 +6995,14 @@
       </p:sp>
       <p:sp>
         <p:nvSpPr>
-          <p:cNvPr id="10" name="TextBox 9"/>
+          <p:cNvPr id="13" name="TextBox 12"/>
           <p:cNvSpPr txBox="1"/>
           <p:nvPr/>
         </p:nvSpPr>
         <p:spPr>
           <a:xfrm>
-            <a:off x="6446520" y="1344168"/>
-            <a:ext cx="4983480" cy="1664208"/>
+            <a:off x="1005840" y="4270248"/>
+            <a:ext cx="10104120" cy="704088"/>
           </a:xfrm>
           <a:prstGeom prst="rect">
             <a:avLst/>
@@ -7056,167 +7024,7 @@
               </a:defRPr>
             </a:pPr>
             <a:r>
-              <a:t>Why it helps</a:t>
-            </a:r>
-          </a:p>
-          <a:p>
-            <a:pPr>
-              <a:spcBef>
-                <a:spcPts val="400"/>
-              </a:spcBef>
-              <a:defRPr sz="1050">
-                <a:solidFill>
-                  <a:srgbClr val="242424"/>
-                </a:solidFill>
-                <a:latin typeface="Aptos"/>
-              </a:defRPr>
-            </a:pPr>
-            <a:r>
-              <a:t>• Filtering fact data</a:t>
-            </a:r>
-            <a:br/>
-            <a:r>
-              <a:t>• Service policy validation</a:t>
-            </a:r>
-          </a:p>
-        </p:txBody>
-      </p:sp>
-      <p:sp>
-        <p:nvSpPr>
-          <p:cNvPr id="11" name="Rounded Rectangle 10"/>
-          <p:cNvSpPr/>
-          <p:nvPr/>
-        </p:nvSpPr>
-        <p:spPr>
-          <a:xfrm>
-            <a:off x="822960" y="4160520"/>
-            <a:ext cx="10424160" cy="868680"/>
-          </a:xfrm>
-          <a:prstGeom prst="roundRect">
-            <a:avLst/>
-          </a:prstGeom>
-          <a:solidFill>
-            <a:srgbClr val="FFFFFF"/>
-          </a:solidFill>
-          <a:ln>
-            <a:solidFill>
-              <a:srgbClr val="DCDCDC"/>
-            </a:solidFill>
-          </a:ln>
-        </p:spPr>
-        <p:style>
-          <a:lnRef idx="1">
-            <a:schemeClr val="accent1"/>
-          </a:lnRef>
-          <a:fillRef idx="3">
-            <a:schemeClr val="accent1"/>
-          </a:fillRef>
-          <a:effectRef idx="2">
-            <a:schemeClr val="accent1"/>
-          </a:effectRef>
-          <a:fontRef idx="minor">
-            <a:schemeClr val="lt1"/>
-          </a:fontRef>
-        </p:style>
-        <p:txBody>
-          <a:bodyPr rtlCol="0" anchor="ctr"/>
-          <a:lstStyle/>
-          <a:p>
-            <a:pPr algn="ctr"/>
-          </a:p>
-        </p:txBody>
-      </p:sp>
-      <p:sp>
-        <p:nvSpPr>
-          <p:cNvPr id="12" name="Rectangle 11"/>
-          <p:cNvSpPr/>
-          <p:nvPr/>
-        </p:nvSpPr>
-        <p:spPr>
-          <a:xfrm>
-            <a:off x="822960" y="4160520"/>
-            <a:ext cx="91440" cy="868680"/>
-          </a:xfrm>
-          <a:prstGeom prst="rect">
-            <a:avLst/>
-          </a:prstGeom>
-          <a:solidFill>
-            <a:srgbClr val="F9B700"/>
-          </a:solidFill>
-          <a:ln>
-            <a:noFill/>
-          </a:ln>
-        </p:spPr>
-        <p:style>
-          <a:lnRef idx="1">
-            <a:schemeClr val="accent1"/>
-          </a:lnRef>
-          <a:fillRef idx="3">
-            <a:schemeClr val="accent1"/>
-          </a:fillRef>
-          <a:effectRef idx="2">
-            <a:schemeClr val="accent1"/>
-          </a:effectRef>
-          <a:fontRef idx="minor">
-            <a:schemeClr val="lt1"/>
-          </a:fontRef>
-        </p:style>
-        <p:txBody>
-          <a:bodyPr rtlCol="0" anchor="ctr"/>
-          <a:lstStyle/>
-          <a:p>
-            <a:pPr algn="ctr"/>
-          </a:p>
-        </p:txBody>
-      </p:sp>
-      <p:sp>
-        <p:nvSpPr>
-          <p:cNvPr id="13" name="TextBox 12"/>
-          <p:cNvSpPr txBox="1"/>
-          <p:nvPr/>
-        </p:nvSpPr>
-        <p:spPr>
-          <a:xfrm>
-            <a:off x="1005840" y="4270248"/>
-            <a:ext cx="10104120" cy="704088"/>
-          </a:xfrm>
-          <a:prstGeom prst="rect">
-            <a:avLst/>
-          </a:prstGeom>
-          <a:noFill/>
-        </p:spPr>
-        <p:txBody>
-          <a:bodyPr wrap="square" lIns="0" rIns="0">
-            <a:spAutoFit/>
-          </a:bodyPr>
-          <a:lstStyle/>
-          <a:p>
-            <a:pPr>
-              <a:defRPr b="1" sz="1500">
-                <a:solidFill>
-                  <a:srgbClr val="1E2761"/>
-                </a:solidFill>
-                <a:latin typeface="Aptos Display"/>
-              </a:defRPr>
-            </a:pPr>
-            <a:r>
-              <a:t>Lab connection</a:t>
-            </a:r>
-          </a:p>
-          <a:p>
-            <a:pPr>
-              <a:spcBef>
-                <a:spcPts val="400"/>
-              </a:spcBef>
-              <a:defRPr sz="1050">
-                <a:solidFill>
-                  <a:srgbClr val="242424"/>
-                </a:solidFill>
-                <a:latin typeface="Aptos"/>
-              </a:defRPr>
-            </a:pPr>
-            <a:r>
-              <a:t>Coverage: Covered. Use the lab README to demonstrate or discuss this topic. Review terms: none.</a:t>
+              <a:t>In the lab, you will apply this pattern, validate the expected behavior, and discuss where it fits in a real Power BI solution.</a:t>
             </a:r>
           </a:p>
         </p:txBody>
@@ -7355,42 +7163,6 @@
       </p:sp>
       <p:sp>
         <p:nvSpPr>
-          <p:cNvPr id="4" name="TextBox 3"/>
-          <p:cNvSpPr txBox="1"/>
-          <p:nvPr/>
-        </p:nvSpPr>
-        <p:spPr>
-          <a:xfrm>
-            <a:off x="530352" y="914400"/>
-            <a:ext cx="10515600" cy="320040"/>
-          </a:xfrm>
-          <a:prstGeom prst="rect">
-            <a:avLst/>
-          </a:prstGeom>
-          <a:noFill/>
-        </p:spPr>
-        <p:txBody>
-          <a:bodyPr wrap="none">
-            <a:spAutoFit/>
-          </a:bodyPr>
-          <a:lstStyle/>
-          <a:p>
-            <a:pPr>
-              <a:defRPr sz="1200">
-                <a:solidFill>
-                  <a:srgbClr val="5C5C5C"/>
-                </a:solidFill>
-                <a:latin typeface="Aptos"/>
-              </a:defRPr>
-            </a:pPr>
-            <a:r>
-              <a:t>Talking points, learner value, and lab connection</a:t>
-            </a:r>
-          </a:p>
-        </p:txBody>
-      </p:sp>
-      <p:sp>
-        <p:nvSpPr>
           <p:cNvPr id="5" name="Rounded Rectangle 4"/>
           <p:cNvSpPr/>
           <p:nvPr/>
@@ -7508,7 +7280,139 @@
               </a:defRPr>
             </a:pPr>
             <a:r>
-              <a:t>Talking points</a:t>
+              <a:t>Key ideas</a:t>
+            </a:r>
+            <a:br/>
+            <a:r>
+              <a:t>• Core Desktop transformations are Gov-ready.</a:t>
+            </a:r>
+            <a:br/>
+            <a:r>
+              <a:t>• Connectors and dataflows require validation.</a:t>
+            </a:r>
+          </a:p>
+        </p:txBody>
+      </p:sp>
+      <p:sp>
+        <p:nvSpPr>
+          <p:cNvPr id="8" name="Rounded Rectangle 7"/>
+          <p:cNvSpPr/>
+          <p:nvPr/>
+        </p:nvSpPr>
+        <p:spPr>
+          <a:xfrm>
+            <a:off x="6263640" y="1234440"/>
+            <a:ext cx="5303520" cy="1828800"/>
+          </a:xfrm>
+          <a:prstGeom prst="roundRect">
+            <a:avLst/>
+          </a:prstGeom>
+          <a:solidFill>
+            <a:srgbClr val="FFFFFF"/>
+          </a:solidFill>
+          <a:ln>
+            <a:solidFill>
+              <a:srgbClr val="DCDCDC"/>
+            </a:solidFill>
+          </a:ln>
+        </p:spPr>
+        <p:style>
+          <a:lnRef idx="1">
+            <a:schemeClr val="accent1"/>
+          </a:lnRef>
+          <a:fillRef idx="3">
+            <a:schemeClr val="accent1"/>
+          </a:fillRef>
+          <a:effectRef idx="2">
+            <a:schemeClr val="accent1"/>
+          </a:effectRef>
+          <a:fontRef idx="minor">
+            <a:schemeClr val="lt1"/>
+          </a:fontRef>
+        </p:style>
+        <p:txBody>
+          <a:bodyPr rtlCol="0" anchor="ctr"/>
+          <a:lstStyle/>
+          <a:p>
+            <a:pPr algn="ctr"/>
+          </a:p>
+        </p:txBody>
+      </p:sp>
+      <p:sp>
+        <p:nvSpPr>
+          <p:cNvPr id="9" name="Rectangle 8"/>
+          <p:cNvSpPr/>
+          <p:nvPr/>
+        </p:nvSpPr>
+        <p:spPr>
+          <a:xfrm>
+            <a:off x="6263640" y="1234440"/>
+            <a:ext cx="91440" cy="1828800"/>
+          </a:xfrm>
+          <a:prstGeom prst="rect">
+            <a:avLst/>
+          </a:prstGeom>
+          <a:solidFill>
+            <a:srgbClr val="02C39A"/>
+          </a:solidFill>
+          <a:ln>
+            <a:noFill/>
+          </a:ln>
+        </p:spPr>
+        <p:style>
+          <a:lnRef idx="1">
+            <a:schemeClr val="accent1"/>
+          </a:lnRef>
+          <a:fillRef idx="3">
+            <a:schemeClr val="accent1"/>
+          </a:fillRef>
+          <a:effectRef idx="2">
+            <a:schemeClr val="accent1"/>
+          </a:effectRef>
+          <a:fontRef idx="minor">
+            <a:schemeClr val="lt1"/>
+          </a:fontRef>
+        </p:style>
+        <p:txBody>
+          <a:bodyPr rtlCol="0" anchor="ctr"/>
+          <a:lstStyle/>
+          <a:p>
+            <a:pPr algn="ctr"/>
+          </a:p>
+        </p:txBody>
+      </p:sp>
+      <p:sp>
+        <p:nvSpPr>
+          <p:cNvPr id="10" name="TextBox 9"/>
+          <p:cNvSpPr txBox="1"/>
+          <p:nvPr/>
+        </p:nvSpPr>
+        <p:spPr>
+          <a:xfrm>
+            <a:off x="6446520" y="1344168"/>
+            <a:ext cx="4983480" cy="1664208"/>
+          </a:xfrm>
+          <a:prstGeom prst="rect">
+            <a:avLst/>
+          </a:prstGeom>
+          <a:noFill/>
+        </p:spPr>
+        <p:txBody>
+          <a:bodyPr wrap="square" lIns="0" rIns="0">
+            <a:spAutoFit/>
+          </a:bodyPr>
+          <a:lstStyle/>
+          <a:p>
+            <a:pPr>
+              <a:defRPr b="1" sz="1500">
+                <a:solidFill>
+                  <a:srgbClr val="1E2761"/>
+                </a:solidFill>
+                <a:latin typeface="Aptos Display"/>
+              </a:defRPr>
+            </a:pPr>
+            <a:r>
+              <a:t>Why it helps</a:t>
             </a:r>
           </a:p>
           <a:p>
@@ -7524,25 +7428,21 @@
               </a:defRPr>
             </a:pPr>
             <a:r>
-              <a:t>• Core Desktop transformations are Gov-ready.</a:t>
-            </a:r>
-            <a:br/>
-            <a:r>
-              <a:t>• Connectors and dataflows require validation.</a:t>
-            </a:r>
-          </a:p>
-        </p:txBody>
-      </p:sp>
-      <p:sp>
-        <p:nvSpPr>
-          <p:cNvPr id="8" name="Rounded Rectangle 7"/>
+              <a:t>• Dataflows Gen2 is commercial-focused unless confirmed.</a:t>
+            </a:r>
+          </a:p>
+        </p:txBody>
+      </p:sp>
+      <p:sp>
+        <p:nvSpPr>
+          <p:cNvPr id="11" name="Rounded Rectangle 10"/>
           <p:cNvSpPr/>
           <p:nvPr/>
         </p:nvSpPr>
         <p:spPr>
           <a:xfrm>
-            <a:off x="6263640" y="1234440"/>
-            <a:ext cx="5303520" cy="1828800"/>
+            <a:off x="822960" y="4160520"/>
+            <a:ext cx="10424160" cy="868680"/>
           </a:xfrm>
           <a:prstGeom prst="roundRect">
             <a:avLst/>
@@ -7580,20 +7480,20 @@
       </p:sp>
       <p:sp>
         <p:nvSpPr>
-          <p:cNvPr id="9" name="Rectangle 8"/>
+          <p:cNvPr id="12" name="Rectangle 11"/>
           <p:cNvSpPr/>
           <p:nvPr/>
         </p:nvSpPr>
         <p:spPr>
           <a:xfrm>
-            <a:off x="6263640" y="1234440"/>
-            <a:ext cx="91440" cy="1828800"/>
+            <a:off x="822960" y="4160520"/>
+            <a:ext cx="91440" cy="868680"/>
           </a:xfrm>
           <a:prstGeom prst="rect">
             <a:avLst/>
           </a:prstGeom>
           <a:solidFill>
-            <a:srgbClr val="02C39A"/>
+            <a:srgbClr val="F9B700"/>
           </a:solidFill>
           <a:ln>
             <a:noFill/>
@@ -7623,14 +7523,14 @@
       </p:sp>
       <p:sp>
         <p:nvSpPr>
-          <p:cNvPr id="10" name="TextBox 9"/>
+          <p:cNvPr id="13" name="TextBox 12"/>
           <p:cNvSpPr txBox="1"/>
           <p:nvPr/>
         </p:nvSpPr>
         <p:spPr>
           <a:xfrm>
-            <a:off x="6446520" y="1344168"/>
-            <a:ext cx="4983480" cy="1664208"/>
+            <a:off x="1005840" y="4270248"/>
+            <a:ext cx="10104120" cy="704088"/>
           </a:xfrm>
           <a:prstGeom prst="rect">
             <a:avLst/>
@@ -7652,163 +7552,7 @@
               </a:defRPr>
             </a:pPr>
             <a:r>
-              <a:t>Why it helps</a:t>
-            </a:r>
-          </a:p>
-          <a:p>
-            <a:pPr>
-              <a:spcBef>
-                <a:spcPts val="400"/>
-              </a:spcBef>
-              <a:defRPr sz="1050">
-                <a:solidFill>
-                  <a:srgbClr val="242424"/>
-                </a:solidFill>
-                <a:latin typeface="Aptos"/>
-              </a:defRPr>
-            </a:pPr>
-            <a:r>
-              <a:t>• Dataflows Gen2 is commercial-focused unless confirmed.</a:t>
-            </a:r>
-          </a:p>
-        </p:txBody>
-      </p:sp>
-      <p:sp>
-        <p:nvSpPr>
-          <p:cNvPr id="11" name="Rounded Rectangle 10"/>
-          <p:cNvSpPr/>
-          <p:nvPr/>
-        </p:nvSpPr>
-        <p:spPr>
-          <a:xfrm>
-            <a:off x="822960" y="4160520"/>
-            <a:ext cx="10424160" cy="868680"/>
-          </a:xfrm>
-          <a:prstGeom prst="roundRect">
-            <a:avLst/>
-          </a:prstGeom>
-          <a:solidFill>
-            <a:srgbClr val="FFFFFF"/>
-          </a:solidFill>
-          <a:ln>
-            <a:solidFill>
-              <a:srgbClr val="DCDCDC"/>
-            </a:solidFill>
-          </a:ln>
-        </p:spPr>
-        <p:style>
-          <a:lnRef idx="1">
-            <a:schemeClr val="accent1"/>
-          </a:lnRef>
-          <a:fillRef idx="3">
-            <a:schemeClr val="accent1"/>
-          </a:fillRef>
-          <a:effectRef idx="2">
-            <a:schemeClr val="accent1"/>
-          </a:effectRef>
-          <a:fontRef idx="minor">
-            <a:schemeClr val="lt1"/>
-          </a:fontRef>
-        </p:style>
-        <p:txBody>
-          <a:bodyPr rtlCol="0" anchor="ctr"/>
-          <a:lstStyle/>
-          <a:p>
-            <a:pPr algn="ctr"/>
-          </a:p>
-        </p:txBody>
-      </p:sp>
-      <p:sp>
-        <p:nvSpPr>
-          <p:cNvPr id="12" name="Rectangle 11"/>
-          <p:cNvSpPr/>
-          <p:nvPr/>
-        </p:nvSpPr>
-        <p:spPr>
-          <a:xfrm>
-            <a:off x="822960" y="4160520"/>
-            <a:ext cx="91440" cy="868680"/>
-          </a:xfrm>
-          <a:prstGeom prst="rect">
-            <a:avLst/>
-          </a:prstGeom>
-          <a:solidFill>
-            <a:srgbClr val="F9B700"/>
-          </a:solidFill>
-          <a:ln>
-            <a:noFill/>
-          </a:ln>
-        </p:spPr>
-        <p:style>
-          <a:lnRef idx="1">
-            <a:schemeClr val="accent1"/>
-          </a:lnRef>
-          <a:fillRef idx="3">
-            <a:schemeClr val="accent1"/>
-          </a:fillRef>
-          <a:effectRef idx="2">
-            <a:schemeClr val="accent1"/>
-          </a:effectRef>
-          <a:fontRef idx="minor">
-            <a:schemeClr val="lt1"/>
-          </a:fontRef>
-        </p:style>
-        <p:txBody>
-          <a:bodyPr rtlCol="0" anchor="ctr"/>
-          <a:lstStyle/>
-          <a:p>
-            <a:pPr algn="ctr"/>
-          </a:p>
-        </p:txBody>
-      </p:sp>
-      <p:sp>
-        <p:nvSpPr>
-          <p:cNvPr id="13" name="TextBox 12"/>
-          <p:cNvSpPr txBox="1"/>
-          <p:nvPr/>
-        </p:nvSpPr>
-        <p:spPr>
-          <a:xfrm>
-            <a:off x="1005840" y="4270248"/>
-            <a:ext cx="10104120" cy="704088"/>
-          </a:xfrm>
-          <a:prstGeom prst="rect">
-            <a:avLst/>
-          </a:prstGeom>
-          <a:noFill/>
-        </p:spPr>
-        <p:txBody>
-          <a:bodyPr wrap="square" lIns="0" rIns="0">
-            <a:spAutoFit/>
-          </a:bodyPr>
-          <a:lstStyle/>
-          <a:p>
-            <a:pPr>
-              <a:defRPr b="1" sz="1500">
-                <a:solidFill>
-                  <a:srgbClr val="1E2761"/>
-                </a:solidFill>
-                <a:latin typeface="Aptos Display"/>
-              </a:defRPr>
-            </a:pPr>
-            <a:r>
-              <a:t>Lab connection</a:t>
-            </a:r>
-          </a:p>
-          <a:p>
-            <a:pPr>
-              <a:spcBef>
-                <a:spcPts val="400"/>
-              </a:spcBef>
-              <a:defRPr sz="1050">
-                <a:solidFill>
-                  <a:srgbClr val="242424"/>
-                </a:solidFill>
-                <a:latin typeface="Aptos"/>
-              </a:defRPr>
-            </a:pPr>
-            <a:r>
-              <a:t>Coverage: Covered. Use the lab README to demonstrate or discuss this topic. Review terms: confirmed, considerations.</a:t>
+              <a:t>In the lab, you will apply this pattern, validate the expected behavior, and discuss where it fits in a real Power BI solution.</a:t>
             </a:r>
           </a:p>
         </p:txBody>
@@ -7947,42 +7691,6 @@
       </p:sp>
       <p:sp>
         <p:nvSpPr>
-          <p:cNvPr id="4" name="TextBox 3"/>
-          <p:cNvSpPr txBox="1"/>
-          <p:nvPr/>
-        </p:nvSpPr>
-        <p:spPr>
-          <a:xfrm>
-            <a:off x="530352" y="914400"/>
-            <a:ext cx="10515600" cy="320040"/>
-          </a:xfrm>
-          <a:prstGeom prst="rect">
-            <a:avLst/>
-          </a:prstGeom>
-          <a:noFill/>
-        </p:spPr>
-        <p:txBody>
-          <a:bodyPr wrap="none">
-            <a:spAutoFit/>
-          </a:bodyPr>
-          <a:lstStyle/>
-          <a:p>
-            <a:pPr>
-              <a:defRPr sz="1200">
-                <a:solidFill>
-                  <a:srgbClr val="5C5C5C"/>
-                </a:solidFill>
-                <a:latin typeface="Aptos"/>
-              </a:defRPr>
-            </a:pPr>
-            <a:r>
-              <a:t>Talking points, learner value, and lab connection</a:t>
-            </a:r>
-          </a:p>
-        </p:txBody>
-      </p:sp>
-      <p:sp>
-        <p:nvSpPr>
           <p:cNvPr id="5" name="Rounded Rectangle 4"/>
           <p:cNvSpPr/>
           <p:nvPr/>
@@ -8100,7 +7808,139 @@
               </a:defRPr>
             </a:pPr>
             <a:r>
-              <a:t>Talking points</a:t>
+              <a:t>Key ideas</a:t>
+            </a:r>
+            <a:br/>
+            <a:r>
+              <a:t>• Staged solution</a:t>
+            </a:r>
+            <a:br/>
+            <a:r>
+              <a:t>• Folder combine</a:t>
+            </a:r>
+          </a:p>
+        </p:txBody>
+      </p:sp>
+      <p:sp>
+        <p:nvSpPr>
+          <p:cNvPr id="8" name="Rounded Rectangle 7"/>
+          <p:cNvSpPr/>
+          <p:nvPr/>
+        </p:nvSpPr>
+        <p:spPr>
+          <a:xfrm>
+            <a:off x="6263640" y="1234440"/>
+            <a:ext cx="5303520" cy="1828800"/>
+          </a:xfrm>
+          <a:prstGeom prst="roundRect">
+            <a:avLst/>
+          </a:prstGeom>
+          <a:solidFill>
+            <a:srgbClr val="FFFFFF"/>
+          </a:solidFill>
+          <a:ln>
+            <a:solidFill>
+              <a:srgbClr val="DCDCDC"/>
+            </a:solidFill>
+          </a:ln>
+        </p:spPr>
+        <p:style>
+          <a:lnRef idx="1">
+            <a:schemeClr val="accent1"/>
+          </a:lnRef>
+          <a:fillRef idx="3">
+            <a:schemeClr val="accent1"/>
+          </a:fillRef>
+          <a:effectRef idx="2">
+            <a:schemeClr val="accent1"/>
+          </a:effectRef>
+          <a:fontRef idx="minor">
+            <a:schemeClr val="lt1"/>
+          </a:fontRef>
+        </p:style>
+        <p:txBody>
+          <a:bodyPr rtlCol="0" anchor="ctr"/>
+          <a:lstStyle/>
+          <a:p>
+            <a:pPr algn="ctr"/>
+          </a:p>
+        </p:txBody>
+      </p:sp>
+      <p:sp>
+        <p:nvSpPr>
+          <p:cNvPr id="9" name="Rectangle 8"/>
+          <p:cNvSpPr/>
+          <p:nvPr/>
+        </p:nvSpPr>
+        <p:spPr>
+          <a:xfrm>
+            <a:off x="6263640" y="1234440"/>
+            <a:ext cx="91440" cy="1828800"/>
+          </a:xfrm>
+          <a:prstGeom prst="rect">
+            <a:avLst/>
+          </a:prstGeom>
+          <a:solidFill>
+            <a:srgbClr val="02C39A"/>
+          </a:solidFill>
+          <a:ln>
+            <a:noFill/>
+          </a:ln>
+        </p:spPr>
+        <p:style>
+          <a:lnRef idx="1">
+            <a:schemeClr val="accent1"/>
+          </a:lnRef>
+          <a:fillRef idx="3">
+            <a:schemeClr val="accent1"/>
+          </a:fillRef>
+          <a:effectRef idx="2">
+            <a:schemeClr val="accent1"/>
+          </a:effectRef>
+          <a:fontRef idx="minor">
+            <a:schemeClr val="lt1"/>
+          </a:fontRef>
+        </p:style>
+        <p:txBody>
+          <a:bodyPr rtlCol="0" anchor="ctr"/>
+          <a:lstStyle/>
+          <a:p>
+            <a:pPr algn="ctr"/>
+          </a:p>
+        </p:txBody>
+      </p:sp>
+      <p:sp>
+        <p:nvSpPr>
+          <p:cNvPr id="10" name="TextBox 9"/>
+          <p:cNvSpPr txBox="1"/>
+          <p:nvPr/>
+        </p:nvSpPr>
+        <p:spPr>
+          <a:xfrm>
+            <a:off x="6446520" y="1344168"/>
+            <a:ext cx="4983480" cy="1664208"/>
+          </a:xfrm>
+          <a:prstGeom prst="rect">
+            <a:avLst/>
+          </a:prstGeom>
+          <a:noFill/>
+        </p:spPr>
+        <p:txBody>
+          <a:bodyPr wrap="square" lIns="0" rIns="0">
+            <a:spAutoFit/>
+          </a:bodyPr>
+          <a:lstStyle/>
+          <a:p>
+            <a:pPr>
+              <a:defRPr b="1" sz="1500">
+                <a:solidFill>
+                  <a:srgbClr val="1E2761"/>
+                </a:solidFill>
+                <a:latin typeface="Aptos Display"/>
+              </a:defRPr>
+            </a:pPr>
+            <a:r>
+              <a:t>Why it helps</a:t>
             </a:r>
           </a:p>
           <a:p>
@@ -8116,25 +7956,25 @@
               </a:defRPr>
             </a:pPr>
             <a:r>
-              <a:t>• Staged solution</a:t>
+              <a:t>• Parameters and functions</a:t>
             </a:r>
             <a:br/>
             <a:r>
-              <a:t>• Folder combine</a:t>
-            </a:r>
-          </a:p>
-        </p:txBody>
-      </p:sp>
-      <p:sp>
-        <p:nvSpPr>
-          <p:cNvPr id="8" name="Rounded Rectangle 7"/>
+              <a:t>• Validation checklist</a:t>
+            </a:r>
+          </a:p>
+        </p:txBody>
+      </p:sp>
+      <p:sp>
+        <p:nvSpPr>
+          <p:cNvPr id="11" name="Rounded Rectangle 10"/>
           <p:cNvSpPr/>
           <p:nvPr/>
         </p:nvSpPr>
         <p:spPr>
           <a:xfrm>
-            <a:off x="6263640" y="1234440"/>
-            <a:ext cx="5303520" cy="1828800"/>
+            <a:off x="822960" y="4160520"/>
+            <a:ext cx="10424160" cy="868680"/>
           </a:xfrm>
           <a:prstGeom prst="roundRect">
             <a:avLst/>
@@ -8172,20 +8012,20 @@
       </p:sp>
       <p:sp>
         <p:nvSpPr>
-          <p:cNvPr id="9" name="Rectangle 8"/>
+          <p:cNvPr id="12" name="Rectangle 11"/>
           <p:cNvSpPr/>
           <p:nvPr/>
         </p:nvSpPr>
         <p:spPr>
           <a:xfrm>
-            <a:off x="6263640" y="1234440"/>
-            <a:ext cx="91440" cy="1828800"/>
+            <a:off x="822960" y="4160520"/>
+            <a:ext cx="91440" cy="868680"/>
           </a:xfrm>
           <a:prstGeom prst="rect">
             <a:avLst/>
           </a:prstGeom>
           <a:solidFill>
-            <a:srgbClr val="02C39A"/>
+            <a:srgbClr val="F9B700"/>
           </a:solidFill>
           <a:ln>
             <a:noFill/>
@@ -8215,14 +8055,14 @@
       </p:sp>
       <p:sp>
         <p:nvSpPr>
-          <p:cNvPr id="10" name="TextBox 9"/>
+          <p:cNvPr id="13" name="TextBox 12"/>
           <p:cNvSpPr txBox="1"/>
           <p:nvPr/>
         </p:nvSpPr>
         <p:spPr>
           <a:xfrm>
-            <a:off x="6446520" y="1344168"/>
-            <a:ext cx="4983480" cy="1664208"/>
+            <a:off x="1005840" y="4270248"/>
+            <a:ext cx="10104120" cy="704088"/>
           </a:xfrm>
           <a:prstGeom prst="rect">
             <a:avLst/>
@@ -8244,167 +8084,7 @@
               </a:defRPr>
             </a:pPr>
             <a:r>
-              <a:t>Why it helps</a:t>
-            </a:r>
-          </a:p>
-          <a:p>
-            <a:pPr>
-              <a:spcBef>
-                <a:spcPts val="400"/>
-              </a:spcBef>
-              <a:defRPr sz="1050">
-                <a:solidFill>
-                  <a:srgbClr val="242424"/>
-                </a:solidFill>
-                <a:latin typeface="Aptos"/>
-              </a:defRPr>
-            </a:pPr>
-            <a:r>
-              <a:t>• Parameters and functions</a:t>
-            </a:r>
-            <a:br/>
-            <a:r>
-              <a:t>• Validation checklist</a:t>
-            </a:r>
-          </a:p>
-        </p:txBody>
-      </p:sp>
-      <p:sp>
-        <p:nvSpPr>
-          <p:cNvPr id="11" name="Rounded Rectangle 10"/>
-          <p:cNvSpPr/>
-          <p:nvPr/>
-        </p:nvSpPr>
-        <p:spPr>
-          <a:xfrm>
-            <a:off x="822960" y="4160520"/>
-            <a:ext cx="10424160" cy="868680"/>
-          </a:xfrm>
-          <a:prstGeom prst="roundRect">
-            <a:avLst/>
-          </a:prstGeom>
-          <a:solidFill>
-            <a:srgbClr val="FFFFFF"/>
-          </a:solidFill>
-          <a:ln>
-            <a:solidFill>
-              <a:srgbClr val="DCDCDC"/>
-            </a:solidFill>
-          </a:ln>
-        </p:spPr>
-        <p:style>
-          <a:lnRef idx="1">
-            <a:schemeClr val="accent1"/>
-          </a:lnRef>
-          <a:fillRef idx="3">
-            <a:schemeClr val="accent1"/>
-          </a:fillRef>
-          <a:effectRef idx="2">
-            <a:schemeClr val="accent1"/>
-          </a:effectRef>
-          <a:fontRef idx="minor">
-            <a:schemeClr val="lt1"/>
-          </a:fontRef>
-        </p:style>
-        <p:txBody>
-          <a:bodyPr rtlCol="0" anchor="ctr"/>
-          <a:lstStyle/>
-          <a:p>
-            <a:pPr algn="ctr"/>
-          </a:p>
-        </p:txBody>
-      </p:sp>
-      <p:sp>
-        <p:nvSpPr>
-          <p:cNvPr id="12" name="Rectangle 11"/>
-          <p:cNvSpPr/>
-          <p:nvPr/>
-        </p:nvSpPr>
-        <p:spPr>
-          <a:xfrm>
-            <a:off x="822960" y="4160520"/>
-            <a:ext cx="91440" cy="868680"/>
-          </a:xfrm>
-          <a:prstGeom prst="rect">
-            <a:avLst/>
-          </a:prstGeom>
-          <a:solidFill>
-            <a:srgbClr val="F9B700"/>
-          </a:solidFill>
-          <a:ln>
-            <a:noFill/>
-          </a:ln>
-        </p:spPr>
-        <p:style>
-          <a:lnRef idx="1">
-            <a:schemeClr val="accent1"/>
-          </a:lnRef>
-          <a:fillRef idx="3">
-            <a:schemeClr val="accent1"/>
-          </a:fillRef>
-          <a:effectRef idx="2">
-            <a:schemeClr val="accent1"/>
-          </a:effectRef>
-          <a:fontRef idx="minor">
-            <a:schemeClr val="lt1"/>
-          </a:fontRef>
-        </p:style>
-        <p:txBody>
-          <a:bodyPr rtlCol="0" anchor="ctr"/>
-          <a:lstStyle/>
-          <a:p>
-            <a:pPr algn="ctr"/>
-          </a:p>
-        </p:txBody>
-      </p:sp>
-      <p:sp>
-        <p:nvSpPr>
-          <p:cNvPr id="13" name="TextBox 12"/>
-          <p:cNvSpPr txBox="1"/>
-          <p:nvPr/>
-        </p:nvSpPr>
-        <p:spPr>
-          <a:xfrm>
-            <a:off x="1005840" y="4270248"/>
-            <a:ext cx="10104120" cy="704088"/>
-          </a:xfrm>
-          <a:prstGeom prst="rect">
-            <a:avLst/>
-          </a:prstGeom>
-          <a:noFill/>
-        </p:spPr>
-        <p:txBody>
-          <a:bodyPr wrap="square" lIns="0" rIns="0">
-            <a:spAutoFit/>
-          </a:bodyPr>
-          <a:lstStyle/>
-          <a:p>
-            <a:pPr>
-              <a:defRPr b="1" sz="1500">
-                <a:solidFill>
-                  <a:srgbClr val="1E2761"/>
-                </a:solidFill>
-                <a:latin typeface="Aptos Display"/>
-              </a:defRPr>
-            </a:pPr>
-            <a:r>
-              <a:t>Lab connection</a:t>
-            </a:r>
-          </a:p>
-          <a:p>
-            <a:pPr>
-              <a:spcBef>
-                <a:spcPts val="400"/>
-              </a:spcBef>
-              <a:defRPr sz="1050">
-                <a:solidFill>
-                  <a:srgbClr val="242424"/>
-                </a:solidFill>
-                <a:latin typeface="Aptos"/>
-              </a:defRPr>
-            </a:pPr>
-            <a:r>
-              <a:t>Coverage: Covered. Use the lab README to demonstrate or discuss this topic. Review terms: solution.</a:t>
+              <a:t>In the lab, you will apply this pattern, validate the expected behavior, and discuss where it fits in a real Power BI solution.</a:t>
             </a:r>
           </a:p>
         </p:txBody>
@@ -9411,42 +9091,6 @@
       </p:sp>
       <p:sp>
         <p:nvSpPr>
-          <p:cNvPr id="4" name="TextBox 3"/>
-          <p:cNvSpPr txBox="1"/>
-          <p:nvPr/>
-        </p:nvSpPr>
-        <p:spPr>
-          <a:xfrm>
-            <a:off x="530352" y="914400"/>
-            <a:ext cx="10515600" cy="320040"/>
-          </a:xfrm>
-          <a:prstGeom prst="rect">
-            <a:avLst/>
-          </a:prstGeom>
-          <a:noFill/>
-        </p:spPr>
-        <p:txBody>
-          <a:bodyPr wrap="none">
-            <a:spAutoFit/>
-          </a:bodyPr>
-          <a:lstStyle/>
-          <a:p>
-            <a:pPr>
-              <a:defRPr sz="1200">
-                <a:solidFill>
-                  <a:srgbClr val="5C5C5C"/>
-                </a:solidFill>
-                <a:latin typeface="Aptos"/>
-              </a:defRPr>
-            </a:pPr>
-            <a:r>
-              <a:t>Use this to introduce the section before hands-on labs.</a:t>
-            </a:r>
-          </a:p>
-        </p:txBody>
-      </p:sp>
-      <p:sp>
-        <p:nvSpPr>
           <p:cNvPr id="5" name="Rounded Rectangle 4"/>
           <p:cNvSpPr/>
           <p:nvPr/>
@@ -10699,42 +10343,6 @@
       </p:sp>
       <p:sp>
         <p:nvSpPr>
-          <p:cNvPr id="4" name="TextBox 3"/>
-          <p:cNvSpPr txBox="1"/>
-          <p:nvPr/>
-        </p:nvSpPr>
-        <p:spPr>
-          <a:xfrm>
-            <a:off x="530352" y="914400"/>
-            <a:ext cx="10515600" cy="320040"/>
-          </a:xfrm>
-          <a:prstGeom prst="rect">
-            <a:avLst/>
-          </a:prstGeom>
-          <a:noFill/>
-        </p:spPr>
-        <p:txBody>
-          <a:bodyPr wrap="none">
-            <a:spAutoFit/>
-          </a:bodyPr>
-          <a:lstStyle/>
-          <a:p>
-            <a:pPr>
-              <a:defRPr sz="1200">
-                <a:solidFill>
-                  <a:srgbClr val="5C5C5C"/>
-                </a:solidFill>
-                <a:latin typeface="Aptos"/>
-              </a:defRPr>
-            </a:pPr>
-            <a:r>
-              <a:t>Talking points, learner value, and lab connection</a:t>
-            </a:r>
-          </a:p>
-        </p:txBody>
-      </p:sp>
-      <p:sp>
-        <p:nvSpPr>
           <p:cNvPr id="5" name="Rounded Rectangle 4"/>
           <p:cNvSpPr/>
           <p:nvPr/>
@@ -10852,7 +10460,139 @@
               </a:defRPr>
             </a:pPr>
             <a:r>
-              <a:t>Talking points</a:t>
+              <a:t>Key ideas</a:t>
+            </a:r>
+            <a:br/>
+            <a:r>
+              <a:t>• Transformation logic is part of the solution.</a:t>
+            </a:r>
+            <a:br/>
+            <a:r>
+              <a:t>• One long query is hard to test and maintain.</a:t>
+            </a:r>
+          </a:p>
+        </p:txBody>
+      </p:sp>
+      <p:sp>
+        <p:nvSpPr>
+          <p:cNvPr id="8" name="Rounded Rectangle 7"/>
+          <p:cNvSpPr/>
+          <p:nvPr/>
+        </p:nvSpPr>
+        <p:spPr>
+          <a:xfrm>
+            <a:off x="6263640" y="1234440"/>
+            <a:ext cx="5303520" cy="1828800"/>
+          </a:xfrm>
+          <a:prstGeom prst="roundRect">
+            <a:avLst/>
+          </a:prstGeom>
+          <a:solidFill>
+            <a:srgbClr val="FFFFFF"/>
+          </a:solidFill>
+          <a:ln>
+            <a:solidFill>
+              <a:srgbClr val="DCDCDC"/>
+            </a:solidFill>
+          </a:ln>
+        </p:spPr>
+        <p:style>
+          <a:lnRef idx="1">
+            <a:schemeClr val="accent1"/>
+          </a:lnRef>
+          <a:fillRef idx="3">
+            <a:schemeClr val="accent1"/>
+          </a:fillRef>
+          <a:effectRef idx="2">
+            <a:schemeClr val="accent1"/>
+          </a:effectRef>
+          <a:fontRef idx="minor">
+            <a:schemeClr val="lt1"/>
+          </a:fontRef>
+        </p:style>
+        <p:txBody>
+          <a:bodyPr rtlCol="0" anchor="ctr"/>
+          <a:lstStyle/>
+          <a:p>
+            <a:pPr algn="ctr"/>
+          </a:p>
+        </p:txBody>
+      </p:sp>
+      <p:sp>
+        <p:nvSpPr>
+          <p:cNvPr id="9" name="Rectangle 8"/>
+          <p:cNvSpPr/>
+          <p:nvPr/>
+        </p:nvSpPr>
+        <p:spPr>
+          <a:xfrm>
+            <a:off x="6263640" y="1234440"/>
+            <a:ext cx="91440" cy="1828800"/>
+          </a:xfrm>
+          <a:prstGeom prst="rect">
+            <a:avLst/>
+          </a:prstGeom>
+          <a:solidFill>
+            <a:srgbClr val="02C39A"/>
+          </a:solidFill>
+          <a:ln>
+            <a:noFill/>
+          </a:ln>
+        </p:spPr>
+        <p:style>
+          <a:lnRef idx="1">
+            <a:schemeClr val="accent1"/>
+          </a:lnRef>
+          <a:fillRef idx="3">
+            <a:schemeClr val="accent1"/>
+          </a:fillRef>
+          <a:effectRef idx="2">
+            <a:schemeClr val="accent1"/>
+          </a:effectRef>
+          <a:fontRef idx="minor">
+            <a:schemeClr val="lt1"/>
+          </a:fontRef>
+        </p:style>
+        <p:txBody>
+          <a:bodyPr rtlCol="0" anchor="ctr"/>
+          <a:lstStyle/>
+          <a:p>
+            <a:pPr algn="ctr"/>
+          </a:p>
+        </p:txBody>
+      </p:sp>
+      <p:sp>
+        <p:nvSpPr>
+          <p:cNvPr id="10" name="TextBox 9"/>
+          <p:cNvSpPr txBox="1"/>
+          <p:nvPr/>
+        </p:nvSpPr>
+        <p:spPr>
+          <a:xfrm>
+            <a:off x="6446520" y="1344168"/>
+            <a:ext cx="4983480" cy="1664208"/>
+          </a:xfrm>
+          <a:prstGeom prst="rect">
+            <a:avLst/>
+          </a:prstGeom>
+          <a:noFill/>
+        </p:spPr>
+        <p:txBody>
+          <a:bodyPr wrap="square" lIns="0" rIns="0">
+            <a:spAutoFit/>
+          </a:bodyPr>
+          <a:lstStyle/>
+          <a:p>
+            <a:pPr>
+              <a:defRPr b="1" sz="1500">
+                <a:solidFill>
+                  <a:srgbClr val="1E2761"/>
+                </a:solidFill>
+                <a:latin typeface="Aptos Display"/>
+              </a:defRPr>
+            </a:pPr>
+            <a:r>
+              <a:t>Why it helps</a:t>
             </a:r>
           </a:p>
           <a:p>
@@ -10868,25 +10608,21 @@
               </a:defRPr>
             </a:pPr>
             <a:r>
-              <a:t>• Transformation logic is part of the solution.</a:t>
-            </a:r>
-            <a:br/>
-            <a:r>
-              <a:t>• One long query is hard to test and maintain.</a:t>
-            </a:r>
-          </a:p>
-        </p:txBody>
-      </p:sp>
-      <p:sp>
-        <p:nvSpPr>
-          <p:cNvPr id="8" name="Rounded Rectangle 7"/>
+              <a:t>• Staging makes intent visible.</a:t>
+            </a:r>
+          </a:p>
+        </p:txBody>
+      </p:sp>
+      <p:sp>
+        <p:nvSpPr>
+          <p:cNvPr id="11" name="Rounded Rectangle 10"/>
           <p:cNvSpPr/>
           <p:nvPr/>
         </p:nvSpPr>
         <p:spPr>
           <a:xfrm>
-            <a:off x="6263640" y="1234440"/>
-            <a:ext cx="5303520" cy="1828800"/>
+            <a:off x="822960" y="4160520"/>
+            <a:ext cx="10424160" cy="868680"/>
           </a:xfrm>
           <a:prstGeom prst="roundRect">
             <a:avLst/>
@@ -10924,20 +10660,20 @@
       </p:sp>
       <p:sp>
         <p:nvSpPr>
-          <p:cNvPr id="9" name="Rectangle 8"/>
+          <p:cNvPr id="12" name="Rectangle 11"/>
           <p:cNvSpPr/>
           <p:nvPr/>
         </p:nvSpPr>
         <p:spPr>
           <a:xfrm>
-            <a:off x="6263640" y="1234440"/>
-            <a:ext cx="91440" cy="1828800"/>
+            <a:off x="822960" y="4160520"/>
+            <a:ext cx="91440" cy="868680"/>
           </a:xfrm>
           <a:prstGeom prst="rect">
             <a:avLst/>
           </a:prstGeom>
           <a:solidFill>
-            <a:srgbClr val="02C39A"/>
+            <a:srgbClr val="F9B700"/>
           </a:solidFill>
           <a:ln>
             <a:noFill/>
@@ -10967,14 +10703,14 @@
       </p:sp>
       <p:sp>
         <p:nvSpPr>
-          <p:cNvPr id="10" name="TextBox 9"/>
+          <p:cNvPr id="13" name="TextBox 12"/>
           <p:cNvSpPr txBox="1"/>
           <p:nvPr/>
         </p:nvSpPr>
         <p:spPr>
           <a:xfrm>
-            <a:off x="6446520" y="1344168"/>
-            <a:ext cx="4983480" cy="1664208"/>
+            <a:off x="1005840" y="4270248"/>
+            <a:ext cx="10104120" cy="704088"/>
           </a:xfrm>
           <a:prstGeom prst="rect">
             <a:avLst/>
@@ -10996,163 +10732,7 @@
               </a:defRPr>
             </a:pPr>
             <a:r>
-              <a:t>Why it helps</a:t>
-            </a:r>
-          </a:p>
-          <a:p>
-            <a:pPr>
-              <a:spcBef>
-                <a:spcPts val="400"/>
-              </a:spcBef>
-              <a:defRPr sz="1050">
-                <a:solidFill>
-                  <a:srgbClr val="242424"/>
-                </a:solidFill>
-                <a:latin typeface="Aptos"/>
-              </a:defRPr>
-            </a:pPr>
-            <a:r>
-              <a:t>• Staging makes intent visible.</a:t>
-            </a:r>
-          </a:p>
-        </p:txBody>
-      </p:sp>
-      <p:sp>
-        <p:nvSpPr>
-          <p:cNvPr id="11" name="Rounded Rectangle 10"/>
-          <p:cNvSpPr/>
-          <p:nvPr/>
-        </p:nvSpPr>
-        <p:spPr>
-          <a:xfrm>
-            <a:off x="822960" y="4160520"/>
-            <a:ext cx="10424160" cy="868680"/>
-          </a:xfrm>
-          <a:prstGeom prst="roundRect">
-            <a:avLst/>
-          </a:prstGeom>
-          <a:solidFill>
-            <a:srgbClr val="FFFFFF"/>
-          </a:solidFill>
-          <a:ln>
-            <a:solidFill>
-              <a:srgbClr val="DCDCDC"/>
-            </a:solidFill>
-          </a:ln>
-        </p:spPr>
-        <p:style>
-          <a:lnRef idx="1">
-            <a:schemeClr val="accent1"/>
-          </a:lnRef>
-          <a:fillRef idx="3">
-            <a:schemeClr val="accent1"/>
-          </a:fillRef>
-          <a:effectRef idx="2">
-            <a:schemeClr val="accent1"/>
-          </a:effectRef>
-          <a:fontRef idx="minor">
-            <a:schemeClr val="lt1"/>
-          </a:fontRef>
-        </p:style>
-        <p:txBody>
-          <a:bodyPr rtlCol="0" anchor="ctr"/>
-          <a:lstStyle/>
-          <a:p>
-            <a:pPr algn="ctr"/>
-          </a:p>
-        </p:txBody>
-      </p:sp>
-      <p:sp>
-        <p:nvSpPr>
-          <p:cNvPr id="12" name="Rectangle 11"/>
-          <p:cNvSpPr/>
-          <p:nvPr/>
-        </p:nvSpPr>
-        <p:spPr>
-          <a:xfrm>
-            <a:off x="822960" y="4160520"/>
-            <a:ext cx="91440" cy="868680"/>
-          </a:xfrm>
-          <a:prstGeom prst="rect">
-            <a:avLst/>
-          </a:prstGeom>
-          <a:solidFill>
-            <a:srgbClr val="F9B700"/>
-          </a:solidFill>
-          <a:ln>
-            <a:noFill/>
-          </a:ln>
-        </p:spPr>
-        <p:style>
-          <a:lnRef idx="1">
-            <a:schemeClr val="accent1"/>
-          </a:lnRef>
-          <a:fillRef idx="3">
-            <a:schemeClr val="accent1"/>
-          </a:fillRef>
-          <a:effectRef idx="2">
-            <a:schemeClr val="accent1"/>
-          </a:effectRef>
-          <a:fontRef idx="minor">
-            <a:schemeClr val="lt1"/>
-          </a:fontRef>
-        </p:style>
-        <p:txBody>
-          <a:bodyPr rtlCol="0" anchor="ctr"/>
-          <a:lstStyle/>
-          <a:p>
-            <a:pPr algn="ctr"/>
-          </a:p>
-        </p:txBody>
-      </p:sp>
-      <p:sp>
-        <p:nvSpPr>
-          <p:cNvPr id="13" name="TextBox 12"/>
-          <p:cNvSpPr txBox="1"/>
-          <p:nvPr/>
-        </p:nvSpPr>
-        <p:spPr>
-          <a:xfrm>
-            <a:off x="1005840" y="4270248"/>
-            <a:ext cx="10104120" cy="704088"/>
-          </a:xfrm>
-          <a:prstGeom prst="rect">
-            <a:avLst/>
-          </a:prstGeom>
-          <a:noFill/>
-        </p:spPr>
-        <p:txBody>
-          <a:bodyPr wrap="square" lIns="0" rIns="0">
-            <a:spAutoFit/>
-          </a:bodyPr>
-          <a:lstStyle/>
-          <a:p>
-            <a:pPr>
-              <a:defRPr b="1" sz="1500">
-                <a:solidFill>
-                  <a:srgbClr val="1E2761"/>
-                </a:solidFill>
-                <a:latin typeface="Aptos Display"/>
-              </a:defRPr>
-            </a:pPr>
-            <a:r>
-              <a:t>Lab connection</a:t>
-            </a:r>
-          </a:p>
-          <a:p>
-            <a:pPr>
-              <a:spcBef>
-                <a:spcPts val="400"/>
-              </a:spcBef>
-              <a:defRPr sz="1050">
-                <a:solidFill>
-                  <a:srgbClr val="242424"/>
-                </a:solidFill>
-                <a:latin typeface="Aptos"/>
-              </a:defRPr>
-            </a:pPr>
-            <a:r>
-              <a:t>Coverage: Covered. Use the lab README to demonstrate or discuss this topic. Review terms: intent, makes, matters, solution, visible.</a:t>
+              <a:t>In the lab, you will apply this pattern, validate the expected behavior, and discuss where it fits in a real Power BI solution.</a:t>
             </a:r>
           </a:p>
         </p:txBody>
@@ -11291,42 +10871,6 @@
       </p:sp>
       <p:sp>
         <p:nvSpPr>
-          <p:cNvPr id="4" name="TextBox 3"/>
-          <p:cNvSpPr txBox="1"/>
-          <p:nvPr/>
-        </p:nvSpPr>
-        <p:spPr>
-          <a:xfrm>
-            <a:off x="530352" y="914400"/>
-            <a:ext cx="10515600" cy="320040"/>
-          </a:xfrm>
-          <a:prstGeom prst="rect">
-            <a:avLst/>
-          </a:prstGeom>
-          <a:noFill/>
-        </p:spPr>
-        <p:txBody>
-          <a:bodyPr wrap="none">
-            <a:spAutoFit/>
-          </a:bodyPr>
-          <a:lstStyle/>
-          <a:p>
-            <a:pPr>
-              <a:defRPr sz="1200">
-                <a:solidFill>
-                  <a:srgbClr val="5C5C5C"/>
-                </a:solidFill>
-                <a:latin typeface="Aptos"/>
-              </a:defRPr>
-            </a:pPr>
-            <a:r>
-              <a:t>Talking points, learner value, and lab connection</a:t>
-            </a:r>
-          </a:p>
-        </p:txBody>
-      </p:sp>
-      <p:sp>
-        <p:nvSpPr>
           <p:cNvPr id="5" name="Rounded Rectangle 4"/>
           <p:cNvSpPr/>
           <p:nvPr/>
@@ -11444,7 +10988,139 @@
               </a:defRPr>
             </a:pPr>
             <a:r>
-              <a:t>Talking points</a:t>
+              <a:t>Key ideas</a:t>
+            </a:r>
+            <a:br/>
+            <a:r>
+              <a:t>• Raw source queries</a:t>
+            </a:r>
+            <a:br/>
+            <a:r>
+              <a:t>• Staging queries</a:t>
+            </a:r>
+          </a:p>
+        </p:txBody>
+      </p:sp>
+      <p:sp>
+        <p:nvSpPr>
+          <p:cNvPr id="8" name="Rounded Rectangle 7"/>
+          <p:cNvSpPr/>
+          <p:nvPr/>
+        </p:nvSpPr>
+        <p:spPr>
+          <a:xfrm>
+            <a:off x="6263640" y="1234440"/>
+            <a:ext cx="5303520" cy="1828800"/>
+          </a:xfrm>
+          <a:prstGeom prst="roundRect">
+            <a:avLst/>
+          </a:prstGeom>
+          <a:solidFill>
+            <a:srgbClr val="FFFFFF"/>
+          </a:solidFill>
+          <a:ln>
+            <a:solidFill>
+              <a:srgbClr val="DCDCDC"/>
+            </a:solidFill>
+          </a:ln>
+        </p:spPr>
+        <p:style>
+          <a:lnRef idx="1">
+            <a:schemeClr val="accent1"/>
+          </a:lnRef>
+          <a:fillRef idx="3">
+            <a:schemeClr val="accent1"/>
+          </a:fillRef>
+          <a:effectRef idx="2">
+            <a:schemeClr val="accent1"/>
+          </a:effectRef>
+          <a:fontRef idx="minor">
+            <a:schemeClr val="lt1"/>
+          </a:fontRef>
+        </p:style>
+        <p:txBody>
+          <a:bodyPr rtlCol="0" anchor="ctr"/>
+          <a:lstStyle/>
+          <a:p>
+            <a:pPr algn="ctr"/>
+          </a:p>
+        </p:txBody>
+      </p:sp>
+      <p:sp>
+        <p:nvSpPr>
+          <p:cNvPr id="9" name="Rectangle 8"/>
+          <p:cNvSpPr/>
+          <p:nvPr/>
+        </p:nvSpPr>
+        <p:spPr>
+          <a:xfrm>
+            <a:off x="6263640" y="1234440"/>
+            <a:ext cx="91440" cy="1828800"/>
+          </a:xfrm>
+          <a:prstGeom prst="rect">
+            <a:avLst/>
+          </a:prstGeom>
+          <a:solidFill>
+            <a:srgbClr val="02C39A"/>
+          </a:solidFill>
+          <a:ln>
+            <a:noFill/>
+          </a:ln>
+        </p:spPr>
+        <p:style>
+          <a:lnRef idx="1">
+            <a:schemeClr val="accent1"/>
+          </a:lnRef>
+          <a:fillRef idx="3">
+            <a:schemeClr val="accent1"/>
+          </a:fillRef>
+          <a:effectRef idx="2">
+            <a:schemeClr val="accent1"/>
+          </a:effectRef>
+          <a:fontRef idx="minor">
+            <a:schemeClr val="lt1"/>
+          </a:fontRef>
+        </p:style>
+        <p:txBody>
+          <a:bodyPr rtlCol="0" anchor="ctr"/>
+          <a:lstStyle/>
+          <a:p>
+            <a:pPr algn="ctr"/>
+          </a:p>
+        </p:txBody>
+      </p:sp>
+      <p:sp>
+        <p:nvSpPr>
+          <p:cNvPr id="10" name="TextBox 9"/>
+          <p:cNvSpPr txBox="1"/>
+          <p:nvPr/>
+        </p:nvSpPr>
+        <p:spPr>
+          <a:xfrm>
+            <a:off x="6446520" y="1344168"/>
+            <a:ext cx="4983480" cy="1664208"/>
+          </a:xfrm>
+          <a:prstGeom prst="rect">
+            <a:avLst/>
+          </a:prstGeom>
+          <a:noFill/>
+        </p:spPr>
+        <p:txBody>
+          <a:bodyPr wrap="square" lIns="0" rIns="0">
+            <a:spAutoFit/>
+          </a:bodyPr>
+          <a:lstStyle/>
+          <a:p>
+            <a:pPr>
+              <a:defRPr b="1" sz="1500">
+                <a:solidFill>
+                  <a:srgbClr val="1E2761"/>
+                </a:solidFill>
+                <a:latin typeface="Aptos Display"/>
+              </a:defRPr>
+            </a:pPr>
+            <a:r>
+              <a:t>Why it helps</a:t>
             </a:r>
           </a:p>
           <a:p>
@@ -11460,25 +11136,25 @@
               </a:defRPr>
             </a:pPr>
             <a:r>
-              <a:t>• Raw source queries</a:t>
+              <a:t>• Final model queries</a:t>
             </a:r>
             <a:br/>
             <a:r>
-              <a:t>• Staging queries</a:t>
-            </a:r>
-          </a:p>
-        </p:txBody>
-      </p:sp>
-      <p:sp>
-        <p:nvSpPr>
-          <p:cNvPr id="8" name="Rounded Rectangle 7"/>
+              <a:t>• Load-enabled vs. load-disabled queries</a:t>
+            </a:r>
+          </a:p>
+        </p:txBody>
+      </p:sp>
+      <p:sp>
+        <p:nvSpPr>
+          <p:cNvPr id="11" name="Rounded Rectangle 10"/>
           <p:cNvSpPr/>
           <p:nvPr/>
         </p:nvSpPr>
         <p:spPr>
           <a:xfrm>
-            <a:off x="6263640" y="1234440"/>
-            <a:ext cx="5303520" cy="1828800"/>
+            <a:off x="822960" y="4160520"/>
+            <a:ext cx="10424160" cy="868680"/>
           </a:xfrm>
           <a:prstGeom prst="roundRect">
             <a:avLst/>
@@ -11516,20 +11192,20 @@
       </p:sp>
       <p:sp>
         <p:nvSpPr>
-          <p:cNvPr id="9" name="Rectangle 8"/>
+          <p:cNvPr id="12" name="Rectangle 11"/>
           <p:cNvSpPr/>
           <p:nvPr/>
         </p:nvSpPr>
         <p:spPr>
           <a:xfrm>
-            <a:off x="6263640" y="1234440"/>
-            <a:ext cx="91440" cy="1828800"/>
+            <a:off x="822960" y="4160520"/>
+            <a:ext cx="91440" cy="868680"/>
           </a:xfrm>
           <a:prstGeom prst="rect">
             <a:avLst/>
           </a:prstGeom>
           <a:solidFill>
-            <a:srgbClr val="02C39A"/>
+            <a:srgbClr val="F9B700"/>
           </a:solidFill>
           <a:ln>
             <a:noFill/>
@@ -11559,14 +11235,14 @@
       </p:sp>
       <p:sp>
         <p:nvSpPr>
-          <p:cNvPr id="10" name="TextBox 9"/>
+          <p:cNvPr id="13" name="TextBox 12"/>
           <p:cNvSpPr txBox="1"/>
           <p:nvPr/>
         </p:nvSpPr>
         <p:spPr>
           <a:xfrm>
-            <a:off x="6446520" y="1344168"/>
-            <a:ext cx="4983480" cy="1664208"/>
+            <a:off x="1005840" y="4270248"/>
+            <a:ext cx="10104120" cy="704088"/>
           </a:xfrm>
           <a:prstGeom prst="rect">
             <a:avLst/>
@@ -11588,167 +11264,7 @@
               </a:defRPr>
             </a:pPr>
             <a:r>
-              <a:t>Why it helps</a:t>
-            </a:r>
-          </a:p>
-          <a:p>
-            <a:pPr>
-              <a:spcBef>
-                <a:spcPts val="400"/>
-              </a:spcBef>
-              <a:defRPr sz="1050">
-                <a:solidFill>
-                  <a:srgbClr val="242424"/>
-                </a:solidFill>
-                <a:latin typeface="Aptos"/>
-              </a:defRPr>
-            </a:pPr>
-            <a:r>
-              <a:t>• Final model queries</a:t>
-            </a:r>
-            <a:br/>
-            <a:r>
-              <a:t>• Load-enabled vs. load-disabled queries</a:t>
-            </a:r>
-          </a:p>
-        </p:txBody>
-      </p:sp>
-      <p:sp>
-        <p:nvSpPr>
-          <p:cNvPr id="11" name="Rounded Rectangle 10"/>
-          <p:cNvSpPr/>
-          <p:nvPr/>
-        </p:nvSpPr>
-        <p:spPr>
-          <a:xfrm>
-            <a:off x="822960" y="4160520"/>
-            <a:ext cx="10424160" cy="868680"/>
-          </a:xfrm>
-          <a:prstGeom prst="roundRect">
-            <a:avLst/>
-          </a:prstGeom>
-          <a:solidFill>
-            <a:srgbClr val="FFFFFF"/>
-          </a:solidFill>
-          <a:ln>
-            <a:solidFill>
-              <a:srgbClr val="DCDCDC"/>
-            </a:solidFill>
-          </a:ln>
-        </p:spPr>
-        <p:style>
-          <a:lnRef idx="1">
-            <a:schemeClr val="accent1"/>
-          </a:lnRef>
-          <a:fillRef idx="3">
-            <a:schemeClr val="accent1"/>
-          </a:fillRef>
-          <a:effectRef idx="2">
-            <a:schemeClr val="accent1"/>
-          </a:effectRef>
-          <a:fontRef idx="minor">
-            <a:schemeClr val="lt1"/>
-          </a:fontRef>
-        </p:style>
-        <p:txBody>
-          <a:bodyPr rtlCol="0" anchor="ctr"/>
-          <a:lstStyle/>
-          <a:p>
-            <a:pPr algn="ctr"/>
-          </a:p>
-        </p:txBody>
-      </p:sp>
-      <p:sp>
-        <p:nvSpPr>
-          <p:cNvPr id="12" name="Rectangle 11"/>
-          <p:cNvSpPr/>
-          <p:nvPr/>
-        </p:nvSpPr>
-        <p:spPr>
-          <a:xfrm>
-            <a:off x="822960" y="4160520"/>
-            <a:ext cx="91440" cy="868680"/>
-          </a:xfrm>
-          <a:prstGeom prst="rect">
-            <a:avLst/>
-          </a:prstGeom>
-          <a:solidFill>
-            <a:srgbClr val="F9B700"/>
-          </a:solidFill>
-          <a:ln>
-            <a:noFill/>
-          </a:ln>
-        </p:spPr>
-        <p:style>
-          <a:lnRef idx="1">
-            <a:schemeClr val="accent1"/>
-          </a:lnRef>
-          <a:fillRef idx="3">
-            <a:schemeClr val="accent1"/>
-          </a:fillRef>
-          <a:effectRef idx="2">
-            <a:schemeClr val="accent1"/>
-          </a:effectRef>
-          <a:fontRef idx="minor">
-            <a:schemeClr val="lt1"/>
-          </a:fontRef>
-        </p:style>
-        <p:txBody>
-          <a:bodyPr rtlCol="0" anchor="ctr"/>
-          <a:lstStyle/>
-          <a:p>
-            <a:pPr algn="ctr"/>
-          </a:p>
-        </p:txBody>
-      </p:sp>
-      <p:sp>
-        <p:nvSpPr>
-          <p:cNvPr id="13" name="TextBox 12"/>
-          <p:cNvSpPr txBox="1"/>
-          <p:nvPr/>
-        </p:nvSpPr>
-        <p:spPr>
-          <a:xfrm>
-            <a:off x="1005840" y="4270248"/>
-            <a:ext cx="10104120" cy="704088"/>
-          </a:xfrm>
-          <a:prstGeom prst="rect">
-            <a:avLst/>
-          </a:prstGeom>
-          <a:noFill/>
-        </p:spPr>
-        <p:txBody>
-          <a:bodyPr wrap="square" lIns="0" rIns="0">
-            <a:spAutoFit/>
-          </a:bodyPr>
-          <a:lstStyle/>
-          <a:p>
-            <a:pPr>
-              <a:defRPr b="1" sz="1500">
-                <a:solidFill>
-                  <a:srgbClr val="1E2761"/>
-                </a:solidFill>
-                <a:latin typeface="Aptos Display"/>
-              </a:defRPr>
-            </a:pPr>
-            <a:r>
-              <a:t>Lab connection</a:t>
-            </a:r>
-          </a:p>
-          <a:p>
-            <a:pPr>
-              <a:spcBef>
-                <a:spcPts val="400"/>
-              </a:spcBef>
-              <a:defRPr sz="1050">
-                <a:solidFill>
-                  <a:srgbClr val="242424"/>
-                </a:solidFill>
-                <a:latin typeface="Aptos"/>
-              </a:defRPr>
-            </a:pPr>
-            <a:r>
-              <a:t>Coverage: Covered. Use the lab README to demonstrate or discuss this topic. Review terms: none.</a:t>
+              <a:t>In the lab, you will apply this pattern, validate the expected behavior, and discuss where it fits in a real Power BI solution.</a:t>
             </a:r>
           </a:p>
         </p:txBody>
@@ -11887,42 +11403,6 @@
       </p:sp>
       <p:sp>
         <p:nvSpPr>
-          <p:cNvPr id="4" name="TextBox 3"/>
-          <p:cNvSpPr txBox="1"/>
-          <p:nvPr/>
-        </p:nvSpPr>
-        <p:spPr>
-          <a:xfrm>
-            <a:off x="530352" y="914400"/>
-            <a:ext cx="10515600" cy="320040"/>
-          </a:xfrm>
-          <a:prstGeom prst="rect">
-            <a:avLst/>
-          </a:prstGeom>
-          <a:noFill/>
-        </p:spPr>
-        <p:txBody>
-          <a:bodyPr wrap="none">
-            <a:spAutoFit/>
-          </a:bodyPr>
-          <a:lstStyle/>
-          <a:p>
-            <a:pPr>
-              <a:defRPr sz="1200">
-                <a:solidFill>
-                  <a:srgbClr val="5C5C5C"/>
-                </a:solidFill>
-                <a:latin typeface="Aptos"/>
-              </a:defRPr>
-            </a:pPr>
-            <a:r>
-              <a:t>Talking points, learner value, and lab connection</a:t>
-            </a:r>
-          </a:p>
-        </p:txBody>
-      </p:sp>
-      <p:sp>
-        <p:nvSpPr>
           <p:cNvPr id="5" name="Rounded Rectangle 4"/>
           <p:cNvSpPr/>
           <p:nvPr/>
@@ -12040,7 +11520,143 @@
               </a:defRPr>
             </a:pPr>
             <a:r>
-              <a:t>Talking points</a:t>
+              <a:t>Key ideas</a:t>
+            </a:r>
+            <a:br/>
+            <a:r>
+              <a:t>• File filters</a:t>
+            </a:r>
+            <a:br/>
+            <a:r>
+              <a:t>• Sample file transformation</a:t>
+            </a:r>
+            <a:br/>
+            <a:r>
+              <a:t>• Schema consistency</a:t>
+            </a:r>
+          </a:p>
+        </p:txBody>
+      </p:sp>
+      <p:sp>
+        <p:nvSpPr>
+          <p:cNvPr id="8" name="Rounded Rectangle 7"/>
+          <p:cNvSpPr/>
+          <p:nvPr/>
+        </p:nvSpPr>
+        <p:spPr>
+          <a:xfrm>
+            <a:off x="6263640" y="1234440"/>
+            <a:ext cx="5303520" cy="1828800"/>
+          </a:xfrm>
+          <a:prstGeom prst="roundRect">
+            <a:avLst/>
+          </a:prstGeom>
+          <a:solidFill>
+            <a:srgbClr val="FFFFFF"/>
+          </a:solidFill>
+          <a:ln>
+            <a:solidFill>
+              <a:srgbClr val="DCDCDC"/>
+            </a:solidFill>
+          </a:ln>
+        </p:spPr>
+        <p:style>
+          <a:lnRef idx="1">
+            <a:schemeClr val="accent1"/>
+          </a:lnRef>
+          <a:fillRef idx="3">
+            <a:schemeClr val="accent1"/>
+          </a:fillRef>
+          <a:effectRef idx="2">
+            <a:schemeClr val="accent1"/>
+          </a:effectRef>
+          <a:fontRef idx="minor">
+            <a:schemeClr val="lt1"/>
+          </a:fontRef>
+        </p:style>
+        <p:txBody>
+          <a:bodyPr rtlCol="0" anchor="ctr"/>
+          <a:lstStyle/>
+          <a:p>
+            <a:pPr algn="ctr"/>
+          </a:p>
+        </p:txBody>
+      </p:sp>
+      <p:sp>
+        <p:nvSpPr>
+          <p:cNvPr id="9" name="Rectangle 8"/>
+          <p:cNvSpPr/>
+          <p:nvPr/>
+        </p:nvSpPr>
+        <p:spPr>
+          <a:xfrm>
+            <a:off x="6263640" y="1234440"/>
+            <a:ext cx="91440" cy="1828800"/>
+          </a:xfrm>
+          <a:prstGeom prst="rect">
+            <a:avLst/>
+          </a:prstGeom>
+          <a:solidFill>
+            <a:srgbClr val="02C39A"/>
+          </a:solidFill>
+          <a:ln>
+            <a:noFill/>
+          </a:ln>
+        </p:spPr>
+        <p:style>
+          <a:lnRef idx="1">
+            <a:schemeClr val="accent1"/>
+          </a:lnRef>
+          <a:fillRef idx="3">
+            <a:schemeClr val="accent1"/>
+          </a:fillRef>
+          <a:effectRef idx="2">
+            <a:schemeClr val="accent1"/>
+          </a:effectRef>
+          <a:fontRef idx="minor">
+            <a:schemeClr val="lt1"/>
+          </a:fontRef>
+        </p:style>
+        <p:txBody>
+          <a:bodyPr rtlCol="0" anchor="ctr"/>
+          <a:lstStyle/>
+          <a:p>
+            <a:pPr algn="ctr"/>
+          </a:p>
+        </p:txBody>
+      </p:sp>
+      <p:sp>
+        <p:nvSpPr>
+          <p:cNvPr id="10" name="TextBox 9"/>
+          <p:cNvSpPr txBox="1"/>
+          <p:nvPr/>
+        </p:nvSpPr>
+        <p:spPr>
+          <a:xfrm>
+            <a:off x="6446520" y="1344168"/>
+            <a:ext cx="4983480" cy="1664208"/>
+          </a:xfrm>
+          <a:prstGeom prst="rect">
+            <a:avLst/>
+          </a:prstGeom>
+          <a:noFill/>
+        </p:spPr>
+        <p:txBody>
+          <a:bodyPr wrap="square" lIns="0" rIns="0">
+            <a:spAutoFit/>
+          </a:bodyPr>
+          <a:lstStyle/>
+          <a:p>
+            <a:pPr>
+              <a:defRPr b="1" sz="1500">
+                <a:solidFill>
+                  <a:srgbClr val="1E2761"/>
+                </a:solidFill>
+                <a:latin typeface="Aptos Display"/>
+              </a:defRPr>
+            </a:pPr>
+            <a:r>
+              <a:t>Why it helps</a:t>
             </a:r>
           </a:p>
           <a:p>
@@ -12056,29 +11672,25 @@
               </a:defRPr>
             </a:pPr>
             <a:r>
-              <a:t>• File filters</a:t>
+              <a:t>• Hidden/temp file handling</a:t>
             </a:r>
             <a:br/>
             <a:r>
-              <a:t>• Sample file transformation</a:t>
-            </a:r>
-            <a:br/>
-            <a:r>
-              <a:t>• Schema consistency</a:t>
-            </a:r>
-          </a:p>
-        </p:txBody>
-      </p:sp>
-      <p:sp>
-        <p:nvSpPr>
-          <p:cNvPr id="8" name="Rounded Rectangle 7"/>
+              <a:t>• Future monthly files</a:t>
+            </a:r>
+          </a:p>
+        </p:txBody>
+      </p:sp>
+      <p:sp>
+        <p:nvSpPr>
+          <p:cNvPr id="11" name="Rounded Rectangle 10"/>
           <p:cNvSpPr/>
           <p:nvPr/>
         </p:nvSpPr>
         <p:spPr>
           <a:xfrm>
-            <a:off x="6263640" y="1234440"/>
-            <a:ext cx="5303520" cy="1828800"/>
+            <a:off x="822960" y="4160520"/>
+            <a:ext cx="10424160" cy="868680"/>
           </a:xfrm>
           <a:prstGeom prst="roundRect">
             <a:avLst/>
@@ -12116,20 +11728,20 @@
       </p:sp>
       <p:sp>
         <p:nvSpPr>
-          <p:cNvPr id="9" name="Rectangle 8"/>
+          <p:cNvPr id="12" name="Rectangle 11"/>
           <p:cNvSpPr/>
           <p:nvPr/>
         </p:nvSpPr>
         <p:spPr>
           <a:xfrm>
-            <a:off x="6263640" y="1234440"/>
-            <a:ext cx="91440" cy="1828800"/>
+            <a:off x="822960" y="4160520"/>
+            <a:ext cx="91440" cy="868680"/>
           </a:xfrm>
           <a:prstGeom prst="rect">
             <a:avLst/>
           </a:prstGeom>
           <a:solidFill>
-            <a:srgbClr val="02C39A"/>
+            <a:srgbClr val="F9B700"/>
           </a:solidFill>
           <a:ln>
             <a:noFill/>
@@ -12159,14 +11771,14 @@
       </p:sp>
       <p:sp>
         <p:nvSpPr>
-          <p:cNvPr id="10" name="TextBox 9"/>
+          <p:cNvPr id="13" name="TextBox 12"/>
           <p:cNvSpPr txBox="1"/>
           <p:nvPr/>
         </p:nvSpPr>
         <p:spPr>
           <a:xfrm>
-            <a:off x="6446520" y="1344168"/>
-            <a:ext cx="4983480" cy="1664208"/>
+            <a:off x="1005840" y="4270248"/>
+            <a:ext cx="10104120" cy="704088"/>
           </a:xfrm>
           <a:prstGeom prst="rect">
             <a:avLst/>
@@ -12188,167 +11800,7 @@
               </a:defRPr>
             </a:pPr>
             <a:r>
-              <a:t>Why it helps</a:t>
-            </a:r>
-          </a:p>
-          <a:p>
-            <a:pPr>
-              <a:spcBef>
-                <a:spcPts val="400"/>
-              </a:spcBef>
-              <a:defRPr sz="1050">
-                <a:solidFill>
-                  <a:srgbClr val="242424"/>
-                </a:solidFill>
-                <a:latin typeface="Aptos"/>
-              </a:defRPr>
-            </a:pPr>
-            <a:r>
-              <a:t>• Hidden/temp file handling</a:t>
-            </a:r>
-            <a:br/>
-            <a:r>
-              <a:t>• Future monthly files</a:t>
-            </a:r>
-          </a:p>
-        </p:txBody>
-      </p:sp>
-      <p:sp>
-        <p:nvSpPr>
-          <p:cNvPr id="11" name="Rounded Rectangle 10"/>
-          <p:cNvSpPr/>
-          <p:nvPr/>
-        </p:nvSpPr>
-        <p:spPr>
-          <a:xfrm>
-            <a:off x="822960" y="4160520"/>
-            <a:ext cx="10424160" cy="868680"/>
-          </a:xfrm>
-          <a:prstGeom prst="roundRect">
-            <a:avLst/>
-          </a:prstGeom>
-          <a:solidFill>
-            <a:srgbClr val="FFFFFF"/>
-          </a:solidFill>
-          <a:ln>
-            <a:solidFill>
-              <a:srgbClr val="DCDCDC"/>
-            </a:solidFill>
-          </a:ln>
-        </p:spPr>
-        <p:style>
-          <a:lnRef idx="1">
-            <a:schemeClr val="accent1"/>
-          </a:lnRef>
-          <a:fillRef idx="3">
-            <a:schemeClr val="accent1"/>
-          </a:fillRef>
-          <a:effectRef idx="2">
-            <a:schemeClr val="accent1"/>
-          </a:effectRef>
-          <a:fontRef idx="minor">
-            <a:schemeClr val="lt1"/>
-          </a:fontRef>
-        </p:style>
-        <p:txBody>
-          <a:bodyPr rtlCol="0" anchor="ctr"/>
-          <a:lstStyle/>
-          <a:p>
-            <a:pPr algn="ctr"/>
-          </a:p>
-        </p:txBody>
-      </p:sp>
-      <p:sp>
-        <p:nvSpPr>
-          <p:cNvPr id="12" name="Rectangle 11"/>
-          <p:cNvSpPr/>
-          <p:nvPr/>
-        </p:nvSpPr>
-        <p:spPr>
-          <a:xfrm>
-            <a:off x="822960" y="4160520"/>
-            <a:ext cx="91440" cy="868680"/>
-          </a:xfrm>
-          <a:prstGeom prst="rect">
-            <a:avLst/>
-          </a:prstGeom>
-          <a:solidFill>
-            <a:srgbClr val="F9B700"/>
-          </a:solidFill>
-          <a:ln>
-            <a:noFill/>
-          </a:ln>
-        </p:spPr>
-        <p:style>
-          <a:lnRef idx="1">
-            <a:schemeClr val="accent1"/>
-          </a:lnRef>
-          <a:fillRef idx="3">
-            <a:schemeClr val="accent1"/>
-          </a:fillRef>
-          <a:effectRef idx="2">
-            <a:schemeClr val="accent1"/>
-          </a:effectRef>
-          <a:fontRef idx="minor">
-            <a:schemeClr val="lt1"/>
-          </a:fontRef>
-        </p:style>
-        <p:txBody>
-          <a:bodyPr rtlCol="0" anchor="ctr"/>
-          <a:lstStyle/>
-          <a:p>
-            <a:pPr algn="ctr"/>
-          </a:p>
-        </p:txBody>
-      </p:sp>
-      <p:sp>
-        <p:nvSpPr>
-          <p:cNvPr id="13" name="TextBox 12"/>
-          <p:cNvSpPr txBox="1"/>
-          <p:nvPr/>
-        </p:nvSpPr>
-        <p:spPr>
-          <a:xfrm>
-            <a:off x="1005840" y="4270248"/>
-            <a:ext cx="10104120" cy="704088"/>
-          </a:xfrm>
-          <a:prstGeom prst="rect">
-            <a:avLst/>
-          </a:prstGeom>
-          <a:noFill/>
-        </p:spPr>
-        <p:txBody>
-          <a:bodyPr wrap="square" lIns="0" rIns="0">
-            <a:spAutoFit/>
-          </a:bodyPr>
-          <a:lstStyle/>
-          <a:p>
-            <a:pPr>
-              <a:defRPr b="1" sz="1500">
-                <a:solidFill>
-                  <a:srgbClr val="1E2761"/>
-                </a:solidFill>
-                <a:latin typeface="Aptos Display"/>
-              </a:defRPr>
-            </a:pPr>
-            <a:r>
-              <a:t>Lab connection</a:t>
-            </a:r>
-          </a:p>
-          <a:p>
-            <a:pPr>
-              <a:spcBef>
-                <a:spcPts val="400"/>
-              </a:spcBef>
-              <a:defRPr sz="1050">
-                <a:solidFill>
-                  <a:srgbClr val="242424"/>
-                </a:solidFill>
-                <a:latin typeface="Aptos"/>
-              </a:defRPr>
-            </a:pPr>
-            <a:r>
-              <a:t>Coverage: Covered. Use the lab README to demonstrate or discuss this topic. Review terms: consistency, future, hidden.</a:t>
+              <a:t>In the lab, you will apply this pattern, validate the expected behavior, and discuss where it fits in a real Power BI solution.</a:t>
             </a:r>
           </a:p>
         </p:txBody>
@@ -12487,42 +11939,6 @@
       </p:sp>
       <p:sp>
         <p:nvSpPr>
-          <p:cNvPr id="4" name="TextBox 3"/>
-          <p:cNvSpPr txBox="1"/>
-          <p:nvPr/>
-        </p:nvSpPr>
-        <p:spPr>
-          <a:xfrm>
-            <a:off x="530352" y="914400"/>
-            <a:ext cx="10515600" cy="320040"/>
-          </a:xfrm>
-          <a:prstGeom prst="rect">
-            <a:avLst/>
-          </a:prstGeom>
-          <a:noFill/>
-        </p:spPr>
-        <p:txBody>
-          <a:bodyPr wrap="none">
-            <a:spAutoFit/>
-          </a:bodyPr>
-          <a:lstStyle/>
-          <a:p>
-            <a:pPr>
-              <a:defRPr sz="1200">
-                <a:solidFill>
-                  <a:srgbClr val="5C5C5C"/>
-                </a:solidFill>
-                <a:latin typeface="Aptos"/>
-              </a:defRPr>
-            </a:pPr>
-            <a:r>
-              <a:t>Talking points, learner value, and lab connection</a:t>
-            </a:r>
-          </a:p>
-        </p:txBody>
-      </p:sp>
-      <p:sp>
-        <p:nvSpPr>
           <p:cNvPr id="5" name="Rounded Rectangle 4"/>
           <p:cNvSpPr/>
           <p:nvPr/>
@@ -12640,7 +12056,139 @@
               </a:defRPr>
             </a:pPr>
             <a:r>
-              <a:t>Talking points</a:t>
+              <a:t>Key ideas</a:t>
+            </a:r>
+            <a:br/>
+            <a:r>
+              <a:t>• Applied steps</a:t>
+            </a:r>
+            <a:br/>
+            <a:r>
+              <a:t>• Step references</a:t>
+            </a:r>
+          </a:p>
+        </p:txBody>
+      </p:sp>
+      <p:sp>
+        <p:nvSpPr>
+          <p:cNvPr id="8" name="Rounded Rectangle 7"/>
+          <p:cNvSpPr/>
+          <p:nvPr/>
+        </p:nvSpPr>
+        <p:spPr>
+          <a:xfrm>
+            <a:off x="6263640" y="1234440"/>
+            <a:ext cx="5303520" cy="1828800"/>
+          </a:xfrm>
+          <a:prstGeom prst="roundRect">
+            <a:avLst/>
+          </a:prstGeom>
+          <a:solidFill>
+            <a:srgbClr val="FFFFFF"/>
+          </a:solidFill>
+          <a:ln>
+            <a:solidFill>
+              <a:srgbClr val="DCDCDC"/>
+            </a:solidFill>
+          </a:ln>
+        </p:spPr>
+        <p:style>
+          <a:lnRef idx="1">
+            <a:schemeClr val="accent1"/>
+          </a:lnRef>
+          <a:fillRef idx="3">
+            <a:schemeClr val="accent1"/>
+          </a:fillRef>
+          <a:effectRef idx="2">
+            <a:schemeClr val="accent1"/>
+          </a:effectRef>
+          <a:fontRef idx="minor">
+            <a:schemeClr val="lt1"/>
+          </a:fontRef>
+        </p:style>
+        <p:txBody>
+          <a:bodyPr rtlCol="0" anchor="ctr"/>
+          <a:lstStyle/>
+          <a:p>
+            <a:pPr algn="ctr"/>
+          </a:p>
+        </p:txBody>
+      </p:sp>
+      <p:sp>
+        <p:nvSpPr>
+          <p:cNvPr id="9" name="Rectangle 8"/>
+          <p:cNvSpPr/>
+          <p:nvPr/>
+        </p:nvSpPr>
+        <p:spPr>
+          <a:xfrm>
+            <a:off x="6263640" y="1234440"/>
+            <a:ext cx="91440" cy="1828800"/>
+          </a:xfrm>
+          <a:prstGeom prst="rect">
+            <a:avLst/>
+          </a:prstGeom>
+          <a:solidFill>
+            <a:srgbClr val="02C39A"/>
+          </a:solidFill>
+          <a:ln>
+            <a:noFill/>
+          </a:ln>
+        </p:spPr>
+        <p:style>
+          <a:lnRef idx="1">
+            <a:schemeClr val="accent1"/>
+          </a:lnRef>
+          <a:fillRef idx="3">
+            <a:schemeClr val="accent1"/>
+          </a:fillRef>
+          <a:effectRef idx="2">
+            <a:schemeClr val="accent1"/>
+          </a:effectRef>
+          <a:fontRef idx="minor">
+            <a:schemeClr val="lt1"/>
+          </a:fontRef>
+        </p:style>
+        <p:txBody>
+          <a:bodyPr rtlCol="0" anchor="ctr"/>
+          <a:lstStyle/>
+          <a:p>
+            <a:pPr algn="ctr"/>
+          </a:p>
+        </p:txBody>
+      </p:sp>
+      <p:sp>
+        <p:nvSpPr>
+          <p:cNvPr id="10" name="TextBox 9"/>
+          <p:cNvSpPr txBox="1"/>
+          <p:nvPr/>
+        </p:nvSpPr>
+        <p:spPr>
+          <a:xfrm>
+            <a:off x="6446520" y="1344168"/>
+            <a:ext cx="4983480" cy="1664208"/>
+          </a:xfrm>
+          <a:prstGeom prst="rect">
+            <a:avLst/>
+          </a:prstGeom>
+          <a:noFill/>
+        </p:spPr>
+        <p:txBody>
+          <a:bodyPr wrap="square" lIns="0" rIns="0">
+            <a:spAutoFit/>
+          </a:bodyPr>
+          <a:lstStyle/>
+          <a:p>
+            <a:pPr>
+              <a:defRPr b="1" sz="1500">
+                <a:solidFill>
+                  <a:srgbClr val="1E2761"/>
+                </a:solidFill>
+                <a:latin typeface="Aptos Display"/>
+              </a:defRPr>
+            </a:pPr>
+            <a:r>
+              <a:t>Why it helps</a:t>
             </a:r>
           </a:p>
           <a:p>
@@ -12656,25 +12204,25 @@
               </a:defRPr>
             </a:pPr>
             <a:r>
-              <a:t>• Applied steps</a:t>
+              <a:t>• Lists, records, and tables</a:t>
             </a:r>
             <a:br/>
             <a:r>
-              <a:t>• Step references</a:t>
-            </a:r>
-          </a:p>
-        </p:txBody>
-      </p:sp>
-      <p:sp>
-        <p:nvSpPr>
-          <p:cNvPr id="8" name="Rounded Rectangle 7"/>
+              <a:t>• Generated M vs. handwritten M</a:t>
+            </a:r>
+          </a:p>
+        </p:txBody>
+      </p:sp>
+      <p:sp>
+        <p:nvSpPr>
+          <p:cNvPr id="11" name="Rounded Rectangle 10"/>
           <p:cNvSpPr/>
           <p:nvPr/>
         </p:nvSpPr>
         <p:spPr>
           <a:xfrm>
-            <a:off x="6263640" y="1234440"/>
-            <a:ext cx="5303520" cy="1828800"/>
+            <a:off x="822960" y="4160520"/>
+            <a:ext cx="10424160" cy="868680"/>
           </a:xfrm>
           <a:prstGeom prst="roundRect">
             <a:avLst/>
@@ -12712,20 +12260,20 @@
       </p:sp>
       <p:sp>
         <p:nvSpPr>
-          <p:cNvPr id="9" name="Rectangle 8"/>
+          <p:cNvPr id="12" name="Rectangle 11"/>
           <p:cNvSpPr/>
           <p:nvPr/>
         </p:nvSpPr>
         <p:spPr>
           <a:xfrm>
-            <a:off x="6263640" y="1234440"/>
-            <a:ext cx="91440" cy="1828800"/>
+            <a:off x="822960" y="4160520"/>
+            <a:ext cx="91440" cy="868680"/>
           </a:xfrm>
           <a:prstGeom prst="rect">
             <a:avLst/>
           </a:prstGeom>
           <a:solidFill>
-            <a:srgbClr val="02C39A"/>
+            <a:srgbClr val="F9B700"/>
           </a:solidFill>
           <a:ln>
             <a:noFill/>
@@ -12755,14 +12303,14 @@
       </p:sp>
       <p:sp>
         <p:nvSpPr>
-          <p:cNvPr id="10" name="TextBox 9"/>
+          <p:cNvPr id="13" name="TextBox 12"/>
           <p:cNvSpPr txBox="1"/>
           <p:nvPr/>
         </p:nvSpPr>
         <p:spPr>
           <a:xfrm>
-            <a:off x="6446520" y="1344168"/>
-            <a:ext cx="4983480" cy="1664208"/>
+            <a:off x="1005840" y="4270248"/>
+            <a:ext cx="10104120" cy="704088"/>
           </a:xfrm>
           <a:prstGeom prst="rect">
             <a:avLst/>
@@ -12784,167 +12332,7 @@
               </a:defRPr>
             </a:pPr>
             <a:r>
-              <a:t>Why it helps</a:t>
-            </a:r>
-          </a:p>
-          <a:p>
-            <a:pPr>
-              <a:spcBef>
-                <a:spcPts val="400"/>
-              </a:spcBef>
-              <a:defRPr sz="1050">
-                <a:solidFill>
-                  <a:srgbClr val="242424"/>
-                </a:solidFill>
-                <a:latin typeface="Aptos"/>
-              </a:defRPr>
-            </a:pPr>
-            <a:r>
-              <a:t>• Lists, records, and tables</a:t>
-            </a:r>
-            <a:br/>
-            <a:r>
-              <a:t>• Generated M vs. handwritten M</a:t>
-            </a:r>
-          </a:p>
-        </p:txBody>
-      </p:sp>
-      <p:sp>
-        <p:nvSpPr>
-          <p:cNvPr id="11" name="Rounded Rectangle 10"/>
-          <p:cNvSpPr/>
-          <p:nvPr/>
-        </p:nvSpPr>
-        <p:spPr>
-          <a:xfrm>
-            <a:off x="822960" y="4160520"/>
-            <a:ext cx="10424160" cy="868680"/>
-          </a:xfrm>
-          <a:prstGeom prst="roundRect">
-            <a:avLst/>
-          </a:prstGeom>
-          <a:solidFill>
-            <a:srgbClr val="FFFFFF"/>
-          </a:solidFill>
-          <a:ln>
-            <a:solidFill>
-              <a:srgbClr val="DCDCDC"/>
-            </a:solidFill>
-          </a:ln>
-        </p:spPr>
-        <p:style>
-          <a:lnRef idx="1">
-            <a:schemeClr val="accent1"/>
-          </a:lnRef>
-          <a:fillRef idx="3">
-            <a:schemeClr val="accent1"/>
-          </a:fillRef>
-          <a:effectRef idx="2">
-            <a:schemeClr val="accent1"/>
-          </a:effectRef>
-          <a:fontRef idx="minor">
-            <a:schemeClr val="lt1"/>
-          </a:fontRef>
-        </p:style>
-        <p:txBody>
-          <a:bodyPr rtlCol="0" anchor="ctr"/>
-          <a:lstStyle/>
-          <a:p>
-            <a:pPr algn="ctr"/>
-          </a:p>
-        </p:txBody>
-      </p:sp>
-      <p:sp>
-        <p:nvSpPr>
-          <p:cNvPr id="12" name="Rectangle 11"/>
-          <p:cNvSpPr/>
-          <p:nvPr/>
-        </p:nvSpPr>
-        <p:spPr>
-          <a:xfrm>
-            <a:off x="822960" y="4160520"/>
-            <a:ext cx="91440" cy="868680"/>
-          </a:xfrm>
-          <a:prstGeom prst="rect">
-            <a:avLst/>
-          </a:prstGeom>
-          <a:solidFill>
-            <a:srgbClr val="F9B700"/>
-          </a:solidFill>
-          <a:ln>
-            <a:noFill/>
-          </a:ln>
-        </p:spPr>
-        <p:style>
-          <a:lnRef idx="1">
-            <a:schemeClr val="accent1"/>
-          </a:lnRef>
-          <a:fillRef idx="3">
-            <a:schemeClr val="accent1"/>
-          </a:fillRef>
-          <a:effectRef idx="2">
-            <a:schemeClr val="accent1"/>
-          </a:effectRef>
-          <a:fontRef idx="minor">
-            <a:schemeClr val="lt1"/>
-          </a:fontRef>
-        </p:style>
-        <p:txBody>
-          <a:bodyPr rtlCol="0" anchor="ctr"/>
-          <a:lstStyle/>
-          <a:p>
-            <a:pPr algn="ctr"/>
-          </a:p>
-        </p:txBody>
-      </p:sp>
-      <p:sp>
-        <p:nvSpPr>
-          <p:cNvPr id="13" name="TextBox 12"/>
-          <p:cNvSpPr txBox="1"/>
-          <p:nvPr/>
-        </p:nvSpPr>
-        <p:spPr>
-          <a:xfrm>
-            <a:off x="1005840" y="4270248"/>
-            <a:ext cx="10104120" cy="704088"/>
-          </a:xfrm>
-          <a:prstGeom prst="rect">
-            <a:avLst/>
-          </a:prstGeom>
-          <a:noFill/>
-        </p:spPr>
-        <p:txBody>
-          <a:bodyPr wrap="square" lIns="0" rIns="0">
-            <a:spAutoFit/>
-          </a:bodyPr>
-          <a:lstStyle/>
-          <a:p>
-            <a:pPr>
-              <a:defRPr b="1" sz="1500">
-                <a:solidFill>
-                  <a:srgbClr val="1E2761"/>
-                </a:solidFill>
-                <a:latin typeface="Aptos Display"/>
-              </a:defRPr>
-            </a:pPr>
-            <a:r>
-              <a:t>Lab connection</a:t>
-            </a:r>
-          </a:p>
-          <a:p>
-            <a:pPr>
-              <a:spcBef>
-                <a:spcPts val="400"/>
-              </a:spcBef>
-              <a:defRPr sz="1050">
-                <a:solidFill>
-                  <a:srgbClr val="242424"/>
-                </a:solidFill>
-                <a:latin typeface="Aptos"/>
-              </a:defRPr>
-            </a:pPr>
-            <a:r>
-              <a:t>Coverage: Partial. Use the lab README to demonstrate or discuss this topic. Review terms: fundamentals, handwritten, language, lists, records.</a:t>
+              <a:t>In the lab, you will apply this pattern, validate the expected behavior, and discuss where it fits in a real Power BI solution.</a:t>
             </a:r>
           </a:p>
         </p:txBody>
@@ -13083,42 +12471,6 @@
       </p:sp>
       <p:sp>
         <p:nvSpPr>
-          <p:cNvPr id="4" name="TextBox 3"/>
-          <p:cNvSpPr txBox="1"/>
-          <p:nvPr/>
-        </p:nvSpPr>
-        <p:spPr>
-          <a:xfrm>
-            <a:off x="530352" y="914400"/>
-            <a:ext cx="10515600" cy="320040"/>
-          </a:xfrm>
-          <a:prstGeom prst="rect">
-            <a:avLst/>
-          </a:prstGeom>
-          <a:noFill/>
-        </p:spPr>
-        <p:txBody>
-          <a:bodyPr wrap="none">
-            <a:spAutoFit/>
-          </a:bodyPr>
-          <a:lstStyle/>
-          <a:p>
-            <a:pPr>
-              <a:defRPr sz="1200">
-                <a:solidFill>
-                  <a:srgbClr val="5C5C5C"/>
-                </a:solidFill>
-                <a:latin typeface="Aptos"/>
-              </a:defRPr>
-            </a:pPr>
-            <a:r>
-              <a:t>Talking points, learner value, and lab connection</a:t>
-            </a:r>
-          </a:p>
-        </p:txBody>
-      </p:sp>
-      <p:sp>
-        <p:nvSpPr>
           <p:cNvPr id="5" name="Rounded Rectangle 4"/>
           <p:cNvSpPr/>
           <p:nvPr/>
@@ -13236,7 +12588,139 @@
               </a:defRPr>
             </a:pPr>
             <a:r>
-              <a:t>Talking points</a:t>
+              <a:t>Key ideas</a:t>
+            </a:r>
+            <a:br/>
+            <a:r>
+              <a:t>• Source path parameters</a:t>
+            </a:r>
+            <a:br/>
+            <a:r>
+              <a:t>• Environment switching</a:t>
+            </a:r>
+          </a:p>
+        </p:txBody>
+      </p:sp>
+      <p:sp>
+        <p:nvSpPr>
+          <p:cNvPr id="8" name="Rounded Rectangle 7"/>
+          <p:cNvSpPr/>
+          <p:nvPr/>
+        </p:nvSpPr>
+        <p:spPr>
+          <a:xfrm>
+            <a:off x="6263640" y="1234440"/>
+            <a:ext cx="5303520" cy="1828800"/>
+          </a:xfrm>
+          <a:prstGeom prst="roundRect">
+            <a:avLst/>
+          </a:prstGeom>
+          <a:solidFill>
+            <a:srgbClr val="FFFFFF"/>
+          </a:solidFill>
+          <a:ln>
+            <a:solidFill>
+              <a:srgbClr val="DCDCDC"/>
+            </a:solidFill>
+          </a:ln>
+        </p:spPr>
+        <p:style>
+          <a:lnRef idx="1">
+            <a:schemeClr val="accent1"/>
+          </a:lnRef>
+          <a:fillRef idx="3">
+            <a:schemeClr val="accent1"/>
+          </a:fillRef>
+          <a:effectRef idx="2">
+            <a:schemeClr val="accent1"/>
+          </a:effectRef>
+          <a:fontRef idx="minor">
+            <a:schemeClr val="lt1"/>
+          </a:fontRef>
+        </p:style>
+        <p:txBody>
+          <a:bodyPr rtlCol="0" anchor="ctr"/>
+          <a:lstStyle/>
+          <a:p>
+            <a:pPr algn="ctr"/>
+          </a:p>
+        </p:txBody>
+      </p:sp>
+      <p:sp>
+        <p:nvSpPr>
+          <p:cNvPr id="9" name="Rectangle 8"/>
+          <p:cNvSpPr/>
+          <p:nvPr/>
+        </p:nvSpPr>
+        <p:spPr>
+          <a:xfrm>
+            <a:off x="6263640" y="1234440"/>
+            <a:ext cx="91440" cy="1828800"/>
+          </a:xfrm>
+          <a:prstGeom prst="rect">
+            <a:avLst/>
+          </a:prstGeom>
+          <a:solidFill>
+            <a:srgbClr val="02C39A"/>
+          </a:solidFill>
+          <a:ln>
+            <a:noFill/>
+          </a:ln>
+        </p:spPr>
+        <p:style>
+          <a:lnRef idx="1">
+            <a:schemeClr val="accent1"/>
+          </a:lnRef>
+          <a:fillRef idx="3">
+            <a:schemeClr val="accent1"/>
+          </a:fillRef>
+          <a:effectRef idx="2">
+            <a:schemeClr val="accent1"/>
+          </a:effectRef>
+          <a:fontRef idx="minor">
+            <a:schemeClr val="lt1"/>
+          </a:fontRef>
+        </p:style>
+        <p:txBody>
+          <a:bodyPr rtlCol="0" anchor="ctr"/>
+          <a:lstStyle/>
+          <a:p>
+            <a:pPr algn="ctr"/>
+          </a:p>
+        </p:txBody>
+      </p:sp>
+      <p:sp>
+        <p:nvSpPr>
+          <p:cNvPr id="10" name="TextBox 9"/>
+          <p:cNvSpPr txBox="1"/>
+          <p:nvPr/>
+        </p:nvSpPr>
+        <p:spPr>
+          <a:xfrm>
+            <a:off x="6446520" y="1344168"/>
+            <a:ext cx="4983480" cy="1664208"/>
+          </a:xfrm>
+          <a:prstGeom prst="rect">
+            <a:avLst/>
+          </a:prstGeom>
+          <a:noFill/>
+        </p:spPr>
+        <p:txBody>
+          <a:bodyPr wrap="square" lIns="0" rIns="0">
+            <a:spAutoFit/>
+          </a:bodyPr>
+          <a:lstStyle/>
+          <a:p>
+            <a:pPr>
+              <a:defRPr b="1" sz="1500">
+                <a:solidFill>
+                  <a:srgbClr val="1E2761"/>
+                </a:solidFill>
+                <a:latin typeface="Aptos Display"/>
+              </a:defRPr>
+            </a:pPr>
+            <a:r>
+              <a:t>Why it helps</a:t>
             </a:r>
           </a:p>
           <a:p>
@@ -13252,25 +12736,25 @@
               </a:defRPr>
             </a:pPr>
             <a:r>
-              <a:t>• Source path parameters</a:t>
+              <a:t>• RangeStart and RangeEnd</a:t>
             </a:r>
             <a:br/>
             <a:r>
-              <a:t>• Environment switching</a:t>
-            </a:r>
-          </a:p>
-        </p:txBody>
-      </p:sp>
-      <p:sp>
-        <p:nvSpPr>
-          <p:cNvPr id="8" name="Rounded Rectangle 7"/>
+              <a:t>• Parameter governance</a:t>
+            </a:r>
+          </a:p>
+        </p:txBody>
+      </p:sp>
+      <p:sp>
+        <p:nvSpPr>
+          <p:cNvPr id="11" name="Rounded Rectangle 10"/>
           <p:cNvSpPr/>
           <p:nvPr/>
         </p:nvSpPr>
         <p:spPr>
           <a:xfrm>
-            <a:off x="6263640" y="1234440"/>
-            <a:ext cx="5303520" cy="1828800"/>
+            <a:off x="822960" y="4160520"/>
+            <a:ext cx="10424160" cy="868680"/>
           </a:xfrm>
           <a:prstGeom prst="roundRect">
             <a:avLst/>
@@ -13308,20 +12792,20 @@
       </p:sp>
       <p:sp>
         <p:nvSpPr>
-          <p:cNvPr id="9" name="Rectangle 8"/>
+          <p:cNvPr id="12" name="Rectangle 11"/>
           <p:cNvSpPr/>
           <p:nvPr/>
         </p:nvSpPr>
         <p:spPr>
           <a:xfrm>
-            <a:off x="6263640" y="1234440"/>
-            <a:ext cx="91440" cy="1828800"/>
+            <a:off x="822960" y="4160520"/>
+            <a:ext cx="91440" cy="868680"/>
           </a:xfrm>
           <a:prstGeom prst="rect">
             <a:avLst/>
           </a:prstGeom>
           <a:solidFill>
-            <a:srgbClr val="02C39A"/>
+            <a:srgbClr val="F9B700"/>
           </a:solidFill>
           <a:ln>
             <a:noFill/>
@@ -13351,14 +12835,14 @@
       </p:sp>
       <p:sp>
         <p:nvSpPr>
-          <p:cNvPr id="10" name="TextBox 9"/>
+          <p:cNvPr id="13" name="TextBox 12"/>
           <p:cNvSpPr txBox="1"/>
           <p:nvPr/>
         </p:nvSpPr>
         <p:spPr>
           <a:xfrm>
-            <a:off x="6446520" y="1344168"/>
-            <a:ext cx="4983480" cy="1664208"/>
+            <a:off x="1005840" y="4270248"/>
+            <a:ext cx="10104120" cy="704088"/>
           </a:xfrm>
           <a:prstGeom prst="rect">
             <a:avLst/>
@@ -13380,167 +12864,7 @@
               </a:defRPr>
             </a:pPr>
             <a:r>
-              <a:t>Why it helps</a:t>
-            </a:r>
-          </a:p>
-          <a:p>
-            <a:pPr>
-              <a:spcBef>
-                <a:spcPts val="400"/>
-              </a:spcBef>
-              <a:defRPr sz="1050">
-                <a:solidFill>
-                  <a:srgbClr val="242424"/>
-                </a:solidFill>
-                <a:latin typeface="Aptos"/>
-              </a:defRPr>
-            </a:pPr>
-            <a:r>
-              <a:t>• RangeStart and RangeEnd</a:t>
-            </a:r>
-            <a:br/>
-            <a:r>
-              <a:t>• Parameter governance</a:t>
-            </a:r>
-          </a:p>
-        </p:txBody>
-      </p:sp>
-      <p:sp>
-        <p:nvSpPr>
-          <p:cNvPr id="11" name="Rounded Rectangle 10"/>
-          <p:cNvSpPr/>
-          <p:nvPr/>
-        </p:nvSpPr>
-        <p:spPr>
-          <a:xfrm>
-            <a:off x="822960" y="4160520"/>
-            <a:ext cx="10424160" cy="868680"/>
-          </a:xfrm>
-          <a:prstGeom prst="roundRect">
-            <a:avLst/>
-          </a:prstGeom>
-          <a:solidFill>
-            <a:srgbClr val="FFFFFF"/>
-          </a:solidFill>
-          <a:ln>
-            <a:solidFill>
-              <a:srgbClr val="DCDCDC"/>
-            </a:solidFill>
-          </a:ln>
-        </p:spPr>
-        <p:style>
-          <a:lnRef idx="1">
-            <a:schemeClr val="accent1"/>
-          </a:lnRef>
-          <a:fillRef idx="3">
-            <a:schemeClr val="accent1"/>
-          </a:fillRef>
-          <a:effectRef idx="2">
-            <a:schemeClr val="accent1"/>
-          </a:effectRef>
-          <a:fontRef idx="minor">
-            <a:schemeClr val="lt1"/>
-          </a:fontRef>
-        </p:style>
-        <p:txBody>
-          <a:bodyPr rtlCol="0" anchor="ctr"/>
-          <a:lstStyle/>
-          <a:p>
-            <a:pPr algn="ctr"/>
-          </a:p>
-        </p:txBody>
-      </p:sp>
-      <p:sp>
-        <p:nvSpPr>
-          <p:cNvPr id="12" name="Rectangle 11"/>
-          <p:cNvSpPr/>
-          <p:nvPr/>
-        </p:nvSpPr>
-        <p:spPr>
-          <a:xfrm>
-            <a:off x="822960" y="4160520"/>
-            <a:ext cx="91440" cy="868680"/>
-          </a:xfrm>
-          <a:prstGeom prst="rect">
-            <a:avLst/>
-          </a:prstGeom>
-          <a:solidFill>
-            <a:srgbClr val="F9B700"/>
-          </a:solidFill>
-          <a:ln>
-            <a:noFill/>
-          </a:ln>
-        </p:spPr>
-        <p:style>
-          <a:lnRef idx="1">
-            <a:schemeClr val="accent1"/>
-          </a:lnRef>
-          <a:fillRef idx="3">
-            <a:schemeClr val="accent1"/>
-          </a:fillRef>
-          <a:effectRef idx="2">
-            <a:schemeClr val="accent1"/>
-          </a:effectRef>
-          <a:fontRef idx="minor">
-            <a:schemeClr val="lt1"/>
-          </a:fontRef>
-        </p:style>
-        <p:txBody>
-          <a:bodyPr rtlCol="0" anchor="ctr"/>
-          <a:lstStyle/>
-          <a:p>
-            <a:pPr algn="ctr"/>
-          </a:p>
-        </p:txBody>
-      </p:sp>
-      <p:sp>
-        <p:nvSpPr>
-          <p:cNvPr id="13" name="TextBox 12"/>
-          <p:cNvSpPr txBox="1"/>
-          <p:nvPr/>
-        </p:nvSpPr>
-        <p:spPr>
-          <a:xfrm>
-            <a:off x="1005840" y="4270248"/>
-            <a:ext cx="10104120" cy="704088"/>
-          </a:xfrm>
-          <a:prstGeom prst="rect">
-            <a:avLst/>
-          </a:prstGeom>
-          <a:noFill/>
-        </p:spPr>
-        <p:txBody>
-          <a:bodyPr wrap="square" lIns="0" rIns="0">
-            <a:spAutoFit/>
-          </a:bodyPr>
-          <a:lstStyle/>
-          <a:p>
-            <a:pPr>
-              <a:defRPr b="1" sz="1500">
-                <a:solidFill>
-                  <a:srgbClr val="1E2761"/>
-                </a:solidFill>
-                <a:latin typeface="Aptos Display"/>
-              </a:defRPr>
-            </a:pPr>
-            <a:r>
-              <a:t>Lab connection</a:t>
-            </a:r>
-          </a:p>
-          <a:p>
-            <a:pPr>
-              <a:spcBef>
-                <a:spcPts val="400"/>
-              </a:spcBef>
-              <a:defRPr sz="1050">
-                <a:solidFill>
-                  <a:srgbClr val="242424"/>
-                </a:solidFill>
-                <a:latin typeface="Aptos"/>
-              </a:defRPr>
-            </a:pPr>
-            <a:r>
-              <a:t>Coverage: Covered. Use the lab README to demonstrate or discuss this topic. Review terms: governance.</a:t>
+              <a:t>In the lab, you will apply this pattern, validate the expected behavior, and discuss where it fits in a real Power BI solution.</a:t>
             </a:r>
           </a:p>
         </p:txBody>
@@ -13679,42 +13003,6 @@
       </p:sp>
       <p:sp>
         <p:nvSpPr>
-          <p:cNvPr id="4" name="TextBox 3"/>
-          <p:cNvSpPr txBox="1"/>
-          <p:nvPr/>
-        </p:nvSpPr>
-        <p:spPr>
-          <a:xfrm>
-            <a:off x="530352" y="914400"/>
-            <a:ext cx="10515600" cy="320040"/>
-          </a:xfrm>
-          <a:prstGeom prst="rect">
-            <a:avLst/>
-          </a:prstGeom>
-          <a:noFill/>
-        </p:spPr>
-        <p:txBody>
-          <a:bodyPr wrap="none">
-            <a:spAutoFit/>
-          </a:bodyPr>
-          <a:lstStyle/>
-          <a:p>
-            <a:pPr>
-              <a:defRPr sz="1200">
-                <a:solidFill>
-                  <a:srgbClr val="5C5C5C"/>
-                </a:solidFill>
-                <a:latin typeface="Aptos"/>
-              </a:defRPr>
-            </a:pPr>
-            <a:r>
-              <a:t>Talking points, learner value, and lab connection</a:t>
-            </a:r>
-          </a:p>
-        </p:txBody>
-      </p:sp>
-      <p:sp>
-        <p:nvSpPr>
           <p:cNvPr id="5" name="Rounded Rectangle 4"/>
           <p:cNvSpPr/>
           <p:nvPr/>
@@ -13832,7 +13120,139 @@
               </a:defRPr>
             </a:pPr>
             <a:r>
-              <a:t>Talking points</a:t>
+              <a:t>Key ideas</a:t>
+            </a:r>
+            <a:br/>
+            <a:r>
+              <a:t>• Function inputs</a:t>
+            </a:r>
+            <a:br/>
+            <a:r>
+              <a:t>• Reusable cleanup logic</a:t>
+            </a:r>
+          </a:p>
+        </p:txBody>
+      </p:sp>
+      <p:sp>
+        <p:nvSpPr>
+          <p:cNvPr id="8" name="Rounded Rectangle 7"/>
+          <p:cNvSpPr/>
+          <p:nvPr/>
+        </p:nvSpPr>
+        <p:spPr>
+          <a:xfrm>
+            <a:off x="6263640" y="1234440"/>
+            <a:ext cx="5303520" cy="1828800"/>
+          </a:xfrm>
+          <a:prstGeom prst="roundRect">
+            <a:avLst/>
+          </a:prstGeom>
+          <a:solidFill>
+            <a:srgbClr val="FFFFFF"/>
+          </a:solidFill>
+          <a:ln>
+            <a:solidFill>
+              <a:srgbClr val="DCDCDC"/>
+            </a:solidFill>
+          </a:ln>
+        </p:spPr>
+        <p:style>
+          <a:lnRef idx="1">
+            <a:schemeClr val="accent1"/>
+          </a:lnRef>
+          <a:fillRef idx="3">
+            <a:schemeClr val="accent1"/>
+          </a:fillRef>
+          <a:effectRef idx="2">
+            <a:schemeClr val="accent1"/>
+          </a:effectRef>
+          <a:fontRef idx="minor">
+            <a:schemeClr val="lt1"/>
+          </a:fontRef>
+        </p:style>
+        <p:txBody>
+          <a:bodyPr rtlCol="0" anchor="ctr"/>
+          <a:lstStyle/>
+          <a:p>
+            <a:pPr algn="ctr"/>
+          </a:p>
+        </p:txBody>
+      </p:sp>
+      <p:sp>
+        <p:nvSpPr>
+          <p:cNvPr id="9" name="Rectangle 8"/>
+          <p:cNvSpPr/>
+          <p:nvPr/>
+        </p:nvSpPr>
+        <p:spPr>
+          <a:xfrm>
+            <a:off x="6263640" y="1234440"/>
+            <a:ext cx="91440" cy="1828800"/>
+          </a:xfrm>
+          <a:prstGeom prst="rect">
+            <a:avLst/>
+          </a:prstGeom>
+          <a:solidFill>
+            <a:srgbClr val="02C39A"/>
+          </a:solidFill>
+          <a:ln>
+            <a:noFill/>
+          </a:ln>
+        </p:spPr>
+        <p:style>
+          <a:lnRef idx="1">
+            <a:schemeClr val="accent1"/>
+          </a:lnRef>
+          <a:fillRef idx="3">
+            <a:schemeClr val="accent1"/>
+          </a:fillRef>
+          <a:effectRef idx="2">
+            <a:schemeClr val="accent1"/>
+          </a:effectRef>
+          <a:fontRef idx="minor">
+            <a:schemeClr val="lt1"/>
+          </a:fontRef>
+        </p:style>
+        <p:txBody>
+          <a:bodyPr rtlCol="0" anchor="ctr"/>
+          <a:lstStyle/>
+          <a:p>
+            <a:pPr algn="ctr"/>
+          </a:p>
+        </p:txBody>
+      </p:sp>
+      <p:sp>
+        <p:nvSpPr>
+          <p:cNvPr id="10" name="TextBox 9"/>
+          <p:cNvSpPr txBox="1"/>
+          <p:nvPr/>
+        </p:nvSpPr>
+        <p:spPr>
+          <a:xfrm>
+            <a:off x="6446520" y="1344168"/>
+            <a:ext cx="4983480" cy="1664208"/>
+          </a:xfrm>
+          <a:prstGeom prst="rect">
+            <a:avLst/>
+          </a:prstGeom>
+          <a:noFill/>
+        </p:spPr>
+        <p:txBody>
+          <a:bodyPr wrap="square" lIns="0" rIns="0">
+            <a:spAutoFit/>
+          </a:bodyPr>
+          <a:lstStyle/>
+          <a:p>
+            <a:pPr>
+              <a:defRPr b="1" sz="1500">
+                <a:solidFill>
+                  <a:srgbClr val="1E2761"/>
+                </a:solidFill>
+                <a:latin typeface="Aptos Display"/>
+              </a:defRPr>
+            </a:pPr>
+            <a:r>
+              <a:t>Why it helps</a:t>
             </a:r>
           </a:p>
           <a:p>
@@ -13848,25 +13268,25 @@
               </a:defRPr>
             </a:pPr>
             <a:r>
-              <a:t>• Function inputs</a:t>
+              <a:t>• Invoking functions</a:t>
             </a:r>
             <a:br/>
             <a:r>
-              <a:t>• Reusable cleanup logic</a:t>
-            </a:r>
-          </a:p>
-        </p:txBody>
-      </p:sp>
-      <p:sp>
-        <p:nvSpPr>
-          <p:cNvPr id="8" name="Rounded Rectangle 7"/>
+              <a:t>• Testing functions</a:t>
+            </a:r>
+          </a:p>
+        </p:txBody>
+      </p:sp>
+      <p:sp>
+        <p:nvSpPr>
+          <p:cNvPr id="11" name="Rounded Rectangle 10"/>
           <p:cNvSpPr/>
           <p:nvPr/>
         </p:nvSpPr>
         <p:spPr>
           <a:xfrm>
-            <a:off x="6263640" y="1234440"/>
-            <a:ext cx="5303520" cy="1828800"/>
+            <a:off x="822960" y="4160520"/>
+            <a:ext cx="10424160" cy="868680"/>
           </a:xfrm>
           <a:prstGeom prst="roundRect">
             <a:avLst/>
@@ -13904,20 +13324,20 @@
       </p:sp>
       <p:sp>
         <p:nvSpPr>
-          <p:cNvPr id="9" name="Rectangle 8"/>
+          <p:cNvPr id="12" name="Rectangle 11"/>
           <p:cNvSpPr/>
           <p:nvPr/>
         </p:nvSpPr>
         <p:spPr>
           <a:xfrm>
-            <a:off x="6263640" y="1234440"/>
-            <a:ext cx="91440" cy="1828800"/>
+            <a:off x="822960" y="4160520"/>
+            <a:ext cx="91440" cy="868680"/>
           </a:xfrm>
           <a:prstGeom prst="rect">
             <a:avLst/>
           </a:prstGeom>
           <a:solidFill>
-            <a:srgbClr val="02C39A"/>
+            <a:srgbClr val="F9B700"/>
           </a:solidFill>
           <a:ln>
             <a:noFill/>
@@ -13947,14 +13367,14 @@
       </p:sp>
       <p:sp>
         <p:nvSpPr>
-          <p:cNvPr id="10" name="TextBox 9"/>
+          <p:cNvPr id="13" name="TextBox 12"/>
           <p:cNvSpPr txBox="1"/>
           <p:nvPr/>
         </p:nvSpPr>
         <p:spPr>
           <a:xfrm>
-            <a:off x="6446520" y="1344168"/>
-            <a:ext cx="4983480" cy="1664208"/>
+            <a:off x="1005840" y="4270248"/>
+            <a:ext cx="10104120" cy="704088"/>
           </a:xfrm>
           <a:prstGeom prst="rect">
             <a:avLst/>
@@ -13976,167 +13396,7 @@
               </a:defRPr>
             </a:pPr>
             <a:r>
-              <a:t>Why it helps</a:t>
-            </a:r>
-          </a:p>
-          <a:p>
-            <a:pPr>
-              <a:spcBef>
-                <a:spcPts val="400"/>
-              </a:spcBef>
-              <a:defRPr sz="1050">
-                <a:solidFill>
-                  <a:srgbClr val="242424"/>
-                </a:solidFill>
-                <a:latin typeface="Aptos"/>
-              </a:defRPr>
-            </a:pPr>
-            <a:r>
-              <a:t>• Invoking functions</a:t>
-            </a:r>
-            <a:br/>
-            <a:r>
-              <a:t>• Testing functions</a:t>
-            </a:r>
-          </a:p>
-        </p:txBody>
-      </p:sp>
-      <p:sp>
-        <p:nvSpPr>
-          <p:cNvPr id="11" name="Rounded Rectangle 10"/>
-          <p:cNvSpPr/>
-          <p:nvPr/>
-        </p:nvSpPr>
-        <p:spPr>
-          <a:xfrm>
-            <a:off x="822960" y="4160520"/>
-            <a:ext cx="10424160" cy="868680"/>
-          </a:xfrm>
-          <a:prstGeom prst="roundRect">
-            <a:avLst/>
-          </a:prstGeom>
-          <a:solidFill>
-            <a:srgbClr val="FFFFFF"/>
-          </a:solidFill>
-          <a:ln>
-            <a:solidFill>
-              <a:srgbClr val="DCDCDC"/>
-            </a:solidFill>
-          </a:ln>
-        </p:spPr>
-        <p:style>
-          <a:lnRef idx="1">
-            <a:schemeClr val="accent1"/>
-          </a:lnRef>
-          <a:fillRef idx="3">
-            <a:schemeClr val="accent1"/>
-          </a:fillRef>
-          <a:effectRef idx="2">
-            <a:schemeClr val="accent1"/>
-          </a:effectRef>
-          <a:fontRef idx="minor">
-            <a:schemeClr val="lt1"/>
-          </a:fontRef>
-        </p:style>
-        <p:txBody>
-          <a:bodyPr rtlCol="0" anchor="ctr"/>
-          <a:lstStyle/>
-          <a:p>
-            <a:pPr algn="ctr"/>
-          </a:p>
-        </p:txBody>
-      </p:sp>
-      <p:sp>
-        <p:nvSpPr>
-          <p:cNvPr id="12" name="Rectangle 11"/>
-          <p:cNvSpPr/>
-          <p:nvPr/>
-        </p:nvSpPr>
-        <p:spPr>
-          <a:xfrm>
-            <a:off x="822960" y="4160520"/>
-            <a:ext cx="91440" cy="868680"/>
-          </a:xfrm>
-          <a:prstGeom prst="rect">
-            <a:avLst/>
-          </a:prstGeom>
-          <a:solidFill>
-            <a:srgbClr val="F9B700"/>
-          </a:solidFill>
-          <a:ln>
-            <a:noFill/>
-          </a:ln>
-        </p:spPr>
-        <p:style>
-          <a:lnRef idx="1">
-            <a:schemeClr val="accent1"/>
-          </a:lnRef>
-          <a:fillRef idx="3">
-            <a:schemeClr val="accent1"/>
-          </a:fillRef>
-          <a:effectRef idx="2">
-            <a:schemeClr val="accent1"/>
-          </a:effectRef>
-          <a:fontRef idx="minor">
-            <a:schemeClr val="lt1"/>
-          </a:fontRef>
-        </p:style>
-        <p:txBody>
-          <a:bodyPr rtlCol="0" anchor="ctr"/>
-          <a:lstStyle/>
-          <a:p>
-            <a:pPr algn="ctr"/>
-          </a:p>
-        </p:txBody>
-      </p:sp>
-      <p:sp>
-        <p:nvSpPr>
-          <p:cNvPr id="13" name="TextBox 12"/>
-          <p:cNvSpPr txBox="1"/>
-          <p:nvPr/>
-        </p:nvSpPr>
-        <p:spPr>
-          <a:xfrm>
-            <a:off x="1005840" y="4270248"/>
-            <a:ext cx="10104120" cy="704088"/>
-          </a:xfrm>
-          <a:prstGeom prst="rect">
-            <a:avLst/>
-          </a:prstGeom>
-          <a:noFill/>
-        </p:spPr>
-        <p:txBody>
-          <a:bodyPr wrap="square" lIns="0" rIns="0">
-            <a:spAutoFit/>
-          </a:bodyPr>
-          <a:lstStyle/>
-          <a:p>
-            <a:pPr>
-              <a:defRPr b="1" sz="1500">
-                <a:solidFill>
-                  <a:srgbClr val="1E2761"/>
-                </a:solidFill>
-                <a:latin typeface="Aptos Display"/>
-              </a:defRPr>
-            </a:pPr>
-            <a:r>
-              <a:t>Lab connection</a:t>
-            </a:r>
-          </a:p>
-          <a:p>
-            <a:pPr>
-              <a:spcBef>
-                <a:spcPts val="400"/>
-              </a:spcBef>
-              <a:defRPr sz="1050">
-                <a:solidFill>
-                  <a:srgbClr val="242424"/>
-                </a:solidFill>
-                <a:latin typeface="Aptos"/>
-              </a:defRPr>
-            </a:pPr>
-            <a:r>
-              <a:t>Coverage: Covered. Use the lab README to demonstrate or discuss this topic. Review terms: inputs, invoking, testing.</a:t>
+              <a:t>In the lab, you will apply this pattern, validate the expected behavior, and discuss where it fits in a real Power BI solution.</a:t>
             </a:r>
           </a:p>
         </p:txBody>
@@ -14275,42 +13535,6 @@
       </p:sp>
       <p:sp>
         <p:nvSpPr>
-          <p:cNvPr id="4" name="TextBox 3"/>
-          <p:cNvSpPr txBox="1"/>
-          <p:nvPr/>
-        </p:nvSpPr>
-        <p:spPr>
-          <a:xfrm>
-            <a:off x="530352" y="914400"/>
-            <a:ext cx="10515600" cy="320040"/>
-          </a:xfrm>
-          <a:prstGeom prst="rect">
-            <a:avLst/>
-          </a:prstGeom>
-          <a:noFill/>
-        </p:spPr>
-        <p:txBody>
-          <a:bodyPr wrap="none">
-            <a:spAutoFit/>
-          </a:bodyPr>
-          <a:lstStyle/>
-          <a:p>
-            <a:pPr>
-              <a:defRPr sz="1200">
-                <a:solidFill>
-                  <a:srgbClr val="5C5C5C"/>
-                </a:solidFill>
-                <a:latin typeface="Aptos"/>
-              </a:defRPr>
-            </a:pPr>
-            <a:r>
-              <a:t>Talking points, learner value, and lab connection</a:t>
-            </a:r>
-          </a:p>
-        </p:txBody>
-      </p:sp>
-      <p:sp>
-        <p:nvSpPr>
           <p:cNvPr id="5" name="Rounded Rectangle 4"/>
           <p:cNvSpPr/>
           <p:nvPr/>
@@ -14428,7 +13652,143 @@
               </a:defRPr>
             </a:pPr>
             <a:r>
-              <a:t>Talking points</a:t>
+              <a:t>Key ideas</a:t>
+            </a:r>
+            <a:br/>
+            <a:r>
+              <a:t>• What folds</a:t>
+            </a:r>
+            <a:br/>
+            <a:r>
+              <a:t>• Why folding matters</a:t>
+            </a:r>
+            <a:br/>
+            <a:r>
+              <a:t>• View Native Query</a:t>
+            </a:r>
+          </a:p>
+        </p:txBody>
+      </p:sp>
+      <p:sp>
+        <p:nvSpPr>
+          <p:cNvPr id="8" name="Rounded Rectangle 7"/>
+          <p:cNvSpPr/>
+          <p:nvPr/>
+        </p:nvSpPr>
+        <p:spPr>
+          <a:xfrm>
+            <a:off x="6263640" y="1234440"/>
+            <a:ext cx="5303520" cy="1828800"/>
+          </a:xfrm>
+          <a:prstGeom prst="roundRect">
+            <a:avLst/>
+          </a:prstGeom>
+          <a:solidFill>
+            <a:srgbClr val="FFFFFF"/>
+          </a:solidFill>
+          <a:ln>
+            <a:solidFill>
+              <a:srgbClr val="DCDCDC"/>
+            </a:solidFill>
+          </a:ln>
+        </p:spPr>
+        <p:style>
+          <a:lnRef idx="1">
+            <a:schemeClr val="accent1"/>
+          </a:lnRef>
+          <a:fillRef idx="3">
+            <a:schemeClr val="accent1"/>
+          </a:fillRef>
+          <a:effectRef idx="2">
+            <a:schemeClr val="accent1"/>
+          </a:effectRef>
+          <a:fontRef idx="minor">
+            <a:schemeClr val="lt1"/>
+          </a:fontRef>
+        </p:style>
+        <p:txBody>
+          <a:bodyPr rtlCol="0" anchor="ctr"/>
+          <a:lstStyle/>
+          <a:p>
+            <a:pPr algn="ctr"/>
+          </a:p>
+        </p:txBody>
+      </p:sp>
+      <p:sp>
+        <p:nvSpPr>
+          <p:cNvPr id="9" name="Rectangle 8"/>
+          <p:cNvSpPr/>
+          <p:nvPr/>
+        </p:nvSpPr>
+        <p:spPr>
+          <a:xfrm>
+            <a:off x="6263640" y="1234440"/>
+            <a:ext cx="91440" cy="1828800"/>
+          </a:xfrm>
+          <a:prstGeom prst="rect">
+            <a:avLst/>
+          </a:prstGeom>
+          <a:solidFill>
+            <a:srgbClr val="02C39A"/>
+          </a:solidFill>
+          <a:ln>
+            <a:noFill/>
+          </a:ln>
+        </p:spPr>
+        <p:style>
+          <a:lnRef idx="1">
+            <a:schemeClr val="accent1"/>
+          </a:lnRef>
+          <a:fillRef idx="3">
+            <a:schemeClr val="accent1"/>
+          </a:fillRef>
+          <a:effectRef idx="2">
+            <a:schemeClr val="accent1"/>
+          </a:effectRef>
+          <a:fontRef idx="minor">
+            <a:schemeClr val="lt1"/>
+          </a:fontRef>
+        </p:style>
+        <p:txBody>
+          <a:bodyPr rtlCol="0" anchor="ctr"/>
+          <a:lstStyle/>
+          <a:p>
+            <a:pPr algn="ctr"/>
+          </a:p>
+        </p:txBody>
+      </p:sp>
+      <p:sp>
+        <p:nvSpPr>
+          <p:cNvPr id="10" name="TextBox 9"/>
+          <p:cNvSpPr txBox="1"/>
+          <p:nvPr/>
+        </p:nvSpPr>
+        <p:spPr>
+          <a:xfrm>
+            <a:off x="6446520" y="1344168"/>
+            <a:ext cx="4983480" cy="1664208"/>
+          </a:xfrm>
+          <a:prstGeom prst="rect">
+            <a:avLst/>
+          </a:prstGeom>
+          <a:noFill/>
+        </p:spPr>
+        <p:txBody>
+          <a:bodyPr wrap="square" lIns="0" rIns="0">
+            <a:spAutoFit/>
+          </a:bodyPr>
+          <a:lstStyle/>
+          <a:p>
+            <a:pPr>
+              <a:defRPr b="1" sz="1500">
+                <a:solidFill>
+                  <a:srgbClr val="1E2761"/>
+                </a:solidFill>
+                <a:latin typeface="Aptos Display"/>
+              </a:defRPr>
+            </a:pPr>
+            <a:r>
+              <a:t>Why it helps</a:t>
             </a:r>
           </a:p>
           <a:p>
@@ -14444,29 +13804,25 @@
               </a:defRPr>
             </a:pPr>
             <a:r>
-              <a:t>• What folds</a:t>
+              <a:t>• Folding blockers</a:t>
             </a:r>
             <a:br/>
             <a:r>
-              <a:t>• Why folding matters</a:t>
-            </a:r>
-            <a:br/>
-            <a:r>
-              <a:t>• View Native Query</a:t>
-            </a:r>
-          </a:p>
-        </p:txBody>
-      </p:sp>
-      <p:sp>
-        <p:nvSpPr>
-          <p:cNvPr id="8" name="Rounded Rectangle 7"/>
+              <a:t>• Connector dependency</a:t>
+            </a:r>
+          </a:p>
+        </p:txBody>
+      </p:sp>
+      <p:sp>
+        <p:nvSpPr>
+          <p:cNvPr id="11" name="Rounded Rectangle 10"/>
           <p:cNvSpPr/>
           <p:nvPr/>
         </p:nvSpPr>
         <p:spPr>
           <a:xfrm>
-            <a:off x="6263640" y="1234440"/>
-            <a:ext cx="5303520" cy="1828800"/>
+            <a:off x="822960" y="4160520"/>
+            <a:ext cx="10424160" cy="868680"/>
           </a:xfrm>
           <a:prstGeom prst="roundRect">
             <a:avLst/>
@@ -14504,20 +13860,20 @@
       </p:sp>
       <p:sp>
         <p:nvSpPr>
-          <p:cNvPr id="9" name="Rectangle 8"/>
+          <p:cNvPr id="12" name="Rectangle 11"/>
           <p:cNvSpPr/>
           <p:nvPr/>
         </p:nvSpPr>
         <p:spPr>
           <a:xfrm>
-            <a:off x="6263640" y="1234440"/>
-            <a:ext cx="91440" cy="1828800"/>
+            <a:off x="822960" y="4160520"/>
+            <a:ext cx="91440" cy="868680"/>
           </a:xfrm>
           <a:prstGeom prst="rect">
             <a:avLst/>
           </a:prstGeom>
           <a:solidFill>
-            <a:srgbClr val="02C39A"/>
+            <a:srgbClr val="F9B700"/>
           </a:solidFill>
           <a:ln>
             <a:noFill/>
@@ -14547,14 +13903,14 @@
       </p:sp>
       <p:sp>
         <p:nvSpPr>
-          <p:cNvPr id="10" name="TextBox 9"/>
+          <p:cNvPr id="13" name="TextBox 12"/>
           <p:cNvSpPr txBox="1"/>
           <p:nvPr/>
         </p:nvSpPr>
         <p:spPr>
           <a:xfrm>
-            <a:off x="6446520" y="1344168"/>
-            <a:ext cx="4983480" cy="1664208"/>
+            <a:off x="1005840" y="4270248"/>
+            <a:ext cx="10104120" cy="704088"/>
           </a:xfrm>
           <a:prstGeom prst="rect">
             <a:avLst/>
@@ -14576,167 +13932,7 @@
               </a:defRPr>
             </a:pPr>
             <a:r>
-              <a:t>Why it helps</a:t>
-            </a:r>
-          </a:p>
-          <a:p>
-            <a:pPr>
-              <a:spcBef>
-                <a:spcPts val="400"/>
-              </a:spcBef>
-              <a:defRPr sz="1050">
-                <a:solidFill>
-                  <a:srgbClr val="242424"/>
-                </a:solidFill>
-                <a:latin typeface="Aptos"/>
-              </a:defRPr>
-            </a:pPr>
-            <a:r>
-              <a:t>• Folding blockers</a:t>
-            </a:r>
-            <a:br/>
-            <a:r>
-              <a:t>• Connector dependency</a:t>
-            </a:r>
-          </a:p>
-        </p:txBody>
-      </p:sp>
-      <p:sp>
-        <p:nvSpPr>
-          <p:cNvPr id="11" name="Rounded Rectangle 10"/>
-          <p:cNvSpPr/>
-          <p:nvPr/>
-        </p:nvSpPr>
-        <p:spPr>
-          <a:xfrm>
-            <a:off x="822960" y="4160520"/>
-            <a:ext cx="10424160" cy="868680"/>
-          </a:xfrm>
-          <a:prstGeom prst="roundRect">
-            <a:avLst/>
-          </a:prstGeom>
-          <a:solidFill>
-            <a:srgbClr val="FFFFFF"/>
-          </a:solidFill>
-          <a:ln>
-            <a:solidFill>
-              <a:srgbClr val="DCDCDC"/>
-            </a:solidFill>
-          </a:ln>
-        </p:spPr>
-        <p:style>
-          <a:lnRef idx="1">
-            <a:schemeClr val="accent1"/>
-          </a:lnRef>
-          <a:fillRef idx="3">
-            <a:schemeClr val="accent1"/>
-          </a:fillRef>
-          <a:effectRef idx="2">
-            <a:schemeClr val="accent1"/>
-          </a:effectRef>
-          <a:fontRef idx="minor">
-            <a:schemeClr val="lt1"/>
-          </a:fontRef>
-        </p:style>
-        <p:txBody>
-          <a:bodyPr rtlCol="0" anchor="ctr"/>
-          <a:lstStyle/>
-          <a:p>
-            <a:pPr algn="ctr"/>
-          </a:p>
-        </p:txBody>
-      </p:sp>
-      <p:sp>
-        <p:nvSpPr>
-          <p:cNvPr id="12" name="Rectangle 11"/>
-          <p:cNvSpPr/>
-          <p:nvPr/>
-        </p:nvSpPr>
-        <p:spPr>
-          <a:xfrm>
-            <a:off x="822960" y="4160520"/>
-            <a:ext cx="91440" cy="868680"/>
-          </a:xfrm>
-          <a:prstGeom prst="rect">
-            <a:avLst/>
-          </a:prstGeom>
-          <a:solidFill>
-            <a:srgbClr val="F9B700"/>
-          </a:solidFill>
-          <a:ln>
-            <a:noFill/>
-          </a:ln>
-        </p:spPr>
-        <p:style>
-          <a:lnRef idx="1">
-            <a:schemeClr val="accent1"/>
-          </a:lnRef>
-          <a:fillRef idx="3">
-            <a:schemeClr val="accent1"/>
-          </a:fillRef>
-          <a:effectRef idx="2">
-            <a:schemeClr val="accent1"/>
-          </a:effectRef>
-          <a:fontRef idx="minor">
-            <a:schemeClr val="lt1"/>
-          </a:fontRef>
-        </p:style>
-        <p:txBody>
-          <a:bodyPr rtlCol="0" anchor="ctr"/>
-          <a:lstStyle/>
-          <a:p>
-            <a:pPr algn="ctr"/>
-          </a:p>
-        </p:txBody>
-      </p:sp>
-      <p:sp>
-        <p:nvSpPr>
-          <p:cNvPr id="13" name="TextBox 12"/>
-          <p:cNvSpPr txBox="1"/>
-          <p:nvPr/>
-        </p:nvSpPr>
-        <p:spPr>
-          <a:xfrm>
-            <a:off x="1005840" y="4270248"/>
-            <a:ext cx="10104120" cy="704088"/>
-          </a:xfrm>
-          <a:prstGeom prst="rect">
-            <a:avLst/>
-          </a:prstGeom>
-          <a:noFill/>
-        </p:spPr>
-        <p:txBody>
-          <a:bodyPr wrap="square" lIns="0" rIns="0">
-            <a:spAutoFit/>
-          </a:bodyPr>
-          <a:lstStyle/>
-          <a:p>
-            <a:pPr>
-              <a:defRPr b="1" sz="1500">
-                <a:solidFill>
-                  <a:srgbClr val="1E2761"/>
-                </a:solidFill>
-                <a:latin typeface="Aptos Display"/>
-              </a:defRPr>
-            </a:pPr>
-            <a:r>
-              <a:t>Lab connection</a:t>
-            </a:r>
-          </a:p>
-          <a:p>
-            <a:pPr>
-              <a:spcBef>
-                <a:spcPts val="400"/>
-              </a:spcBef>
-              <a:defRPr sz="1050">
-                <a:solidFill>
-                  <a:srgbClr val="242424"/>
-                </a:solidFill>
-                <a:latin typeface="Aptos"/>
-              </a:defRPr>
-            </a:pPr>
-            <a:r>
-              <a:t>Coverage: Partial. Use the lab README to demonstrate or discuss this topic. Review terms: blockers, dependency, folds, matters.</a:t>
+              <a:t>In the lab, you will apply this pattern, validate the expected behavior, and discuss where it fits in a real Power BI solution.</a:t>
             </a:r>
           </a:p>
         </p:txBody>
